--- a/slides/refusal_neurons_update.pptx
+++ b/slides/refusal_neurons_update.pptx
@@ -4266,7 +4266,7 @@
           <a:p>
             <a:r>
               <a:rPr lang="en-US" dirty="0"/>
-              <a:t>The shrink step of the MLP block turns the 12,288 neuron values back into 4,096 numbers. Mathematically it is a sum: MLP output = h1 times v1 plus h2 times v2 and so on up to h12288 times v12288. h is the neuron's value, which changes with the prompt. v is a fixed list of 4,096 numbers learned in training: one column of the shrink matrix, called down_proj in the code. So when a neuron fires, it adds its own fixed arrow v to the residual stream, scaled by how strongly it fires. That arrow is the neuron's write vector: the direction it pushes the residual stream in. A refusal direction also lives in the residual stream, so we can ask whether a neuron's arrow points the same way as the refusal direction.</a:t>
+              <a:t>Left: the MLP block exactly as it is written in Hugging Face transformers for Qwen3. gate_proj and up_proj expand the 4,096 numbers to 12,288; act_fn is the squash; down_proj shrinks back to 4,096. The thing passed into down_proj is the 12,288 neurons, h. Right: what we do with it. We hook the input of down_proj to read the neurons or pin one. Neuron 7924's write vector is column 7924 of down_proj's weight matrix: 4,096 fixed numbers learned in training. down_proj multiplies that matrix by h, which is the same as adding up h[i] times column i over all 12,288 neurons. So neuron 7924 adds h[7924] times its own fixed column to the residual stream: its write vector, scaled by how strongly it fires.</a:t>
             </a:r>
             <a:endParaRPr lang="en-US" dirty="0"/>
           </a:p>
@@ -21982,8 +21982,8 @@
         </p:nvSpPr>
         <p:spPr>
           <a:xfrm>
-            <a:off x="548640" y="1600200"/>
-            <a:ext cx="11094415" cy="731520"/>
+            <a:off x="548640" y="1417320"/>
+            <a:ext cx="5989320" cy="274320"/>
           </a:xfrm>
           <a:prstGeom prst="rect">
             <a:avLst/>
@@ -21995,21 +21995,21 @@
           <a:bodyPr wrap="square" lIns="0" tIns="0" rIns="0" bIns="0" rtlCol="0" anchor="ctr"/>
           <a:lstStyle/>
           <a:p>
-            <a:pPr algn="ctr" indent="0" marL="0">
-              <a:buNone/>
-            </a:pPr>
-            <a:r>
-              <a:rPr lang="en-US" sz="2800" b="1" dirty="0">
-                <a:solidFill>
-                  <a:srgbClr val="1F2328"/>
-                </a:solidFill>
-                <a:latin typeface="Arial" pitchFamily="34" charset="0"/>
-                <a:ea typeface="Arial" pitchFamily="34" charset="-122"/>
-                <a:cs typeface="Arial" pitchFamily="34" charset="-120"/>
-              </a:rPr>
-              <a:t>MLP output  =  h₁·v₁  +  h₂·v₂  +  …  +  h₁₂₂₈₈·v₁₂₂₈₈</a:t>
-            </a:r>
-            <a:endParaRPr lang="en-US" sz="2800" dirty="0"/>
+            <a:pPr indent="0" marL="0">
+              <a:buNone/>
+            </a:pPr>
+            <a:r>
+              <a:rPr lang="en-US" sz="1200" b="1" spc="100" kern="0" dirty="0">
+                <a:solidFill>
+                  <a:srgbClr val="5F6B7A"/>
+                </a:solidFill>
+                <a:latin typeface="Arial" pitchFamily="34" charset="0"/>
+                <a:ea typeface="Arial" pitchFamily="34" charset="-122"/>
+                <a:cs typeface="Arial" pitchFamily="34" charset="-120"/>
+              </a:rPr>
+              <a:t>TRANSFORMERS LIBRARY, QWEN3 (8B SIZES FILLED IN)</a:t>
+            </a:r>
+            <a:endParaRPr lang="en-US" sz="1200" dirty="0"/>
           </a:p>
         </p:txBody>
       </p:sp>
@@ -22021,20 +22021,20 @@
         </p:nvSpPr>
         <p:spPr>
           <a:xfrm>
-            <a:off x="548640" y="2651760"/>
-            <a:ext cx="5394960" cy="1737360"/>
+            <a:off x="548640" y="1737360"/>
+            <a:ext cx="5989320" cy="3246120"/>
           </a:xfrm>
           <a:prstGeom prst="roundRect">
             <a:avLst>
-              <a:gd name="adj" fmla="val 4211"/>
+              <a:gd name="adj" fmla="val 1690"/>
             </a:avLst>
           </a:prstGeom>
           <a:solidFill>
-            <a:srgbClr val="F4F6F9"/>
+            <a:srgbClr val="1E2329"/>
           </a:solidFill>
           <a:ln w="12700">
             <a:solidFill>
-              <a:srgbClr val="D8DEE6"/>
+              <a:srgbClr val="1E2329"/>
             </a:solidFill>
             <a:prstDash val="solid"/>
           </a:ln>
@@ -22048,8 +22048,8 @@
         </p:nvSpPr>
         <p:spPr>
           <a:xfrm>
-            <a:off x="777240" y="2743200"/>
-            <a:ext cx="4937760" cy="411480"/>
+            <a:off x="731520" y="1828800"/>
+            <a:ext cx="5669280" cy="3063240"/>
           </a:xfrm>
           <a:prstGeom prst="rect">
             <a:avLst/>
@@ -22058,24 +22058,236 @@
           <a:ln/>
         </p:spPr>
         <p:txBody>
-          <a:bodyPr wrap="square" lIns="0" tIns="0" rIns="0" bIns="0" rtlCol="0" anchor="ctr"/>
+          <a:bodyPr wrap="square" lIns="0" tIns="0" rIns="0" bIns="0" rtlCol="0" anchor="t"/>
           <a:lstStyle/>
           <a:p>
             <a:pPr indent="0" marL="0">
-              <a:buNone/>
-            </a:pPr>
-            <a:r>
-              <a:rPr lang="en-US" sz="1800" b="1" dirty="0">
-                <a:solidFill>
-                  <a:srgbClr val="1F2328"/>
-                </a:solidFill>
-                <a:latin typeface="Arial" pitchFamily="34" charset="0"/>
-                <a:ea typeface="Arial" pitchFamily="34" charset="-122"/>
-                <a:cs typeface="Arial" pitchFamily="34" charset="-120"/>
-              </a:rPr>
-              <a:t>h = the neuron's value</a:t>
-            </a:r>
-            <a:endParaRPr lang="en-US" sz="1800" dirty="0"/>
+              <a:spcAft>
+                <a:spcPts val="300"/>
+              </a:spcAft>
+              <a:buNone/>
+            </a:pPr>
+            <a:r>
+              <a:rPr lang="en-US" sz="1200" dirty="0">
+                <a:solidFill>
+                  <a:srgbClr val="E6EDF3"/>
+                </a:solidFill>
+                <a:latin typeface="Courier New" pitchFamily="34" charset="0"/>
+                <a:ea typeface="Courier New" pitchFamily="34" charset="-122"/>
+                <a:cs typeface="Courier New" pitchFamily="34" charset="-120"/>
+              </a:rPr>
+              <a:t>class Qwen3MLP(nn.Module):</a:t>
+            </a:r>
+            <a:endParaRPr lang="en-US" sz="1200" dirty="0"/>
+          </a:p>
+          <a:p>
+            <a:pPr indent="0" marL="0">
+              <a:spcAft>
+                <a:spcPts val="300"/>
+              </a:spcAft>
+              <a:buNone/>
+            </a:pPr>
+            <a:r>
+              <a:rPr lang="en-US" sz="1200" dirty="0">
+                <a:solidFill>
+                  <a:srgbClr val="E6EDF3"/>
+                </a:solidFill>
+                <a:latin typeface="Courier New" pitchFamily="34" charset="0"/>
+                <a:ea typeface="Courier New" pitchFamily="34" charset="-122"/>
+                <a:cs typeface="Courier New" pitchFamily="34" charset="-120"/>
+              </a:rPr>
+              <a:t>    def __init__(self, config):</a:t>
+            </a:r>
+            <a:endParaRPr lang="en-US" sz="1200" dirty="0"/>
+          </a:p>
+          <a:p>
+            <a:pPr indent="0" marL="0">
+              <a:spcAft>
+                <a:spcPts val="300"/>
+              </a:spcAft>
+              <a:buNone/>
+            </a:pPr>
+            <a:r>
+              <a:rPr lang="en-US" sz="1200" dirty="0">
+                <a:solidFill>
+                  <a:srgbClr val="E6EDF3"/>
+                </a:solidFill>
+                <a:latin typeface="Courier New" pitchFamily="34" charset="0"/>
+                <a:ea typeface="Courier New" pitchFamily="34" charset="-122"/>
+                <a:cs typeface="Courier New" pitchFamily="34" charset="-120"/>
+              </a:rPr>
+              <a:t>        self.gate_proj = nn.Linear(4096, 12288)  # expand</a:t>
+            </a:r>
+            <a:endParaRPr lang="en-US" sz="1200" dirty="0"/>
+          </a:p>
+          <a:p>
+            <a:pPr indent="0" marL="0">
+              <a:spcAft>
+                <a:spcPts val="300"/>
+              </a:spcAft>
+              <a:buNone/>
+            </a:pPr>
+            <a:r>
+              <a:rPr lang="en-US" sz="1200" dirty="0">
+                <a:solidFill>
+                  <a:srgbClr val="E6EDF3"/>
+                </a:solidFill>
+                <a:latin typeface="Courier New" pitchFamily="34" charset="0"/>
+                <a:ea typeface="Courier New" pitchFamily="34" charset="-122"/>
+                <a:cs typeface="Courier New" pitchFamily="34" charset="-120"/>
+              </a:rPr>
+              <a:t>        self.up_proj   = nn.Linear(4096, 12288)  # expand</a:t>
+            </a:r>
+            <a:endParaRPr lang="en-US" sz="1200" dirty="0"/>
+          </a:p>
+          <a:p>
+            <a:pPr indent="0" marL="0">
+              <a:spcAft>
+                <a:spcPts val="300"/>
+              </a:spcAft>
+              <a:buNone/>
+            </a:pPr>
+            <a:r>
+              <a:rPr lang="en-US" sz="1200" b="1" dirty="0">
+                <a:solidFill>
+                  <a:srgbClr val="F2A97F"/>
+                </a:solidFill>
+                <a:latin typeface="Courier New" pitchFamily="34" charset="0"/>
+                <a:ea typeface="Courier New" pitchFamily="34" charset="-122"/>
+                <a:cs typeface="Courier New" pitchFamily="34" charset="-120"/>
+              </a:rPr>
+              <a:t>        self.down_proj = nn.Linear(12288, 4096)  # shrink</a:t>
+            </a:r>
+            <a:endParaRPr lang="en-US" sz="1200" dirty="0"/>
+          </a:p>
+          <a:p>
+            <a:pPr indent="0" marL="0">
+              <a:spcAft>
+                <a:spcPts val="300"/>
+              </a:spcAft>
+              <a:buNone/>
+            </a:pPr>
+            <a:r>
+              <a:rPr lang="en-US" sz="1200" dirty="0">
+                <a:solidFill>
+                  <a:srgbClr val="E6EDF3"/>
+                </a:solidFill>
+                <a:latin typeface="Courier New" pitchFamily="34" charset="0"/>
+                <a:ea typeface="Courier New" pitchFamily="34" charset="-122"/>
+                <a:cs typeface="Courier New" pitchFamily="34" charset="-120"/>
+              </a:rPr>
+              <a:t>        self.act_fn    = SiLU                    # squash</a:t>
+            </a:r>
+            <a:endParaRPr lang="en-US" sz="1200" dirty="0"/>
+          </a:p>
+          <a:p>
+            <a:pPr indent="0" marL="0">
+              <a:spcAft>
+                <a:spcPts val="300"/>
+              </a:spcAft>
+              <a:buNone/>
+            </a:pPr>
+            <a:endParaRPr lang="en-US" sz="1200" dirty="0"/>
+          </a:p>
+          <a:p>
+            <a:pPr indent="0" marL="0">
+              <a:spcAft>
+                <a:spcPts val="300"/>
+              </a:spcAft>
+              <a:buNone/>
+            </a:pPr>
+            <a:r>
+              <a:rPr lang="en-US" sz="1200" dirty="0">
+                <a:solidFill>
+                  <a:srgbClr val="E6EDF3"/>
+                </a:solidFill>
+                <a:latin typeface="Courier New" pitchFamily="34" charset="0"/>
+                <a:ea typeface="Courier New" pitchFamily="34" charset="-122"/>
+                <a:cs typeface="Courier New" pitchFamily="34" charset="-120"/>
+              </a:rPr>
+              <a:t>    def forward(self, x):          # x = 4,096 numbers</a:t>
+            </a:r>
+            <a:endParaRPr lang="en-US" sz="1200" dirty="0"/>
+          </a:p>
+          <a:p>
+            <a:pPr indent="0" marL="0">
+              <a:spcAft>
+                <a:spcPts val="300"/>
+              </a:spcAft>
+              <a:buNone/>
+            </a:pPr>
+            <a:r>
+              <a:rPr lang="en-US" sz="1200" dirty="0">
+                <a:solidFill>
+                  <a:srgbClr val="E6EDF3"/>
+                </a:solidFill>
+                <a:latin typeface="Courier New" pitchFamily="34" charset="0"/>
+                <a:ea typeface="Courier New" pitchFamily="34" charset="-122"/>
+                <a:cs typeface="Courier New" pitchFamily="34" charset="-120"/>
+              </a:rPr>
+              <a:t>        down_proj = self.down_proj(</a:t>
+            </a:r>
+            <a:endParaRPr lang="en-US" sz="1200" dirty="0"/>
+          </a:p>
+          <a:p>
+            <a:pPr indent="0" marL="0">
+              <a:spcAft>
+                <a:spcPts val="300"/>
+              </a:spcAft>
+              <a:buNone/>
+            </a:pPr>
+            <a:r>
+              <a:rPr lang="en-US" sz="1200" b="1" dirty="0">
+                <a:solidFill>
+                  <a:srgbClr val="F2A97F"/>
+                </a:solidFill>
+                <a:latin typeface="Courier New" pitchFamily="34" charset="0"/>
+                <a:ea typeface="Courier New" pitchFamily="34" charset="-122"/>
+                <a:cs typeface="Courier New" pitchFamily="34" charset="-120"/>
+              </a:rPr>
+              <a:t>          self.act_fn(self.gate_proj(x)) * self.up_proj(x))</a:t>
+            </a:r>
+            <a:endParaRPr lang="en-US" sz="1200" dirty="0"/>
+          </a:p>
+          <a:p>
+            <a:pPr indent="0" marL="0">
+              <a:spcAft>
+                <a:spcPts val="300"/>
+              </a:spcAft>
+              <a:buNone/>
+            </a:pPr>
+            <a:r>
+              <a:rPr lang="en-US" sz="1200" dirty="0">
+                <a:solidFill>
+                  <a:srgbClr val="8B98A8"/>
+                </a:solidFill>
+                <a:latin typeface="Courier New" pitchFamily="34" charset="0"/>
+                <a:ea typeface="Courier New" pitchFamily="34" charset="-122"/>
+                <a:cs typeface="Courier New" pitchFamily="34" charset="-120"/>
+              </a:rPr>
+              <a:t>        #   ↑ this product = the 12,288 neurons (call it h)</a:t>
+            </a:r>
+            <a:endParaRPr lang="en-US" sz="1200" dirty="0"/>
+          </a:p>
+          <a:p>
+            <a:pPr indent="0" marL="0">
+              <a:spcAft>
+                <a:spcPts val="300"/>
+              </a:spcAft>
+              <a:buNone/>
+            </a:pPr>
+            <a:r>
+              <a:rPr lang="en-US" sz="1200" dirty="0">
+                <a:solidFill>
+                  <a:srgbClr val="E6EDF3"/>
+                </a:solidFill>
+                <a:latin typeface="Courier New" pitchFamily="34" charset="0"/>
+                <a:ea typeface="Courier New" pitchFamily="34" charset="-122"/>
+                <a:cs typeface="Courier New" pitchFamily="34" charset="-120"/>
+              </a:rPr>
+              <a:t>        return down_proj           # back to 4,096 numbers</a:t>
+            </a:r>
+            <a:endParaRPr lang="en-US" sz="1200" dirty="0"/>
           </a:p>
         </p:txBody>
       </p:sp>
@@ -22087,8 +22299,8 @@
         </p:nvSpPr>
         <p:spPr>
           <a:xfrm>
-            <a:off x="777240" y="3200400"/>
-            <a:ext cx="4937760" cy="1097280"/>
+            <a:off x="6720840" y="1417320"/>
+            <a:ext cx="4922215" cy="274320"/>
           </a:xfrm>
           <a:prstGeom prst="rect">
             <a:avLst/>
@@ -22097,24 +22309,24 @@
           <a:ln/>
         </p:spPr>
         <p:txBody>
-          <a:bodyPr wrap="square" lIns="0" tIns="0" rIns="0" bIns="0" rtlCol="0" anchor="t"/>
+          <a:bodyPr wrap="square" lIns="0" tIns="0" rIns="0" bIns="0" rtlCol="0" anchor="ctr"/>
           <a:lstStyle/>
           <a:p>
             <a:pPr indent="0" marL="0">
               <a:buNone/>
             </a:pPr>
             <a:r>
-              <a:rPr lang="en-US" sz="1500" dirty="0">
-                <a:solidFill>
-                  <a:srgbClr val="1F2328"/>
-                </a:solidFill>
-                <a:latin typeface="Arial" pitchFamily="34" charset="0"/>
-                <a:ea typeface="Arial" pitchFamily="34" charset="-122"/>
-                <a:cs typeface="Arial" pitchFamily="34" charset="-120"/>
-              </a:rPr>
-              <a:t>Changes with every prompt. For L14:F7924: about −4.4 on a harmful request, about 0 on a normal one.</a:t>
-            </a:r>
-            <a:endParaRPr lang="en-US" sz="1500" dirty="0"/>
+              <a:rPr lang="en-US" sz="1200" b="1" spc="100" kern="0" dirty="0">
+                <a:solidFill>
+                  <a:srgbClr val="5F6B7A"/>
+                </a:solidFill>
+                <a:latin typeface="Arial" pitchFamily="34" charset="0"/>
+                <a:ea typeface="Arial" pitchFamily="34" charset="-122"/>
+                <a:cs typeface="Arial" pitchFamily="34" charset="-120"/>
+              </a:rPr>
+              <a:t>WHAT WE DO WITH IT (OUR CODE)</a:t>
+            </a:r>
+            <a:endParaRPr lang="en-US" sz="1200" dirty="0"/>
           </a:p>
         </p:txBody>
       </p:sp>
@@ -22126,20 +22338,20 @@
         </p:nvSpPr>
         <p:spPr>
           <a:xfrm>
-            <a:off x="6245352" y="2651760"/>
-            <a:ext cx="5394960" cy="1737360"/>
+            <a:off x="6720840" y="1737360"/>
+            <a:ext cx="4922215" cy="3246120"/>
           </a:xfrm>
           <a:prstGeom prst="roundRect">
             <a:avLst>
-              <a:gd name="adj" fmla="val 4211"/>
+              <a:gd name="adj" fmla="val 1690"/>
             </a:avLst>
           </a:prstGeom>
           <a:solidFill>
-            <a:srgbClr val="F4F6F9"/>
+            <a:srgbClr val="1E2329"/>
           </a:solidFill>
           <a:ln w="12700">
             <a:solidFill>
-              <a:srgbClr val="D8DEE6"/>
+              <a:srgbClr val="1E2329"/>
             </a:solidFill>
             <a:prstDash val="solid"/>
           </a:ln>
@@ -22153,8 +22365,8 @@
         </p:nvSpPr>
         <p:spPr>
           <a:xfrm>
-            <a:off x="6473952" y="2743200"/>
-            <a:ext cx="4937760" cy="411480"/>
+            <a:off x="6903720" y="1828800"/>
+            <a:ext cx="4602175" cy="3063240"/>
           </a:xfrm>
           <a:prstGeom prst="rect">
             <a:avLst/>
@@ -22163,24 +22375,205 @@
           <a:ln/>
         </p:spPr>
         <p:txBody>
-          <a:bodyPr wrap="square" lIns="0" tIns="0" rIns="0" bIns="0" rtlCol="0" anchor="ctr"/>
+          <a:bodyPr wrap="square" lIns="0" tIns="0" rIns="0" bIns="0" rtlCol="0" anchor="t"/>
           <a:lstStyle/>
           <a:p>
             <a:pPr indent="0" marL="0">
-              <a:buNone/>
-            </a:pPr>
-            <a:r>
-              <a:rPr lang="en-US" sz="1800" b="1" dirty="0">
-                <a:solidFill>
-                  <a:srgbClr val="1F2328"/>
-                </a:solidFill>
-                <a:latin typeface="Arial" pitchFamily="34" charset="0"/>
-                <a:ea typeface="Arial" pitchFamily="34" charset="-122"/>
-                <a:cs typeface="Arial" pitchFamily="34" charset="-120"/>
-              </a:rPr>
-              <a:t>v = its write vector</a:t>
-            </a:r>
-            <a:endParaRPr lang="en-US" sz="1800" dirty="0"/>
+              <a:spcAft>
+                <a:spcPts val="300"/>
+              </a:spcAft>
+              <a:buNone/>
+            </a:pPr>
+            <a:r>
+              <a:rPr lang="en-US" sz="1200" dirty="0">
+                <a:solidFill>
+                  <a:srgbClr val="E6EDF3"/>
+                </a:solidFill>
+                <a:latin typeface="Courier New" pitchFamily="34" charset="0"/>
+                <a:ea typeface="Courier New" pitchFamily="34" charset="-122"/>
+                <a:cs typeface="Courier New" pitchFamily="34" charset="-120"/>
+              </a:rPr>
+              <a:t>mlp = model.model.layers[14].mlp</a:t>
+            </a:r>
+            <a:endParaRPr lang="en-US" sz="1200" dirty="0"/>
+          </a:p>
+          <a:p>
+            <a:pPr indent="0" marL="0">
+              <a:spcAft>
+                <a:spcPts val="300"/>
+              </a:spcAft>
+              <a:buNone/>
+            </a:pPr>
+            <a:endParaRPr lang="en-US" sz="1200" dirty="0"/>
+          </a:p>
+          <a:p>
+            <a:pPr indent="0" marL="0">
+              <a:spcAft>
+                <a:spcPts val="300"/>
+              </a:spcAft>
+              <a:buNone/>
+            </a:pPr>
+            <a:r>
+              <a:rPr lang="en-US" sz="1200" dirty="0">
+                <a:solidFill>
+                  <a:srgbClr val="8B98A8"/>
+                </a:solidFill>
+                <a:latin typeface="Courier New" pitchFamily="34" charset="0"/>
+                <a:ea typeface="Courier New" pitchFamily="34" charset="-122"/>
+                <a:cs typeface="Courier New" pitchFamily="34" charset="-120"/>
+              </a:rPr>
+              <a:t># read or pin the neurons: hook the</a:t>
+            </a:r>
+            <a:endParaRPr lang="en-US" sz="1200" dirty="0"/>
+          </a:p>
+          <a:p>
+            <a:pPr indent="0" marL="0">
+              <a:spcAft>
+                <a:spcPts val="300"/>
+              </a:spcAft>
+              <a:buNone/>
+            </a:pPr>
+            <a:r>
+              <a:rPr lang="en-US" sz="1200" dirty="0">
+                <a:solidFill>
+                  <a:srgbClr val="8B98A8"/>
+                </a:solidFill>
+                <a:latin typeface="Courier New" pitchFamily="34" charset="0"/>
+                <a:ea typeface="Courier New" pitchFamily="34" charset="-122"/>
+                <a:cs typeface="Courier New" pitchFamily="34" charset="-120"/>
+              </a:rPr>
+              <a:t># input of down_proj (= h)</a:t>
+            </a:r>
+            <a:endParaRPr lang="en-US" sz="1200" dirty="0"/>
+          </a:p>
+          <a:p>
+            <a:pPr indent="0" marL="0">
+              <a:spcAft>
+                <a:spcPts val="300"/>
+              </a:spcAft>
+              <a:buNone/>
+            </a:pPr>
+            <a:r>
+              <a:rPr lang="en-US" sz="1200" dirty="0">
+                <a:solidFill>
+                  <a:srgbClr val="E6EDF3"/>
+                </a:solidFill>
+                <a:latin typeface="Courier New" pitchFamily="34" charset="0"/>
+                <a:ea typeface="Courier New" pitchFamily="34" charset="-122"/>
+                <a:cs typeface="Courier New" pitchFamily="34" charset="-120"/>
+              </a:rPr>
+              <a:t>mlp.down_proj.register_forward_pre_hook(</a:t>
+            </a:r>
+            <a:endParaRPr lang="en-US" sz="1200" dirty="0"/>
+          </a:p>
+          <a:p>
+            <a:pPr indent="0" marL="0">
+              <a:spcAft>
+                <a:spcPts val="300"/>
+              </a:spcAft>
+              <a:buNone/>
+            </a:pPr>
+            <a:r>
+              <a:rPr lang="en-US" sz="1200" b="1" dirty="0">
+                <a:solidFill>
+                  <a:srgbClr val="F2A97F"/>
+                </a:solidFill>
+                <a:latin typeface="Courier New" pitchFamily="34" charset="0"/>
+                <a:ea typeface="Courier New" pitchFamily="34" charset="-122"/>
+                <a:cs typeface="Courier New" pitchFamily="34" charset="-120"/>
+              </a:rPr>
+              <a:t>    hook)   # e.g. h[..., 7924] = 20</a:t>
+            </a:r>
+            <a:endParaRPr lang="en-US" sz="1200" dirty="0"/>
+          </a:p>
+          <a:p>
+            <a:pPr indent="0" marL="0">
+              <a:spcAft>
+                <a:spcPts val="300"/>
+              </a:spcAft>
+              <a:buNone/>
+            </a:pPr>
+            <a:endParaRPr lang="en-US" sz="1200" dirty="0"/>
+          </a:p>
+          <a:p>
+            <a:pPr indent="0" marL="0">
+              <a:spcAft>
+                <a:spcPts val="300"/>
+              </a:spcAft>
+              <a:buNone/>
+            </a:pPr>
+            <a:r>
+              <a:rPr lang="en-US" sz="1200" dirty="0">
+                <a:solidFill>
+                  <a:srgbClr val="8B98A8"/>
+                </a:solidFill>
+                <a:latin typeface="Courier New" pitchFamily="34" charset="0"/>
+                <a:ea typeface="Courier New" pitchFamily="34" charset="-122"/>
+                <a:cs typeface="Courier New" pitchFamily="34" charset="-120"/>
+              </a:rPr>
+              <a:t># neuron 7924's write vector:</a:t>
+            </a:r>
+            <a:endParaRPr lang="en-US" sz="1200" dirty="0"/>
+          </a:p>
+          <a:p>
+            <a:pPr indent="0" marL="0">
+              <a:spcAft>
+                <a:spcPts val="300"/>
+              </a:spcAft>
+              <a:buNone/>
+            </a:pPr>
+            <a:r>
+              <a:rPr lang="en-US" sz="1200" dirty="0">
+                <a:solidFill>
+                  <a:srgbClr val="8B98A8"/>
+                </a:solidFill>
+                <a:latin typeface="Courier New" pitchFamily="34" charset="0"/>
+                <a:ea typeface="Courier New" pitchFamily="34" charset="-122"/>
+                <a:cs typeface="Courier New" pitchFamily="34" charset="-120"/>
+              </a:rPr>
+              <a:t># column 7924 of down_proj's weight</a:t>
+            </a:r>
+            <a:endParaRPr lang="en-US" sz="1200" dirty="0"/>
+          </a:p>
+          <a:p>
+            <a:pPr indent="0" marL="0">
+              <a:spcAft>
+                <a:spcPts val="300"/>
+              </a:spcAft>
+              <a:buNone/>
+            </a:pPr>
+            <a:r>
+              <a:rPr lang="en-US" sz="1200" b="1" dirty="0">
+                <a:solidFill>
+                  <a:srgbClr val="F2A97F"/>
+                </a:solidFill>
+                <a:latin typeface="Courier New" pitchFamily="34" charset="0"/>
+                <a:ea typeface="Courier New" pitchFamily="34" charset="-122"/>
+                <a:cs typeface="Courier New" pitchFamily="34" charset="-120"/>
+              </a:rPr>
+              <a:t>v = mlp.down_proj.weight[:, 7924]</a:t>
+            </a:r>
+            <a:endParaRPr lang="en-US" sz="1200" dirty="0"/>
+          </a:p>
+          <a:p>
+            <a:pPr indent="0" marL="0">
+              <a:spcAft>
+                <a:spcPts val="300"/>
+              </a:spcAft>
+              <a:buNone/>
+            </a:pPr>
+            <a:r>
+              <a:rPr lang="en-US" sz="1200" dirty="0">
+                <a:solidFill>
+                  <a:srgbClr val="8B98A8"/>
+                </a:solidFill>
+                <a:latin typeface="Courier New" pitchFamily="34" charset="0"/>
+                <a:ea typeface="Courier New" pitchFamily="34" charset="-122"/>
+                <a:cs typeface="Courier New" pitchFamily="34" charset="-120"/>
+              </a:rPr>
+              <a:t>#  → 4,096 fixed numbers</a:t>
+            </a:r>
+            <a:endParaRPr lang="en-US" sz="1200" dirty="0"/>
           </a:p>
         </p:txBody>
       </p:sp>
@@ -22192,8 +22585,8 @@
         </p:nvSpPr>
         <p:spPr>
           <a:xfrm>
-            <a:off x="6473952" y="3200400"/>
-            <a:ext cx="4937760" cy="1097280"/>
+            <a:off x="548640" y="5120640"/>
+            <a:ext cx="11094415" cy="1005840"/>
           </a:xfrm>
           <a:prstGeom prst="rect">
             <a:avLst/>
@@ -22209,6 +22602,20 @@
               <a:buNone/>
             </a:pPr>
             <a:r>
+              <a:rPr lang="en-US" sz="1500" b="1" dirty="0">
+                <a:solidFill>
+                  <a:srgbClr val="1F2328"/>
+                </a:solidFill>
+                <a:latin typeface="Arial" pitchFamily="34" charset="0"/>
+                <a:ea typeface="Arial" pitchFamily="34" charset="-122"/>
+                <a:cs typeface="Arial" pitchFamily="34" charset="-120"/>
+              </a:rPr>
+              <a:t>down_proj(h) adds up h[i] × column i over all 12,288 neurons. </a:t>
+            </a:r>
+            <a:pPr indent="0" marL="0">
+              <a:buNone/>
+            </a:pPr>
+            <a:r>
               <a:rPr lang="en-US" sz="1500" dirty="0">
                 <a:solidFill>
                   <a:srgbClr val="1F2328"/>
@@ -22217,62 +22624,9 @@
                 <a:ea typeface="Arial" pitchFamily="34" charset="-122"/>
                 <a:cs typeface="Arial" pitchFamily="34" charset="-120"/>
               </a:rPr>
-              <a:t>A fixed list of 4,096 numbers, learned in training (one column of the “shrink” matrix, down_proj). Never changes.</a:t>
+              <a:t>So when neuron 7924 fires, it adds h[7924] × its own fixed column v to the residual stream: its write vector, scaled by how strongly it fires. The refusal direction lives in the same residual stream, so we can ask whether v points the same way.</a:t>
             </a:r>
             <a:endParaRPr lang="en-US" sz="1500" dirty="0"/>
-          </a:p>
-        </p:txBody>
-      </p:sp>
-      <p:sp>
-        <p:nvSpPr>
-          <p:cNvPr id="13" name="Text 10"/>
-          <p:cNvSpPr/>
-          <p:nvPr/>
-        </p:nvSpPr>
-        <p:spPr>
-          <a:xfrm>
-            <a:off x="548640" y="4663440"/>
-            <a:ext cx="11094415" cy="914400"/>
-          </a:xfrm>
-          <a:prstGeom prst="rect">
-            <a:avLst/>
-          </a:prstGeom>
-          <a:noFill/>
-          <a:ln/>
-        </p:spPr>
-        <p:txBody>
-          <a:bodyPr wrap="square" lIns="0" tIns="0" rIns="0" bIns="0" rtlCol="0" anchor="t"/>
-          <a:lstStyle/>
-          <a:p>
-            <a:pPr indent="0" marL="0">
-              <a:buNone/>
-            </a:pPr>
-            <a:r>
-              <a:rPr lang="en-US" sz="1700" b="1" dirty="0">
-                <a:solidFill>
-                  <a:srgbClr val="1F2328"/>
-                </a:solidFill>
-                <a:latin typeface="Arial" pitchFamily="34" charset="0"/>
-                <a:ea typeface="Arial" pitchFamily="34" charset="-122"/>
-                <a:cs typeface="Arial" pitchFamily="34" charset="-120"/>
-              </a:rPr>
-              <a:t>So when a neuron fires, it adds its own fixed arrow v to the residual stream, scaled by how strongly it fires. </a:t>
-            </a:r>
-            <a:pPr indent="0" marL="0">
-              <a:buNone/>
-            </a:pPr>
-            <a:r>
-              <a:rPr lang="en-US" sz="1700" dirty="0">
-                <a:solidFill>
-                  <a:srgbClr val="1F2328"/>
-                </a:solidFill>
-                <a:latin typeface="Arial" pitchFamily="34" charset="0"/>
-                <a:ea typeface="Arial" pitchFamily="34" charset="-122"/>
-                <a:cs typeface="Arial" pitchFamily="34" charset="-120"/>
-              </a:rPr>
-              <a:t>Since the refusal direction also lives in the residual stream, we can ask: does a neuron's arrow point the same way as the refusal direction?</a:t>
-            </a:r>
-            <a:endParaRPr lang="en-US" sz="1700" dirty="0"/>
           </a:p>
         </p:txBody>
       </p:sp>

--- a/slides/refusal_neurons_update.pptx
+++ b/slides/refusal_neurons_update.pptx
@@ -34,9 +34,10 @@
     <p:sldId id="282" r:id="rId28"/>
     <p:sldId id="283" r:id="rId29"/>
     <p:sldId id="284" r:id="rId30"/>
+    <p:sldId id="285" r:id="rId31"/>
   </p:sldIdLst>
   <p:notesMasterIdLst>
-    <p:notesMasterId r:id="rId31"/>
+    <p:notesMasterId r:id="rId32"/>
   </p:notesMasterIdLst>
   <p:sldSz cx="12192000" cy="6858000"/>
   <p:notesSz cx="6858000" cy="12192000"/>
@@ -4882,7 +4883,7 @@
           <a:p>
             <a:r>
               <a:rPr lang="en-US" dirty="0"/>
-              <a:t>This one is our own experiment; Apple only searched with English prompts. We rerun Experiment 1 from scratch but with Arabic prompts only: 128 harmful MultiJail prompts in Arabic and 128 normal Aya prompts in Arabic. Push needs a refusal sentence, and in Arabic the models refuse in Arabic, so we use the sentence each model actually uses, read from 100 of its normal Arabic answers; for Llama: 'I can't provide information'. Then we score all neurons exactly as in Experiment 1 and ask where the English refusal neuron lands. It comes out first in Llama and Qwen3-1.7B, and third in Qwen3-8B (first if the search uses the English refusal sentence). So even with only Arabic data you find the same neuron. Lesson: use the refusal sentence the model really says. When Qwen3-1.7B's Arabic search used the English sentence, its neuron fell to rank 568.</a:t>
+              <a:t>This is our own experiment; Apple only searched in English. We run part 1 of Experiment 1, the scoring, twice on the same prompts: once in English and once in Arabic. Each run gives a top-5 list of neurons, and we compare the two lists. Why a refusal sentence: the gap only needs the harmful and harmless labels, which come from the datasets. The push asks how much a neuron makes the model start its answer with a refusal, so it needs the refusal written out as text. It is a gradient: how the probability of that sentence changes when the neuron moves a tiny bit. A judge can't be used here, because it only reads finished answers and gives a yes or no, and you can't take a gradient through that. Apple used English sentences, their Table 4. In Arabic the model refuses in Arabic, so the probability of 'I'm sorry' is tiny and not what it really does; we use the sentence each model actually says in Arabic, read from 100 of its normal Arabic answers. Part 2, the rerank, needs a judge that reads Arabic, so it is not done yet.</a:t>
             </a:r>
             <a:endParaRPr lang="en-US" dirty="0"/>
           </a:p>
@@ -4970,7 +4971,7 @@
           <a:p>
             <a:r>
               <a:rPr lang="en-US" dirty="0"/>
-              <a:t>Same as Experiment 6, but on Arabic and English MultiJail prompts against Aya's normal prompts. Qwen3-8B's single neuron scores 0.956 in Arabic and 0.972 in English. Llama-Guard-3, a dedicated safety model that doesn't officially support Arabic, scores 0.910 in Arabic and 0.967 in English. In Arabic, one neuron is the better filter.</a:t>
+              <a:t>Each pair of columns is one model: on the left the top 5 neurons when the search runs on English prompts, on the right the top 5 when it runs on the same prompts in Arabic. Teal cells are neurons that appear in both lists. Apple's refusal neuron is in bold. Both Qwen models share 4 of their 5 neurons across languages, Llama 2 of 5. Apple's refusal neuron is in both lists for all three models, and it is number 1 in the Arabic list for Llama and Qwen3-1.7B. So the search finds largely the same refusal neurons whichever language you run it in.</a:t>
             </a:r>
             <a:endParaRPr lang="en-US" dirty="0"/>
           </a:p>
@@ -5058,7 +5059,7 @@
           <a:p>
             <a:r>
               <a:rPr lang="en-US" dirty="0"/>
-              <a:t>One judge only, Llama-Guard-3, which doesn't check that answers make sense and doesn't officially cover Arabic. Capability is measured on subsets. The Arabic sets are small and some MultiJail prompts are borderline. We haven't yet run the jailbreak in Arabic.</a:t>
+              <a:t>Same as Experiment 6, but on Arabic and English MultiJail prompts against Aya's normal prompts. Qwen3-8B's single neuron scores 0.956 in Arabic and 0.972 in English. Llama-Guard-3, a dedicated safety model that doesn't officially support Arabic, scores 0.910 in Arabic and 0.967 in English. In Arabic, one neuron is the better filter.</a:t>
             </a:r>
             <a:endParaRPr lang="en-US" dirty="0"/>
           </a:p>
@@ -5146,7 +5147,7 @@
           <a:p>
             <a:r>
               <a:rPr lang="en-US" dirty="0"/>
-              <a:t>Three messages: replication done with free tools; the neuron and our direction are one mechanism; the same neuron works in Arabic.</a:t>
+              <a:t>One judge only, Llama-Guard-3, which doesn't check that answers make sense and doesn't officially cover Arabic. Capability is measured on subsets. The Arabic sets are small and some MultiJail prompts are borderline. We haven't yet run the jailbreak in Arabic.</a:t>
             </a:r>
             <a:endParaRPr lang="en-US" dirty="0"/>
           </a:p>
@@ -5234,7 +5235,7 @@
           <a:p>
             <a:r>
               <a:rPr lang="en-US" dirty="0"/>
-              <a:t>First, run the jailbreak in Arabic: pin the neuron on Arabic prompts and judge the Arabic answers, which needs a plan for judging Arabic. Second, add a free judge that also checks that answers make sense, a local LLM with Apple's own judge prompt; it settles Experiment 8 on Llama. Third, more languages along a resource spectrum, then images and speech with models that share a backbone with these. For Paper C: compare our 11 category directions from the EMNLP paper with the refusal neuron, the same way as Experiment 7.</a:t>
+              <a:t>Three messages: replication done with free tools; the neuron and our direction are one mechanism; the same neuron works in Arabic.</a:t>
             </a:r>
             <a:endParaRPr lang="en-US" dirty="0"/>
           </a:p>
@@ -5346,6 +5347,94 @@
             <a:fld id="{F7021451-1387-4CA6-816F-3879F97B5CBC}" type="slidenum">
               <a:rPr lang="en-US"/>
               <a:t>3</a:t>
+            </a:fld>
+            <a:endParaRPr lang="en-US"/>
+          </a:p>
+        </p:txBody>
+      </p:sp>
+    </p:spTree>
+    <p:extLst>
+      <p:ext uri="{BB962C8B-B14F-4D97-AF65-F5344CB8AC3E}">
+        <p14:creationId xmlns:p14="http://schemas.microsoft.com/office/powerpoint/2010/main" val="1024086991"/>
+      </p:ext>
+    </p:extLst>
+  </p:cSld>
+  <p:clrMapOvr>
+    <a:masterClrMapping/>
+  </p:clrMapOvr>
+</p:notes>
+</file>
+
+<file path=ppt/notesSlides/notesSlide30.xml><?xml version="1.0" encoding="utf-8"?>
+<p:notes xmlns:a="http://schemas.openxmlformats.org/drawingml/2006/main" xmlns:r="http://schemas.openxmlformats.org/officeDocument/2006/relationships" xmlns:p="http://schemas.openxmlformats.org/presentationml/2006/main">
+  <p:cSld>
+    <p:spTree>
+      <p:nvGrpSpPr>
+        <p:cNvPr id="1" name=""/>
+        <p:cNvGrpSpPr/>
+        <p:nvPr/>
+      </p:nvGrpSpPr>
+      <p:grpSpPr>
+        <a:xfrm>
+          <a:off x="0" y="0"/>
+          <a:ext cx="0" cy="0"/>
+          <a:chOff x="0" y="0"/>
+          <a:chExt cx="0" cy="0"/>
+        </a:xfrm>
+      </p:grpSpPr>
+      <p:sp>
+        <p:nvSpPr>
+          <p:cNvPr id="2" name="Slide Image Placeholder 1"/>
+          <p:cNvSpPr>
+            <a:spLocks noGrp="1" noRot="1" noChangeAspect="1"/>
+          </p:cNvSpPr>
+          <p:nvPr>
+            <p:ph type="sldImg"/>
+          </p:nvPr>
+        </p:nvSpPr>
+        <p:spPr/>
+      </p:sp>
+      <p:sp>
+        <p:nvSpPr>
+          <p:cNvPr id="3" name="Notes Placeholder 2"/>
+          <p:cNvSpPr>
+            <a:spLocks noGrp="1"/>
+          </p:cNvSpPr>
+          <p:nvPr>
+            <p:ph type="body" idx="1"/>
+          </p:nvPr>
+        </p:nvSpPr>
+        <p:spPr/>
+        <p:txBody>
+          <a:bodyPr/>
+          <a:lstStyle/>
+          <a:p>
+            <a:r>
+              <a:rPr lang="en-US" dirty="0"/>
+              <a:t>First, run the jailbreak in Arabic: pin the neuron on Arabic prompts and judge the Arabic answers, which needs a plan for judging Arabic. Second, add a free judge that also checks that answers make sense, a local LLM with Apple's own judge prompt; it settles Experiment 8 on Llama. Third, more languages along a resource spectrum, then images and speech with models that share a backbone with these. For Paper C: compare our 11 category directions from the EMNLP paper with the refusal neuron, the same way as Experiment 7.</a:t>
+            </a:r>
+            <a:endParaRPr lang="en-US" dirty="0"/>
+          </a:p>
+        </p:txBody>
+      </p:sp>
+      <p:sp>
+        <p:nvSpPr>
+          <p:cNvPr id="4" name="Slide Number Placeholder 3"/>
+          <p:cNvSpPr>
+            <a:spLocks noGrp="1"/>
+          </p:cNvSpPr>
+          <p:nvPr>
+            <p:ph type="sldNum" sz="quarter" idx="10"/>
+          </p:nvPr>
+        </p:nvSpPr>
+        <p:spPr/>
+        <p:txBody>
+          <a:bodyPr/>
+          <a:lstStyle/>
+          <a:p>
+            <a:fld id="{F7021451-1387-4CA6-816F-3879F97B5CBC}" type="slidenum">
+              <a:rPr lang="en-US"/>
+              <a:t>30</a:t>
             </a:fld>
             <a:endParaRPr lang="en-US"/>
           </a:p>
@@ -28998,7 +29087,7 @@
                 <a:ea typeface="Arial" pitchFamily="34" charset="-122"/>
                 <a:cs typeface="Arial" pitchFamily="34" charset="-120"/>
               </a:rPr>
-              <a:t>Arabic B: redo the whole search with only Arabic prompts</a:t>
+              <a:t>Arabic B: run Experiment 1's search again, in Arabic</a:t>
             </a:r>
             <a:endParaRPr lang="en-US" sz="2800" dirty="0"/>
           </a:p>
@@ -29076,318 +29165,9 @@
                 <a:ea typeface="Arial" pitchFamily="34" charset="-122"/>
                 <a:cs typeface="Arial" pitchFamily="34" charset="-120"/>
               </a:rPr>
-              <a:t>OUR OWN EXPERIMENT: APPLE ONLY SEARCHED WITH ENGLISH PROMPTS</a:t>
+              <a:t>OUR OWN EXPERIMENT: APPLE ONLY SEARCHED IN ENGLISH</a:t>
             </a:r>
             <a:endParaRPr lang="en-US" sz="1200" dirty="0"/>
-          </a:p>
-        </p:txBody>
-      </p:sp>
-      <p:sp>
-        <p:nvSpPr>
-          <p:cNvPr id="7" name="Shape 4"/>
-          <p:cNvSpPr/>
-          <p:nvPr/>
-        </p:nvSpPr>
-        <p:spPr>
-          <a:xfrm>
-            <a:off x="548640" y="1764792"/>
-            <a:ext cx="329184" cy="329184"/>
-          </a:xfrm>
-          <a:prstGeom prst="ellipse">
-            <a:avLst/>
-          </a:prstGeom>
-          <a:solidFill>
-            <a:srgbClr val="B45309"/>
-          </a:solidFill>
-          <a:ln w="12700">
-            <a:solidFill>
-              <a:srgbClr val="B45309"/>
-            </a:solidFill>
-            <a:prstDash val="solid"/>
-          </a:ln>
-        </p:spPr>
-      </p:sp>
-      <p:sp>
-        <p:nvSpPr>
-          <p:cNvPr id="8" name="Text 5"/>
-          <p:cNvSpPr/>
-          <p:nvPr/>
-        </p:nvSpPr>
-        <p:spPr>
-          <a:xfrm>
-            <a:off x="548640" y="1764792"/>
-            <a:ext cx="329184" cy="329184"/>
-          </a:xfrm>
-          <a:prstGeom prst="rect">
-            <a:avLst/>
-          </a:prstGeom>
-          <a:noFill/>
-          <a:ln/>
-        </p:spPr>
-        <p:txBody>
-          <a:bodyPr wrap="square" lIns="0" tIns="0" rIns="0" bIns="0" rtlCol="0" anchor="ctr"/>
-          <a:lstStyle/>
-          <a:p>
-            <a:pPr algn="ctr" indent="0" marL="0">
-              <a:buNone/>
-            </a:pPr>
-            <a:r>
-              <a:rPr lang="en-US" sz="1300" b="1" dirty="0">
-                <a:solidFill>
-                  <a:srgbClr val="FFFFFF"/>
-                </a:solidFill>
-                <a:latin typeface="Arial" pitchFamily="34" charset="0"/>
-                <a:ea typeface="Arial" pitchFamily="34" charset="-122"/>
-                <a:cs typeface="Arial" pitchFamily="34" charset="-120"/>
-              </a:rPr>
-              <a:t>1</a:t>
-            </a:r>
-            <a:endParaRPr lang="en-US" sz="1300" dirty="0"/>
-          </a:p>
-        </p:txBody>
-      </p:sp>
-      <p:sp>
-        <p:nvSpPr>
-          <p:cNvPr id="9" name="Text 6"/>
-          <p:cNvSpPr/>
-          <p:nvPr/>
-        </p:nvSpPr>
-        <p:spPr>
-          <a:xfrm>
-            <a:off x="1005840" y="1719072"/>
-            <a:ext cx="10637215" cy="548640"/>
-          </a:xfrm>
-          <a:prstGeom prst="rect">
-            <a:avLst/>
-          </a:prstGeom>
-          <a:noFill/>
-          <a:ln/>
-        </p:spPr>
-        <p:txBody>
-          <a:bodyPr wrap="square" lIns="0" tIns="0" rIns="0" bIns="0" rtlCol="0" anchor="t"/>
-          <a:lstStyle/>
-          <a:p>
-            <a:pPr indent="0" marL="0">
-              <a:buNone/>
-            </a:pPr>
-            <a:r>
-              <a:rPr lang="en-US" sz="1500" dirty="0">
-                <a:solidFill>
-                  <a:srgbClr val="1F2328"/>
-                </a:solidFill>
-                <a:latin typeface="Arial" pitchFamily="34" charset="0"/>
-                <a:ea typeface="Arial" pitchFamily="34" charset="-122"/>
-                <a:cs typeface="Arial" pitchFamily="34" charset="-120"/>
-              </a:rPr>
-              <a:t>Rerun Experiment 1 from scratch with Arabic prompts only: 128 harmful (MultiJail) vs 128 normal (Aya), all in Arabic.</a:t>
-            </a:r>
-            <a:endParaRPr lang="en-US" sz="1500" dirty="0"/>
-          </a:p>
-        </p:txBody>
-      </p:sp>
-      <p:sp>
-        <p:nvSpPr>
-          <p:cNvPr id="10" name="Shape 7"/>
-          <p:cNvSpPr/>
-          <p:nvPr/>
-        </p:nvSpPr>
-        <p:spPr>
-          <a:xfrm>
-            <a:off x="548640" y="2313432"/>
-            <a:ext cx="329184" cy="329184"/>
-          </a:xfrm>
-          <a:prstGeom prst="ellipse">
-            <a:avLst/>
-          </a:prstGeom>
-          <a:solidFill>
-            <a:srgbClr val="B45309"/>
-          </a:solidFill>
-          <a:ln w="12700">
-            <a:solidFill>
-              <a:srgbClr val="B45309"/>
-            </a:solidFill>
-            <a:prstDash val="solid"/>
-          </a:ln>
-        </p:spPr>
-      </p:sp>
-      <p:sp>
-        <p:nvSpPr>
-          <p:cNvPr id="11" name="Text 8"/>
-          <p:cNvSpPr/>
-          <p:nvPr/>
-        </p:nvSpPr>
-        <p:spPr>
-          <a:xfrm>
-            <a:off x="548640" y="2313432"/>
-            <a:ext cx="329184" cy="329184"/>
-          </a:xfrm>
-          <a:prstGeom prst="rect">
-            <a:avLst/>
-          </a:prstGeom>
-          <a:noFill/>
-          <a:ln/>
-        </p:spPr>
-        <p:txBody>
-          <a:bodyPr wrap="square" lIns="0" tIns="0" rIns="0" bIns="0" rtlCol="0" anchor="ctr"/>
-          <a:lstStyle/>
-          <a:p>
-            <a:pPr algn="ctr" indent="0" marL="0">
-              <a:buNone/>
-            </a:pPr>
-            <a:r>
-              <a:rPr lang="en-US" sz="1300" b="1" dirty="0">
-                <a:solidFill>
-                  <a:srgbClr val="FFFFFF"/>
-                </a:solidFill>
-                <a:latin typeface="Arial" pitchFamily="34" charset="0"/>
-                <a:ea typeface="Arial" pitchFamily="34" charset="-122"/>
-                <a:cs typeface="Arial" pitchFamily="34" charset="-120"/>
-              </a:rPr>
-              <a:t>2</a:t>
-            </a:r>
-            <a:endParaRPr lang="en-US" sz="1300" dirty="0"/>
-          </a:p>
-        </p:txBody>
-      </p:sp>
-      <p:sp>
-        <p:nvSpPr>
-          <p:cNvPr id="12" name="Text 9"/>
-          <p:cNvSpPr/>
-          <p:nvPr/>
-        </p:nvSpPr>
-        <p:spPr>
-          <a:xfrm>
-            <a:off x="1005840" y="2267712"/>
-            <a:ext cx="10637215" cy="548640"/>
-          </a:xfrm>
-          <a:prstGeom prst="rect">
-            <a:avLst/>
-          </a:prstGeom>
-          <a:noFill/>
-          <a:ln/>
-        </p:spPr>
-        <p:txBody>
-          <a:bodyPr wrap="square" lIns="0" tIns="0" rIns="0" bIns="0" rtlCol="0" anchor="t"/>
-          <a:lstStyle/>
-          <a:p>
-            <a:pPr indent="0" marL="0">
-              <a:buNone/>
-            </a:pPr>
-            <a:r>
-              <a:rPr lang="en-US" sz="1500" dirty="0">
-                <a:solidFill>
-                  <a:srgbClr val="1F2328"/>
-                </a:solidFill>
-                <a:latin typeface="Arial" pitchFamily="34" charset="0"/>
-                <a:ea typeface="Arial" pitchFamily="34" charset="-122"/>
-                <a:cs typeface="Arial" pitchFamily="34" charset="-120"/>
-              </a:rPr>
-              <a:t>Push needs a refusal sentence. In Arabic the models refuse in Arabic, so we use the one each model actually says (read from 100 of its Arabic answers).</a:t>
-            </a:r>
-            <a:endParaRPr lang="en-US" sz="1500" dirty="0"/>
-          </a:p>
-        </p:txBody>
-      </p:sp>
-      <p:sp>
-        <p:nvSpPr>
-          <p:cNvPr id="13" name="Shape 10"/>
-          <p:cNvSpPr/>
-          <p:nvPr/>
-        </p:nvSpPr>
-        <p:spPr>
-          <a:xfrm>
-            <a:off x="548640" y="2862072"/>
-            <a:ext cx="329184" cy="329184"/>
-          </a:xfrm>
-          <a:prstGeom prst="ellipse">
-            <a:avLst/>
-          </a:prstGeom>
-          <a:solidFill>
-            <a:srgbClr val="B45309"/>
-          </a:solidFill>
-          <a:ln w="12700">
-            <a:solidFill>
-              <a:srgbClr val="B45309"/>
-            </a:solidFill>
-            <a:prstDash val="solid"/>
-          </a:ln>
-        </p:spPr>
-      </p:sp>
-      <p:sp>
-        <p:nvSpPr>
-          <p:cNvPr id="14" name="Text 11"/>
-          <p:cNvSpPr/>
-          <p:nvPr/>
-        </p:nvSpPr>
-        <p:spPr>
-          <a:xfrm>
-            <a:off x="548640" y="2862072"/>
-            <a:ext cx="329184" cy="329184"/>
-          </a:xfrm>
-          <a:prstGeom prst="rect">
-            <a:avLst/>
-          </a:prstGeom>
-          <a:noFill/>
-          <a:ln/>
-        </p:spPr>
-        <p:txBody>
-          <a:bodyPr wrap="square" lIns="0" tIns="0" rIns="0" bIns="0" rtlCol="0" anchor="ctr"/>
-          <a:lstStyle/>
-          <a:p>
-            <a:pPr algn="ctr" indent="0" marL="0">
-              <a:buNone/>
-            </a:pPr>
-            <a:r>
-              <a:rPr lang="en-US" sz="1300" b="1" dirty="0">
-                <a:solidFill>
-                  <a:srgbClr val="FFFFFF"/>
-                </a:solidFill>
-                <a:latin typeface="Arial" pitchFamily="34" charset="0"/>
-                <a:ea typeface="Arial" pitchFamily="34" charset="-122"/>
-                <a:cs typeface="Arial" pitchFamily="34" charset="-120"/>
-              </a:rPr>
-              <a:t>3</a:t>
-            </a:r>
-            <a:endParaRPr lang="en-US" sz="1300" dirty="0"/>
-          </a:p>
-        </p:txBody>
-      </p:sp>
-      <p:sp>
-        <p:nvSpPr>
-          <p:cNvPr id="15" name="Text 12"/>
-          <p:cNvSpPr/>
-          <p:nvPr/>
-        </p:nvSpPr>
-        <p:spPr>
-          <a:xfrm>
-            <a:off x="1005840" y="2816352"/>
-            <a:ext cx="10637215" cy="548640"/>
-          </a:xfrm>
-          <a:prstGeom prst="rect">
-            <a:avLst/>
-          </a:prstGeom>
-          <a:noFill/>
-          <a:ln/>
-        </p:spPr>
-        <p:txBody>
-          <a:bodyPr wrap="square" lIns="0" tIns="0" rIns="0" bIns="0" rtlCol="0" anchor="t"/>
-          <a:lstStyle/>
-          <a:p>
-            <a:pPr indent="0" marL="0">
-              <a:buNone/>
-            </a:pPr>
-            <a:r>
-              <a:rPr lang="en-US" sz="1500" dirty="0">
-                <a:solidFill>
-                  <a:srgbClr val="1F2328"/>
-                </a:solidFill>
-                <a:latin typeface="Arial" pitchFamily="34" charset="0"/>
-                <a:ea typeface="Arial" pitchFamily="34" charset="-122"/>
-                <a:cs typeface="Arial" pitchFamily="34" charset="-120"/>
-              </a:rPr>
-              <a:t>Score every neuron exactly as before, and ask: where does the English refusal neuron land?</a:t>
-            </a:r>
-            <a:endParaRPr lang="en-US" sz="1500" dirty="0"/>
           </a:p>
         </p:txBody>
       </p:sp>
@@ -29406,7 +29186,7 @@
           </p:nvPr>
         </p:nvGraphicFramePr>
         <p:xfrm>
-          <a:off x="548640" y="3520440"/>
+          <a:off x="548640" y="1691640"/>
           <a:ext cx="11094415" cy="914400"/>
         </p:xfrm>
         <a:graphic>
@@ -29414,12 +29194,11 @@
             <a:tbl>
               <a:tblPr/>
               <a:tblGrid>
-                <a:gridCol w="1737360"/>
-                <a:gridCol w="4206240"/>
-                <a:gridCol w="3566160"/>
-                <a:gridCol w="1581912"/>
+                <a:gridCol w="2651760"/>
+                <a:gridCol w="3931920"/>
+                <a:gridCol w="4507992"/>
               </a:tblGrid>
-              <a:tr h="411480">
+              <a:tr h="475488">
                 <a:tc>
                   <a:txBody>
                     <a:bodyPr/>
@@ -29428,17 +29207,6 @@
                       <a:pPr indent="0" marL="0">
                         <a:buNone/>
                       </a:pPr>
-                      <a:r>
-                        <a:rPr lang="en-US" sz="1400" b="1" dirty="0">
-                          <a:solidFill>
-                            <a:srgbClr val="1F2328"/>
-                          </a:solidFill>
-                          <a:latin typeface="Arial" pitchFamily="34" charset="0"/>
-                          <a:ea typeface="Arial" pitchFamily="34" charset="-122"/>
-                          <a:cs typeface="Arial" pitchFamily="34" charset="-120"/>
-                        </a:rPr>
-                        <a:t>Model</a:t>
-                      </a:r>
                       <a:endParaRPr lang="en-US" sz="1400" dirty="0">
                         <a:latin typeface="Arial" charset="0"/>
                         <a:ea typeface="Arial" charset="0"/>
@@ -29505,7 +29273,7 @@
                           <a:ea typeface="Arial" pitchFamily="34" charset="-122"/>
                           <a:cs typeface="Arial" pitchFamily="34" charset="-120"/>
                         </a:rPr>
-                        <a:t>Refusal sentence it uses in Arabic</a:t>
+                        <a:t>Search in English</a:t>
                       </a:r>
                       <a:endParaRPr lang="en-US" sz="1400" dirty="0">
                         <a:latin typeface="Arial" charset="0"/>
@@ -29573,7 +29341,7 @@
                           <a:ea typeface="Arial" pitchFamily="34" charset="-122"/>
                           <a:cs typeface="Arial" pitchFamily="34" charset="-120"/>
                         </a:rPr>
-                        <a:t>English refusal neuron's rank in the Arabic-only search</a:t>
+                        <a:t>Search in Arabic</a:t>
                       </a:r>
                       <a:endParaRPr lang="en-US" sz="1400" dirty="0">
                         <a:latin typeface="Arial" charset="0"/>
@@ -29624,76 +29392,8 @@
                     </a:solidFill>
                   </a:tcPr>
                 </a:tc>
-                <a:tc>
-                  <a:txBody>
-                    <a:bodyPr/>
-                    <a:lstStyle/>
-                    <a:p>
-                      <a:pPr indent="0" marL="0">
-                        <a:buNone/>
-                      </a:pPr>
-                      <a:r>
-                        <a:rPr lang="en-US" sz="1400" b="1" dirty="0">
-                          <a:solidFill>
-                            <a:srgbClr val="1F2328"/>
-                          </a:solidFill>
-                          <a:latin typeface="Arial" pitchFamily="34" charset="0"/>
-                          <a:ea typeface="Arial" pitchFamily="34" charset="-122"/>
-                          <a:cs typeface="Arial" pitchFamily="34" charset="-120"/>
-                        </a:rPr>
-                        <a:t>Neurons searched</a:t>
-                      </a:r>
-                      <a:endParaRPr lang="en-US" sz="1400" dirty="0">
-                        <a:latin typeface="Arial" charset="0"/>
-                        <a:ea typeface="Arial" charset="0"/>
-                        <a:cs typeface="Arial" charset="0"/>
-                      </a:endParaRPr>
-                    </a:p>
-                  </a:txBody>
-                  <a:tcPr marL="73152" marR="73152" marT="36576" marB="36576" anchor="ctr">
-                    <a:lnL w="9525" cap="flat" cmpd="sng" algn="ctr">
-                      <a:solidFill>
-                        <a:srgbClr val="D8DEE6"/>
-                      </a:solidFill>
-                      <a:prstDash val="solid"/>
-                      <a:round/>
-                      <a:headEnd type="none" w="med" len="med"/>
-                      <a:tailEnd type="none" w="med" len="med"/>
-                    </a:lnL>
-                    <a:lnR w="9525" cap="flat" cmpd="sng" algn="ctr">
-                      <a:solidFill>
-                        <a:srgbClr val="D8DEE6"/>
-                      </a:solidFill>
-                      <a:prstDash val="solid"/>
-                      <a:round/>
-                      <a:headEnd type="none" w="med" len="med"/>
-                      <a:tailEnd type="none" w="med" len="med"/>
-                    </a:lnR>
-                    <a:lnT w="9525" cap="flat" cmpd="sng" algn="ctr">
-                      <a:solidFill>
-                        <a:srgbClr val="D8DEE6"/>
-                      </a:solidFill>
-                      <a:prstDash val="solid"/>
-                      <a:round/>
-                      <a:headEnd type="none" w="med" len="med"/>
-                      <a:tailEnd type="none" w="med" len="med"/>
-                    </a:lnT>
-                    <a:lnB w="9525" cap="flat" cmpd="sng" algn="ctr">
-                      <a:solidFill>
-                        <a:srgbClr val="D8DEE6"/>
-                      </a:solidFill>
-                      <a:prstDash val="solid"/>
-                      <a:round/>
-                      <a:headEnd type="none" w="med" len="med"/>
-                      <a:tailEnd type="none" w="med" len="med"/>
-                    </a:lnB>
-                    <a:solidFill>
-                      <a:srgbClr val="F4F6F9"/>
-                    </a:solidFill>
-                  </a:tcPr>
-                </a:tc>
               </a:tr>
-              <a:tr h="411480">
+              <a:tr h="475488">
                 <a:tc>
                   <a:txBody>
                     <a:bodyPr/>
@@ -29711,7 +29411,7 @@
                           <a:ea typeface="Arial" pitchFamily="34" charset="-122"/>
                           <a:cs typeface="Arial" pitchFamily="34" charset="-120"/>
                         </a:rPr>
-                        <a:t>Qwen3-8B</a:t>
+                        <a:t>Harmful prompts</a:t>
                       </a:r>
                       <a:endParaRPr lang="en-US" sz="1400" dirty="0">
                         <a:latin typeface="Arial" charset="0"/>
@@ -29779,75 +29479,7 @@
                           <a:ea typeface="Arial" pitchFamily="34" charset="-122"/>
                           <a:cs typeface="Arial" pitchFamily="34" charset="-120"/>
                         </a:rPr>
-                        <a:t>أنا لا أستطيع مساعدتك (I can't help you)</a:t>
-                      </a:r>
-                      <a:endParaRPr lang="en-US" sz="1400" dirty="0">
-                        <a:latin typeface="Arial" charset="0"/>
-                        <a:ea typeface="Arial" charset="0"/>
-                        <a:cs typeface="Arial" charset="0"/>
-                      </a:endParaRPr>
-                    </a:p>
-                  </a:txBody>
-                  <a:tcPr marL="73152" marR="73152" marT="36576" marB="36576" anchor="ctr">
-                    <a:lnL w="9525" cap="flat" cmpd="sng" algn="ctr">
-                      <a:solidFill>
-                        <a:srgbClr val="D8DEE6"/>
-                      </a:solidFill>
-                      <a:prstDash val="solid"/>
-                      <a:round/>
-                      <a:headEnd type="none" w="med" len="med"/>
-                      <a:tailEnd type="none" w="med" len="med"/>
-                    </a:lnL>
-                    <a:lnR w="9525" cap="flat" cmpd="sng" algn="ctr">
-                      <a:solidFill>
-                        <a:srgbClr val="D8DEE6"/>
-                      </a:solidFill>
-                      <a:prstDash val="solid"/>
-                      <a:round/>
-                      <a:headEnd type="none" w="med" len="med"/>
-                      <a:tailEnd type="none" w="med" len="med"/>
-                    </a:lnR>
-                    <a:lnT w="9525" cap="flat" cmpd="sng" algn="ctr">
-                      <a:solidFill>
-                        <a:srgbClr val="D8DEE6"/>
-                      </a:solidFill>
-                      <a:prstDash val="solid"/>
-                      <a:round/>
-                      <a:headEnd type="none" w="med" len="med"/>
-                      <a:tailEnd type="none" w="med" len="med"/>
-                    </a:lnT>
-                    <a:lnB w="9525" cap="flat" cmpd="sng" algn="ctr">
-                      <a:solidFill>
-                        <a:srgbClr val="D8DEE6"/>
-                      </a:solidFill>
-                      <a:prstDash val="solid"/>
-                      <a:round/>
-                      <a:headEnd type="none" w="med" len="med"/>
-                      <a:tailEnd type="none" w="med" len="med"/>
-                    </a:lnB>
-                    <a:solidFill>
-                      <a:srgbClr val="FFFFFF"/>
-                    </a:solidFill>
-                  </a:tcPr>
-                </a:tc>
-                <a:tc>
-                  <a:txBody>
-                    <a:bodyPr/>
-                    <a:lstStyle/>
-                    <a:p>
-                      <a:pPr indent="0" marL="0">
-                        <a:buNone/>
-                      </a:pPr>
-                      <a:r>
-                        <a:rPr lang="en-US" sz="1400" b="1" dirty="0">
-                          <a:solidFill>
-                            <a:srgbClr val="0F766E"/>
-                          </a:solidFill>
-                          <a:latin typeface="Arial" pitchFamily="34" charset="0"/>
-                          <a:ea typeface="Arial" pitchFamily="34" charset="-122"/>
-                          <a:cs typeface="Arial" pitchFamily="34" charset="-120"/>
-                        </a:rPr>
-                        <a:t>3rd (1st with the English sentence)</a:t>
+                        <a:t>128 MultiJail prompts, English</a:t>
                       </a:r>
                       <a:endParaRPr lang="en-US" sz="1400" dirty="0">
                         <a:latin typeface="Arial" charset="0"/>
@@ -29915,7 +29547,7 @@
                           <a:ea typeface="Arial" pitchFamily="34" charset="-122"/>
                           <a:cs typeface="Arial" pitchFamily="34" charset="-120"/>
                         </a:rPr>
-                        <a:t>294,912</a:t>
+                        <a:t>the same 128 MultiJail prompts, Arabic</a:t>
                       </a:r>
                       <a:endParaRPr lang="en-US" sz="1400" dirty="0">
                         <a:latin typeface="Arial" charset="0"/>
@@ -29967,7 +29599,7 @@
                   </a:tcPr>
                 </a:tc>
               </a:tr>
-              <a:tr h="411480">
+              <a:tr h="475488">
                 <a:tc>
                   <a:txBody>
                     <a:bodyPr/>
@@ -29985,7 +29617,7 @@
                           <a:ea typeface="Arial" pitchFamily="34" charset="-122"/>
                           <a:cs typeface="Arial" pitchFamily="34" charset="-120"/>
                         </a:rPr>
-                        <a:t>Llama-3.1-8B</a:t>
+                        <a:t>Harmless prompts</a:t>
                       </a:r>
                       <a:endParaRPr lang="en-US" sz="1400" dirty="0">
                         <a:latin typeface="Arial" charset="0"/>
@@ -30053,75 +29685,7 @@
                           <a:ea typeface="Arial" pitchFamily="34" charset="-122"/>
                           <a:cs typeface="Arial" pitchFamily="34" charset="-120"/>
                         </a:rPr>
-                        <a:t>لا أستطيع تقديم معلومات (I can't provide information)</a:t>
-                      </a:r>
-                      <a:endParaRPr lang="en-US" sz="1400" dirty="0">
-                        <a:latin typeface="Arial" charset="0"/>
-                        <a:ea typeface="Arial" charset="0"/>
-                        <a:cs typeface="Arial" charset="0"/>
-                      </a:endParaRPr>
-                    </a:p>
-                  </a:txBody>
-                  <a:tcPr marL="73152" marR="73152" marT="36576" marB="36576" anchor="ctr">
-                    <a:lnL w="9525" cap="flat" cmpd="sng" algn="ctr">
-                      <a:solidFill>
-                        <a:srgbClr val="D8DEE6"/>
-                      </a:solidFill>
-                      <a:prstDash val="solid"/>
-                      <a:round/>
-                      <a:headEnd type="none" w="med" len="med"/>
-                      <a:tailEnd type="none" w="med" len="med"/>
-                    </a:lnL>
-                    <a:lnR w="9525" cap="flat" cmpd="sng" algn="ctr">
-                      <a:solidFill>
-                        <a:srgbClr val="D8DEE6"/>
-                      </a:solidFill>
-                      <a:prstDash val="solid"/>
-                      <a:round/>
-                      <a:headEnd type="none" w="med" len="med"/>
-                      <a:tailEnd type="none" w="med" len="med"/>
-                    </a:lnR>
-                    <a:lnT w="9525" cap="flat" cmpd="sng" algn="ctr">
-                      <a:solidFill>
-                        <a:srgbClr val="D8DEE6"/>
-                      </a:solidFill>
-                      <a:prstDash val="solid"/>
-                      <a:round/>
-                      <a:headEnd type="none" w="med" len="med"/>
-                      <a:tailEnd type="none" w="med" len="med"/>
-                    </a:lnT>
-                    <a:lnB w="9525" cap="flat" cmpd="sng" algn="ctr">
-                      <a:solidFill>
-                        <a:srgbClr val="D8DEE6"/>
-                      </a:solidFill>
-                      <a:prstDash val="solid"/>
-                      <a:round/>
-                      <a:headEnd type="none" w="med" len="med"/>
-                      <a:tailEnd type="none" w="med" len="med"/>
-                    </a:lnB>
-                    <a:solidFill>
-                      <a:srgbClr val="FFFFFF"/>
-                    </a:solidFill>
-                  </a:tcPr>
-                </a:tc>
-                <a:tc>
-                  <a:txBody>
-                    <a:bodyPr/>
-                    <a:lstStyle/>
-                    <a:p>
-                      <a:pPr indent="0" marL="0">
-                        <a:buNone/>
-                      </a:pPr>
-                      <a:r>
-                        <a:rPr lang="en-US" sz="1400" b="1" dirty="0">
-                          <a:solidFill>
-                            <a:srgbClr val="0F766E"/>
-                          </a:solidFill>
-                          <a:latin typeface="Arial" pitchFamily="34" charset="0"/>
-                          <a:ea typeface="Arial" pitchFamily="34" charset="-122"/>
-                          <a:cs typeface="Arial" pitchFamily="34" charset="-120"/>
-                        </a:rPr>
-                        <a:t>1st</a:t>
+                        <a:t>128 Aya prompts, English</a:t>
                       </a:r>
                       <a:endParaRPr lang="en-US" sz="1400" dirty="0">
                         <a:latin typeface="Arial" charset="0"/>
@@ -30189,7 +29753,7 @@
                           <a:ea typeface="Arial" pitchFamily="34" charset="-122"/>
                           <a:cs typeface="Arial" pitchFamily="34" charset="-120"/>
                         </a:rPr>
-                        <a:t>301,056</a:t>
+                        <a:t>128 Aya prompts, Arabic</a:t>
                       </a:r>
                       <a:endParaRPr lang="en-US" sz="1400" dirty="0">
                         <a:latin typeface="Arial" charset="0"/>
@@ -30241,7 +29805,7 @@
                   </a:tcPr>
                 </a:tc>
               </a:tr>
-              <a:tr h="411480">
+              <a:tr h="475488">
                 <a:tc>
                   <a:txBody>
                     <a:bodyPr/>
@@ -30259,7 +29823,7 @@
                           <a:ea typeface="Arial" pitchFamily="34" charset="-122"/>
                           <a:cs typeface="Arial" pitchFamily="34" charset="-120"/>
                         </a:rPr>
-                        <a:t>Qwen3-1.7B</a:t>
+                        <a:t>Refusal sentence for the “push”</a:t>
                       </a:r>
                       <a:endParaRPr lang="en-US" sz="1400" dirty="0">
                         <a:latin typeface="Arial" charset="0"/>
@@ -30327,75 +29891,7 @@
                           <a:ea typeface="Arial" pitchFamily="34" charset="-122"/>
                           <a:cs typeface="Arial" pitchFamily="34" charset="-120"/>
                         </a:rPr>
-                        <a:t>لا أستطيع أن أقدم (I can't provide)</a:t>
-                      </a:r>
-                      <a:endParaRPr lang="en-US" sz="1400" dirty="0">
-                        <a:latin typeface="Arial" charset="0"/>
-                        <a:ea typeface="Arial" charset="0"/>
-                        <a:cs typeface="Arial" charset="0"/>
-                      </a:endParaRPr>
-                    </a:p>
-                  </a:txBody>
-                  <a:tcPr marL="73152" marR="73152" marT="36576" marB="36576" anchor="ctr">
-                    <a:lnL w="9525" cap="flat" cmpd="sng" algn="ctr">
-                      <a:solidFill>
-                        <a:srgbClr val="D8DEE6"/>
-                      </a:solidFill>
-                      <a:prstDash val="solid"/>
-                      <a:round/>
-                      <a:headEnd type="none" w="med" len="med"/>
-                      <a:tailEnd type="none" w="med" len="med"/>
-                    </a:lnL>
-                    <a:lnR w="9525" cap="flat" cmpd="sng" algn="ctr">
-                      <a:solidFill>
-                        <a:srgbClr val="D8DEE6"/>
-                      </a:solidFill>
-                      <a:prstDash val="solid"/>
-                      <a:round/>
-                      <a:headEnd type="none" w="med" len="med"/>
-                      <a:tailEnd type="none" w="med" len="med"/>
-                    </a:lnR>
-                    <a:lnT w="9525" cap="flat" cmpd="sng" algn="ctr">
-                      <a:solidFill>
-                        <a:srgbClr val="D8DEE6"/>
-                      </a:solidFill>
-                      <a:prstDash val="solid"/>
-                      <a:round/>
-                      <a:headEnd type="none" w="med" len="med"/>
-                      <a:tailEnd type="none" w="med" len="med"/>
-                    </a:lnT>
-                    <a:lnB w="9525" cap="flat" cmpd="sng" algn="ctr">
-                      <a:solidFill>
-                        <a:srgbClr val="D8DEE6"/>
-                      </a:solidFill>
-                      <a:prstDash val="solid"/>
-                      <a:round/>
-                      <a:headEnd type="none" w="med" len="med"/>
-                      <a:tailEnd type="none" w="med" len="med"/>
-                    </a:lnB>
-                    <a:solidFill>
-                      <a:srgbClr val="FFFFFF"/>
-                    </a:solidFill>
-                  </a:tcPr>
-                </a:tc>
-                <a:tc>
-                  <a:txBody>
-                    <a:bodyPr/>
-                    <a:lstStyle/>
-                    <a:p>
-                      <a:pPr indent="0" marL="0">
-                        <a:buNone/>
-                      </a:pPr>
-                      <a:r>
-                        <a:rPr lang="en-US" sz="1400" b="1" dirty="0">
-                          <a:solidFill>
-                            <a:srgbClr val="0F766E"/>
-                          </a:solidFill>
-                          <a:latin typeface="Arial" pitchFamily="34" charset="0"/>
-                          <a:ea typeface="Arial" pitchFamily="34" charset="-122"/>
-                          <a:cs typeface="Arial" pitchFamily="34" charset="-120"/>
-                        </a:rPr>
-                        <a:t>1st</a:t>
+                        <a:t>“I'm sorry, but I can't help with that request.” (Apple's)</a:t>
                       </a:r>
                       <a:endParaRPr lang="en-US" sz="1400" dirty="0">
                         <a:latin typeface="Arial" charset="0"/>
@@ -30463,7 +29959,255 @@
                           <a:ea typeface="Arial" pitchFamily="34" charset="-122"/>
                           <a:cs typeface="Arial" pitchFamily="34" charset="-120"/>
                         </a:rPr>
-                        <a:t>110,592</a:t>
+                        <a:t>the one the model actually says in Arabic. Llama:</a:t>
+                      </a:r>
+                      <a:endParaRPr lang="en-US" sz="1400" dirty="0">
+                        <a:latin typeface="Arial" charset="0"/>
+                        <a:ea typeface="Arial" charset="0"/>
+                        <a:cs typeface="Arial" charset="0"/>
+                      </a:endParaRPr>
+                    </a:p>
+                    <a:p>
+                      <a:pPr indent="0" marL="0">
+                        <a:buNone/>
+                      </a:pPr>
+                      <a:r>
+                        <a:rPr lang="en-US" sz="1400" dirty="0">
+                          <a:solidFill>
+                            <a:srgbClr val="1F2328"/>
+                          </a:solidFill>
+                          <a:latin typeface="Arial" pitchFamily="34" charset="0"/>
+                          <a:ea typeface="Arial" pitchFamily="34" charset="-122"/>
+                          <a:cs typeface="Arial" pitchFamily="34" charset="-120"/>
+                        </a:rPr>
+                        <a:t>لا أستطيع تقديم معلومات</a:t>
+                      </a:r>
+                      <a:endParaRPr lang="en-US" sz="1400" dirty="0">
+                        <a:latin typeface="Arial" charset="0"/>
+                        <a:ea typeface="Arial" charset="0"/>
+                        <a:cs typeface="Arial" charset="0"/>
+                      </a:endParaRPr>
+                    </a:p>
+                    <a:p>
+                      <a:pPr indent="0" marL="0">
+                        <a:buNone/>
+                      </a:pPr>
+                      <a:r>
+                        <a:rPr lang="en-US" sz="1400" dirty="0">
+                          <a:solidFill>
+                            <a:srgbClr val="1F2328"/>
+                          </a:solidFill>
+                          <a:latin typeface="Arial" pitchFamily="34" charset="0"/>
+                          <a:ea typeface="Arial" pitchFamily="34" charset="-122"/>
+                          <a:cs typeface="Arial" pitchFamily="34" charset="-120"/>
+                        </a:rPr>
+                        <a:t>(“I can't provide information”)</a:t>
+                      </a:r>
+                      <a:endParaRPr lang="en-US" sz="1400" dirty="0">
+                        <a:latin typeface="Arial" charset="0"/>
+                        <a:ea typeface="Arial" charset="0"/>
+                        <a:cs typeface="Arial" charset="0"/>
+                      </a:endParaRPr>
+                    </a:p>
+                  </a:txBody>
+                  <a:tcPr marL="73152" marR="73152" marT="36576" marB="36576" anchor="ctr">
+                    <a:lnL w="9525" cap="flat" cmpd="sng" algn="ctr">
+                      <a:solidFill>
+                        <a:srgbClr val="D8DEE6"/>
+                      </a:solidFill>
+                      <a:prstDash val="solid"/>
+                      <a:round/>
+                      <a:headEnd type="none" w="med" len="med"/>
+                      <a:tailEnd type="none" w="med" len="med"/>
+                    </a:lnL>
+                    <a:lnR w="9525" cap="flat" cmpd="sng" algn="ctr">
+                      <a:solidFill>
+                        <a:srgbClr val="D8DEE6"/>
+                      </a:solidFill>
+                      <a:prstDash val="solid"/>
+                      <a:round/>
+                      <a:headEnd type="none" w="med" len="med"/>
+                      <a:tailEnd type="none" w="med" len="med"/>
+                    </a:lnR>
+                    <a:lnT w="9525" cap="flat" cmpd="sng" algn="ctr">
+                      <a:solidFill>
+                        <a:srgbClr val="D8DEE6"/>
+                      </a:solidFill>
+                      <a:prstDash val="solid"/>
+                      <a:round/>
+                      <a:headEnd type="none" w="med" len="med"/>
+                      <a:tailEnd type="none" w="med" len="med"/>
+                    </a:lnT>
+                    <a:lnB w="9525" cap="flat" cmpd="sng" algn="ctr">
+                      <a:solidFill>
+                        <a:srgbClr val="D8DEE6"/>
+                      </a:solidFill>
+                      <a:prstDash val="solid"/>
+                      <a:round/>
+                      <a:headEnd type="none" w="med" len="med"/>
+                      <a:tailEnd type="none" w="med" len="med"/>
+                    </a:lnB>
+                    <a:solidFill>
+                      <a:srgbClr val="FFFFFF"/>
+                    </a:solidFill>
+                  </a:tcPr>
+                </a:tc>
+              </a:tr>
+              <a:tr h="475488">
+                <a:tc>
+                  <a:txBody>
+                    <a:bodyPr/>
+                    <a:lstStyle/>
+                    <a:p>
+                      <a:pPr indent="0" marL="0">
+                        <a:buNone/>
+                      </a:pPr>
+                      <a:r>
+                        <a:rPr lang="en-US" sz="1400" dirty="0">
+                          <a:solidFill>
+                            <a:srgbClr val="1F2328"/>
+                          </a:solidFill>
+                          <a:latin typeface="Arial" pitchFamily="34" charset="0"/>
+                          <a:ea typeface="Arial" pitchFamily="34" charset="-122"/>
+                          <a:cs typeface="Arial" pitchFamily="34" charset="-120"/>
+                        </a:rPr>
+                        <a:t>Output</a:t>
+                      </a:r>
+                      <a:endParaRPr lang="en-US" sz="1400" dirty="0">
+                        <a:latin typeface="Arial" charset="0"/>
+                        <a:ea typeface="Arial" charset="0"/>
+                        <a:cs typeface="Arial" charset="0"/>
+                      </a:endParaRPr>
+                    </a:p>
+                  </a:txBody>
+                  <a:tcPr marL="73152" marR="73152" marT="36576" marB="36576" anchor="ctr">
+                    <a:lnL w="9525" cap="flat" cmpd="sng" algn="ctr">
+                      <a:solidFill>
+                        <a:srgbClr val="D8DEE6"/>
+                      </a:solidFill>
+                      <a:prstDash val="solid"/>
+                      <a:round/>
+                      <a:headEnd type="none" w="med" len="med"/>
+                      <a:tailEnd type="none" w="med" len="med"/>
+                    </a:lnL>
+                    <a:lnR w="9525" cap="flat" cmpd="sng" algn="ctr">
+                      <a:solidFill>
+                        <a:srgbClr val="D8DEE6"/>
+                      </a:solidFill>
+                      <a:prstDash val="solid"/>
+                      <a:round/>
+                      <a:headEnd type="none" w="med" len="med"/>
+                      <a:tailEnd type="none" w="med" len="med"/>
+                    </a:lnR>
+                    <a:lnT w="9525" cap="flat" cmpd="sng" algn="ctr">
+                      <a:solidFill>
+                        <a:srgbClr val="D8DEE6"/>
+                      </a:solidFill>
+                      <a:prstDash val="solid"/>
+                      <a:round/>
+                      <a:headEnd type="none" w="med" len="med"/>
+                      <a:tailEnd type="none" w="med" len="med"/>
+                    </a:lnT>
+                    <a:lnB w="9525" cap="flat" cmpd="sng" algn="ctr">
+                      <a:solidFill>
+                        <a:srgbClr val="D8DEE6"/>
+                      </a:solidFill>
+                      <a:prstDash val="solid"/>
+                      <a:round/>
+                      <a:headEnd type="none" w="med" len="med"/>
+                      <a:tailEnd type="none" w="med" len="med"/>
+                    </a:lnB>
+                    <a:solidFill>
+                      <a:srgbClr val="FFFFFF"/>
+                    </a:solidFill>
+                  </a:tcPr>
+                </a:tc>
+                <a:tc>
+                  <a:txBody>
+                    <a:bodyPr/>
+                    <a:lstStyle/>
+                    <a:p>
+                      <a:pPr indent="0" marL="0">
+                        <a:buNone/>
+                      </a:pPr>
+                      <a:r>
+                        <a:rPr lang="en-US" sz="1400" dirty="0">
+                          <a:solidFill>
+                            <a:srgbClr val="1F2328"/>
+                          </a:solidFill>
+                          <a:latin typeface="Arial" pitchFamily="34" charset="0"/>
+                          <a:ea typeface="Arial" pitchFamily="34" charset="-122"/>
+                          <a:cs typeface="Arial" pitchFamily="34" charset="-120"/>
+                        </a:rPr>
+                        <a:t>top 5 neurons</a:t>
+                      </a:r>
+                      <a:endParaRPr lang="en-US" sz="1400" dirty="0">
+                        <a:latin typeface="Arial" charset="0"/>
+                        <a:ea typeface="Arial" charset="0"/>
+                        <a:cs typeface="Arial" charset="0"/>
+                      </a:endParaRPr>
+                    </a:p>
+                  </a:txBody>
+                  <a:tcPr marL="73152" marR="73152" marT="36576" marB="36576" anchor="ctr">
+                    <a:lnL w="9525" cap="flat" cmpd="sng" algn="ctr">
+                      <a:solidFill>
+                        <a:srgbClr val="D8DEE6"/>
+                      </a:solidFill>
+                      <a:prstDash val="solid"/>
+                      <a:round/>
+                      <a:headEnd type="none" w="med" len="med"/>
+                      <a:tailEnd type="none" w="med" len="med"/>
+                    </a:lnL>
+                    <a:lnR w="9525" cap="flat" cmpd="sng" algn="ctr">
+                      <a:solidFill>
+                        <a:srgbClr val="D8DEE6"/>
+                      </a:solidFill>
+                      <a:prstDash val="solid"/>
+                      <a:round/>
+                      <a:headEnd type="none" w="med" len="med"/>
+                      <a:tailEnd type="none" w="med" len="med"/>
+                    </a:lnR>
+                    <a:lnT w="9525" cap="flat" cmpd="sng" algn="ctr">
+                      <a:solidFill>
+                        <a:srgbClr val="D8DEE6"/>
+                      </a:solidFill>
+                      <a:prstDash val="solid"/>
+                      <a:round/>
+                      <a:headEnd type="none" w="med" len="med"/>
+                      <a:tailEnd type="none" w="med" len="med"/>
+                    </a:lnT>
+                    <a:lnB w="9525" cap="flat" cmpd="sng" algn="ctr">
+                      <a:solidFill>
+                        <a:srgbClr val="D8DEE6"/>
+                      </a:solidFill>
+                      <a:prstDash val="solid"/>
+                      <a:round/>
+                      <a:headEnd type="none" w="med" len="med"/>
+                      <a:tailEnd type="none" w="med" len="med"/>
+                    </a:lnB>
+                    <a:solidFill>
+                      <a:srgbClr val="FFFFFF"/>
+                    </a:solidFill>
+                  </a:tcPr>
+                </a:tc>
+                <a:tc>
+                  <a:txBody>
+                    <a:bodyPr/>
+                    <a:lstStyle/>
+                    <a:p>
+                      <a:pPr indent="0" marL="0">
+                        <a:buNone/>
+                      </a:pPr>
+                      <a:r>
+                        <a:rPr lang="en-US" sz="1400" dirty="0">
+                          <a:solidFill>
+                            <a:srgbClr val="1F2328"/>
+                          </a:solidFill>
+                          <a:latin typeface="Arial" pitchFamily="34" charset="0"/>
+                          <a:ea typeface="Arial" pitchFamily="34" charset="-122"/>
+                          <a:cs typeface="Arial" pitchFamily="34" charset="-120"/>
+                        </a:rPr>
+                        <a:t>top 5 neurons</a:t>
                       </a:r>
                       <a:endParaRPr lang="en-US" sz="1400" dirty="0">
                         <a:latin typeface="Arial" charset="0"/>
@@ -30521,24 +30265,26 @@
       </p:graphicFrame>
       <p:sp>
         <p:nvSpPr>
-          <p:cNvPr id="17" name="Shape 13"/>
-          <p:cNvSpPr/>
-          <p:nvPr/>
-        </p:nvSpPr>
-        <p:spPr>
-          <a:xfrm>
-            <a:off x="548640" y="5532120"/>
-            <a:ext cx="11094415" cy="731520"/>
-          </a:xfrm>
-          <a:prstGeom prst="rect">
-            <a:avLst/>
+          <p:cNvPr id="8" name="Shape 4"/>
+          <p:cNvSpPr/>
+          <p:nvPr/>
+        </p:nvSpPr>
+        <p:spPr>
+          <a:xfrm>
+            <a:off x="548640" y="4343400"/>
+            <a:ext cx="11094415" cy="1188720"/>
+          </a:xfrm>
+          <a:prstGeom prst="roundRect">
+            <a:avLst>
+              <a:gd name="adj" fmla="val 4615"/>
+            </a:avLst>
           </a:prstGeom>
           <a:solidFill>
-            <a:srgbClr val="FBF1E6"/>
+            <a:srgbClr val="F4F6F9"/>
           </a:solidFill>
           <a:ln w="12700">
             <a:solidFill>
-              <a:srgbClr val="FBF1E6"/>
+              <a:srgbClr val="D8DEE6"/>
             </a:solidFill>
             <a:prstDash val="solid"/>
           </a:ln>
@@ -30546,39 +30292,14 @@
       </p:sp>
       <p:sp>
         <p:nvSpPr>
-          <p:cNvPr id="18" name="Shape 14"/>
-          <p:cNvSpPr/>
-          <p:nvPr/>
-        </p:nvSpPr>
-        <p:spPr>
-          <a:xfrm>
-            <a:off x="548640" y="5532120"/>
-            <a:ext cx="73152" cy="731520"/>
-          </a:xfrm>
-          <a:prstGeom prst="rect">
-            <a:avLst/>
-          </a:prstGeom>
-          <a:solidFill>
-            <a:srgbClr val="B45309"/>
-          </a:solidFill>
-          <a:ln w="12700">
-            <a:solidFill>
-              <a:srgbClr val="B45309"/>
-            </a:solidFill>
-            <a:prstDash val="solid"/>
-          </a:ln>
-        </p:spPr>
-      </p:sp>
-      <p:sp>
-        <p:nvSpPr>
-          <p:cNvPr id="19" name="Text 15"/>
-          <p:cNvSpPr/>
-          <p:nvPr/>
-        </p:nvSpPr>
-        <p:spPr>
-          <a:xfrm>
-            <a:off x="822960" y="5532120"/>
-            <a:ext cx="10728655" cy="731520"/>
+          <p:cNvPr id="9" name="Text 5"/>
+          <p:cNvSpPr/>
+          <p:nvPr/>
+        </p:nvSpPr>
+        <p:spPr>
+          <a:xfrm>
+            <a:off x="777240" y="4407408"/>
+            <a:ext cx="10637215" cy="1078992"/>
           </a:xfrm>
           <a:prstGeom prst="rect">
             <a:avLst/>
@@ -30594,7 +30315,7 @@
               <a:buNone/>
             </a:pPr>
             <a:r>
-              <a:rPr lang="en-US" sz="1500" b="1" dirty="0">
+              <a:rPr lang="en-US" sz="1400" b="1" dirty="0">
                 <a:solidFill>
                   <a:srgbClr val="1F2328"/>
                 </a:solidFill>
@@ -30602,13 +30323,13 @@
                 <a:ea typeface="Arial" pitchFamily="34" charset="-122"/>
                 <a:cs typeface="Arial" pitchFamily="34" charset="-120"/>
               </a:rPr>
-              <a:t>With only Arabic data, the search finds the same refusal neuron. </a:t>
+              <a:t>Why a refusal sentence and not a judge? </a:t>
             </a:r>
             <a:pPr indent="0" marL="0">
               <a:buNone/>
             </a:pPr>
             <a:r>
-              <a:rPr lang="en-US" sz="1500" dirty="0">
+              <a:rPr lang="en-US" sz="1400" dirty="0">
                 <a:solidFill>
                   <a:srgbClr val="1F2328"/>
                 </a:solidFill>
@@ -30616,9 +30337,48 @@
                 <a:ea typeface="Arial" pitchFamily="34" charset="-122"/>
                 <a:cs typeface="Arial" pitchFamily="34" charset="-120"/>
               </a:rPr>
-              <a:t>Lesson: use the refusal sentence the model really says. With the English sentence, 1.7B's neuron fell to rank 568.</a:t>
-            </a:r>
-            <a:endParaRPr lang="en-US" sz="1500" dirty="0"/>
+              <a:t>The push measures how much a neuron makes the model start answering with a refusal: how the probability of that sentence changes when the neuron moves a tiny bit (a gradient). A judge only gives a yes/no on a finished answer, and you can't take a gradient through that. Apple used English sentences here (their Table 4). In Arabic the model refuses in Arabic, so we use its Arabic sentence.</a:t>
+            </a:r>
+            <a:endParaRPr lang="en-US" sz="1400" dirty="0"/>
+          </a:p>
+        </p:txBody>
+      </p:sp>
+      <p:sp>
+        <p:nvSpPr>
+          <p:cNvPr id="10" name="Text 6"/>
+          <p:cNvSpPr/>
+          <p:nvPr/>
+        </p:nvSpPr>
+        <p:spPr>
+          <a:xfrm>
+            <a:off x="548640" y="5669280"/>
+            <a:ext cx="11094415" cy="365760"/>
+          </a:xfrm>
+          <a:prstGeom prst="rect">
+            <a:avLst/>
+          </a:prstGeom>
+          <a:noFill/>
+          <a:ln/>
+        </p:spPr>
+        <p:txBody>
+          <a:bodyPr wrap="square" lIns="0" tIns="0" rIns="0" bIns="0" rtlCol="0" anchor="ctr"/>
+          <a:lstStyle/>
+          <a:p>
+            <a:pPr indent="0" marL="0">
+              <a:buNone/>
+            </a:pPr>
+            <a:r>
+              <a:rPr lang="en-US" sz="1300" dirty="0">
+                <a:solidFill>
+                  <a:srgbClr val="5F6B7A"/>
+                </a:solidFill>
+                <a:latin typeface="Arial" pitchFamily="34" charset="0"/>
+                <a:ea typeface="Arial" pitchFamily="34" charset="-122"/>
+                <a:cs typeface="Arial" pitchFamily="34" charset="-120"/>
+              </a:rPr>
+              <a:t>Part 2 (the rerank) needs a judge that reads Arabic, so it isn't done in Arabic yet.</a:t>
+            </a:r>
+            <a:endParaRPr lang="en-US" sz="1300" dirty="0"/>
           </a:p>
         </p:txBody>
       </p:sp>
@@ -30726,7 +30486,7 @@
                 <a:ea typeface="Arial" pitchFamily="34" charset="-122"/>
                 <a:cs typeface="Arial" pitchFamily="34" charset="-120"/>
               </a:rPr>
-              <a:t>Arabic C: the neuron as an Arabic safety filter</a:t>
+              <a:t>Arabic B: the top 5 neurons, English search vs Arabic search</a:t>
             </a:r>
             <a:endParaRPr lang="en-US" sz="2800" dirty="0"/>
           </a:p>
@@ -30771,32 +30531,1322 @@
           </a:p>
         </p:txBody>
       </p:sp>
+      <p:sp>
+        <p:nvSpPr>
+          <p:cNvPr id="6" name="Text 3"/>
+          <p:cNvSpPr/>
+          <p:nvPr/>
+        </p:nvSpPr>
+        <p:spPr>
+          <a:xfrm>
+            <a:off x="548640" y="1417320"/>
+            <a:ext cx="3520440" cy="365760"/>
+          </a:xfrm>
+          <a:prstGeom prst="rect">
+            <a:avLst/>
+          </a:prstGeom>
+          <a:noFill/>
+          <a:ln/>
+        </p:spPr>
+        <p:txBody>
+          <a:bodyPr wrap="square" lIns="0" tIns="0" rIns="0" bIns="0" rtlCol="0" anchor="ctr"/>
+          <a:lstStyle/>
+          <a:p>
+            <a:pPr algn="ctr" indent="0" marL="0">
+              <a:buNone/>
+            </a:pPr>
+            <a:r>
+              <a:rPr lang="en-US" sz="1700" b="1" dirty="0">
+                <a:solidFill>
+                  <a:srgbClr val="1F2328"/>
+                </a:solidFill>
+                <a:latin typeface="Arial" pitchFamily="34" charset="0"/>
+                <a:ea typeface="Arial" pitchFamily="34" charset="-122"/>
+                <a:cs typeface="Arial" pitchFamily="34" charset="-120"/>
+              </a:rPr>
+              <a:t>Qwen3-8B</a:t>
+            </a:r>
+            <a:endParaRPr lang="en-US" sz="1700" dirty="0"/>
+          </a:p>
+        </p:txBody>
+      </p:sp>
       <p:graphicFrame>
         <p:nvGraphicFramePr>
-          <p:cNvPr id="6" name="Chart 0" descr=""/>
-          <p:cNvGraphicFramePr/>
-          <p:nvPr/>
+          <p:cNvPr id="27" name="Table 0"/>
+          <p:cNvGraphicFramePr>
+            <a:graphicFrameLocks noGrp="1"/>
+          </p:cNvGraphicFramePr>
+          <p:nvPr>
+            <p:extLst>
+              <p:ext uri="{D42A27DB-BD31-4B8C-83A1-F6EECF244321}">
+                <p14:modId xmlns:p14="http://schemas.microsoft.com/office/powerpoint/2010/main" val="1579011935"/>
+              </p:ext>
+            </p:extLst>
+          </p:nvPr>
         </p:nvGraphicFramePr>
         <p:xfrm>
-          <a:off x="548640" y="1371600"/>
-          <a:ext cx="6675120" cy="4023360"/>
+          <a:off x="548640" y="1828800"/>
+          <a:ext cx="3520440" cy="914400"/>
         </p:xfrm>
-        <a:graphic xmlns:a="http://schemas.openxmlformats.org/drawingml/2006/main">
-          <a:graphicData uri="http://schemas.openxmlformats.org/drawingml/2006/chart">
-            <c:chart xmlns:c="http://schemas.openxmlformats.org/drawingml/2006/chart" r:id="rId1"/>
+        <a:graphic>
+          <a:graphicData uri="http://schemas.openxmlformats.org/drawingml/2006/table">
+            <a:tbl>
+              <a:tblPr/>
+              <a:tblGrid>
+                <a:gridCol w="502920"/>
+                <a:gridCol w="1508760"/>
+                <a:gridCol w="1508760"/>
+              </a:tblGrid>
+              <a:tr h="384048">
+                <a:tc>
+                  <a:txBody>
+                    <a:bodyPr/>
+                    <a:lstStyle/>
+                    <a:p>
+                      <a:pPr algn="ctr" indent="0" marL="0">
+                        <a:buNone/>
+                      </a:pPr>
+                      <a:r>
+                        <a:rPr lang="en-US" sz="1300" b="1" dirty="0">
+                          <a:solidFill>
+                            <a:srgbClr val="1F2328"/>
+                          </a:solidFill>
+                          <a:latin typeface="Arial" pitchFamily="34" charset="0"/>
+                          <a:ea typeface="Arial" pitchFamily="34" charset="-122"/>
+                          <a:cs typeface="Arial" pitchFamily="34" charset="-120"/>
+                        </a:rPr>
+                        <a:t>rank</a:t>
+                      </a:r>
+                      <a:endParaRPr lang="en-US" sz="1300" dirty="0">
+                        <a:latin typeface="Arial" charset="0"/>
+                        <a:ea typeface="Arial" charset="0"/>
+                        <a:cs typeface="Arial" charset="0"/>
+                      </a:endParaRPr>
+                    </a:p>
+                  </a:txBody>
+                  <a:tcPr marL="73152" marR="73152" marT="36576" marB="36576" anchor="ctr">
+                    <a:lnL w="9525" cap="flat" cmpd="sng" algn="ctr">
+                      <a:solidFill>
+                        <a:srgbClr val="D8DEE6"/>
+                      </a:solidFill>
+                      <a:prstDash val="solid"/>
+                      <a:round/>
+                      <a:headEnd type="none" w="med" len="med"/>
+                      <a:tailEnd type="none" w="med" len="med"/>
+                    </a:lnL>
+                    <a:lnR w="9525" cap="flat" cmpd="sng" algn="ctr">
+                      <a:solidFill>
+                        <a:srgbClr val="D8DEE6"/>
+                      </a:solidFill>
+                      <a:prstDash val="solid"/>
+                      <a:round/>
+                      <a:headEnd type="none" w="med" len="med"/>
+                      <a:tailEnd type="none" w="med" len="med"/>
+                    </a:lnR>
+                    <a:lnT w="9525" cap="flat" cmpd="sng" algn="ctr">
+                      <a:solidFill>
+                        <a:srgbClr val="D8DEE6"/>
+                      </a:solidFill>
+                      <a:prstDash val="solid"/>
+                      <a:round/>
+                      <a:headEnd type="none" w="med" len="med"/>
+                      <a:tailEnd type="none" w="med" len="med"/>
+                    </a:lnT>
+                    <a:lnB w="9525" cap="flat" cmpd="sng" algn="ctr">
+                      <a:solidFill>
+                        <a:srgbClr val="D8DEE6"/>
+                      </a:solidFill>
+                      <a:prstDash val="solid"/>
+                      <a:round/>
+                      <a:headEnd type="none" w="med" len="med"/>
+                      <a:tailEnd type="none" w="med" len="med"/>
+                    </a:lnB>
+                    <a:solidFill>
+                      <a:srgbClr val="F4F6F9"/>
+                    </a:solidFill>
+                  </a:tcPr>
+                </a:tc>
+                <a:tc>
+                  <a:txBody>
+                    <a:bodyPr/>
+                    <a:lstStyle/>
+                    <a:p>
+                      <a:pPr algn="ctr" indent="0" marL="0">
+                        <a:buNone/>
+                      </a:pPr>
+                      <a:r>
+                        <a:rPr lang="en-US" sz="1300" b="1" dirty="0">
+                          <a:solidFill>
+                            <a:srgbClr val="1F2328"/>
+                          </a:solidFill>
+                          <a:latin typeface="Arial" pitchFamily="34" charset="0"/>
+                          <a:ea typeface="Arial" pitchFamily="34" charset="-122"/>
+                          <a:cs typeface="Arial" pitchFamily="34" charset="-120"/>
+                        </a:rPr>
+                        <a:t>English search</a:t>
+                      </a:r>
+                      <a:endParaRPr lang="en-US" sz="1300" dirty="0">
+                        <a:latin typeface="Arial" charset="0"/>
+                        <a:ea typeface="Arial" charset="0"/>
+                        <a:cs typeface="Arial" charset="0"/>
+                      </a:endParaRPr>
+                    </a:p>
+                  </a:txBody>
+                  <a:tcPr marL="73152" marR="73152" marT="36576" marB="36576" anchor="ctr">
+                    <a:lnL w="9525" cap="flat" cmpd="sng" algn="ctr">
+                      <a:solidFill>
+                        <a:srgbClr val="D8DEE6"/>
+                      </a:solidFill>
+                      <a:prstDash val="solid"/>
+                      <a:round/>
+                      <a:headEnd type="none" w="med" len="med"/>
+                      <a:tailEnd type="none" w="med" len="med"/>
+                    </a:lnL>
+                    <a:lnR w="9525" cap="flat" cmpd="sng" algn="ctr">
+                      <a:solidFill>
+                        <a:srgbClr val="D8DEE6"/>
+                      </a:solidFill>
+                      <a:prstDash val="solid"/>
+                      <a:round/>
+                      <a:headEnd type="none" w="med" len="med"/>
+                      <a:tailEnd type="none" w="med" len="med"/>
+                    </a:lnR>
+                    <a:lnT w="9525" cap="flat" cmpd="sng" algn="ctr">
+                      <a:solidFill>
+                        <a:srgbClr val="D8DEE6"/>
+                      </a:solidFill>
+                      <a:prstDash val="solid"/>
+                      <a:round/>
+                      <a:headEnd type="none" w="med" len="med"/>
+                      <a:tailEnd type="none" w="med" len="med"/>
+                    </a:lnT>
+                    <a:lnB w="9525" cap="flat" cmpd="sng" algn="ctr">
+                      <a:solidFill>
+                        <a:srgbClr val="D8DEE6"/>
+                      </a:solidFill>
+                      <a:prstDash val="solid"/>
+                      <a:round/>
+                      <a:headEnd type="none" w="med" len="med"/>
+                      <a:tailEnd type="none" w="med" len="med"/>
+                    </a:lnB>
+                    <a:solidFill>
+                      <a:srgbClr val="F4F6F9"/>
+                    </a:solidFill>
+                  </a:tcPr>
+                </a:tc>
+                <a:tc>
+                  <a:txBody>
+                    <a:bodyPr/>
+                    <a:lstStyle/>
+                    <a:p>
+                      <a:pPr algn="ctr" indent="0" marL="0">
+                        <a:buNone/>
+                      </a:pPr>
+                      <a:r>
+                        <a:rPr lang="en-US" sz="1300" b="1" dirty="0">
+                          <a:solidFill>
+                            <a:srgbClr val="1F2328"/>
+                          </a:solidFill>
+                          <a:latin typeface="Arial" pitchFamily="34" charset="0"/>
+                          <a:ea typeface="Arial" pitchFamily="34" charset="-122"/>
+                          <a:cs typeface="Arial" pitchFamily="34" charset="-120"/>
+                        </a:rPr>
+                        <a:t>Arabic search</a:t>
+                      </a:r>
+                      <a:endParaRPr lang="en-US" sz="1300" dirty="0">
+                        <a:latin typeface="Arial" charset="0"/>
+                        <a:ea typeface="Arial" charset="0"/>
+                        <a:cs typeface="Arial" charset="0"/>
+                      </a:endParaRPr>
+                    </a:p>
+                  </a:txBody>
+                  <a:tcPr marL="73152" marR="73152" marT="36576" marB="36576" anchor="ctr">
+                    <a:lnL w="9525" cap="flat" cmpd="sng" algn="ctr">
+                      <a:solidFill>
+                        <a:srgbClr val="D8DEE6"/>
+                      </a:solidFill>
+                      <a:prstDash val="solid"/>
+                      <a:round/>
+                      <a:headEnd type="none" w="med" len="med"/>
+                      <a:tailEnd type="none" w="med" len="med"/>
+                    </a:lnL>
+                    <a:lnR w="9525" cap="flat" cmpd="sng" algn="ctr">
+                      <a:solidFill>
+                        <a:srgbClr val="D8DEE6"/>
+                      </a:solidFill>
+                      <a:prstDash val="solid"/>
+                      <a:round/>
+                      <a:headEnd type="none" w="med" len="med"/>
+                      <a:tailEnd type="none" w="med" len="med"/>
+                    </a:lnR>
+                    <a:lnT w="9525" cap="flat" cmpd="sng" algn="ctr">
+                      <a:solidFill>
+                        <a:srgbClr val="D8DEE6"/>
+                      </a:solidFill>
+                      <a:prstDash val="solid"/>
+                      <a:round/>
+                      <a:headEnd type="none" w="med" len="med"/>
+                      <a:tailEnd type="none" w="med" len="med"/>
+                    </a:lnT>
+                    <a:lnB w="9525" cap="flat" cmpd="sng" algn="ctr">
+                      <a:solidFill>
+                        <a:srgbClr val="D8DEE6"/>
+                      </a:solidFill>
+                      <a:prstDash val="solid"/>
+                      <a:round/>
+                      <a:headEnd type="none" w="med" len="med"/>
+                      <a:tailEnd type="none" w="med" len="med"/>
+                    </a:lnB>
+                    <a:solidFill>
+                      <a:srgbClr val="F4F6F9"/>
+                    </a:solidFill>
+                  </a:tcPr>
+                </a:tc>
+              </a:tr>
+              <a:tr h="384048">
+                <a:tc>
+                  <a:txBody>
+                    <a:bodyPr/>
+                    <a:lstStyle/>
+                    <a:p>
+                      <a:pPr algn="ctr" indent="0" marL="0">
+                        <a:buNone/>
+                      </a:pPr>
+                      <a:r>
+                        <a:rPr lang="en-US" sz="1300" dirty="0">
+                          <a:solidFill>
+                            <a:srgbClr val="5F6B7A"/>
+                          </a:solidFill>
+                          <a:latin typeface="Arial" pitchFamily="34" charset="0"/>
+                          <a:ea typeface="Arial" pitchFamily="34" charset="-122"/>
+                          <a:cs typeface="Arial" pitchFamily="34" charset="-120"/>
+                        </a:rPr>
+                        <a:t>1</a:t>
+                      </a:r>
+                      <a:endParaRPr lang="en-US" sz="1300" dirty="0">
+                        <a:latin typeface="Arial" charset="0"/>
+                        <a:ea typeface="Arial" charset="0"/>
+                        <a:cs typeface="Arial" charset="0"/>
+                      </a:endParaRPr>
+                    </a:p>
+                  </a:txBody>
+                  <a:tcPr marL="73152" marR="73152" marT="36576" marB="36576" anchor="ctr">
+                    <a:lnL w="9525" cap="flat" cmpd="sng" algn="ctr">
+                      <a:solidFill>
+                        <a:srgbClr val="D8DEE6"/>
+                      </a:solidFill>
+                      <a:prstDash val="solid"/>
+                      <a:round/>
+                      <a:headEnd type="none" w="med" len="med"/>
+                      <a:tailEnd type="none" w="med" len="med"/>
+                    </a:lnL>
+                    <a:lnR w="9525" cap="flat" cmpd="sng" algn="ctr">
+                      <a:solidFill>
+                        <a:srgbClr val="D8DEE6"/>
+                      </a:solidFill>
+                      <a:prstDash val="solid"/>
+                      <a:round/>
+                      <a:headEnd type="none" w="med" len="med"/>
+                      <a:tailEnd type="none" w="med" len="med"/>
+                    </a:lnR>
+                    <a:lnT w="9525" cap="flat" cmpd="sng" algn="ctr">
+                      <a:solidFill>
+                        <a:srgbClr val="D8DEE6"/>
+                      </a:solidFill>
+                      <a:prstDash val="solid"/>
+                      <a:round/>
+                      <a:headEnd type="none" w="med" len="med"/>
+                      <a:tailEnd type="none" w="med" len="med"/>
+                    </a:lnT>
+                    <a:lnB w="9525" cap="flat" cmpd="sng" algn="ctr">
+                      <a:solidFill>
+                        <a:srgbClr val="D8DEE6"/>
+                      </a:solidFill>
+                      <a:prstDash val="solid"/>
+                      <a:round/>
+                      <a:headEnd type="none" w="med" len="med"/>
+                      <a:tailEnd type="none" w="med" len="med"/>
+                    </a:lnB>
+                    <a:solidFill>
+                      <a:srgbClr val="FFFFFF"/>
+                    </a:solidFill>
+                  </a:tcPr>
+                </a:tc>
+                <a:tc>
+                  <a:txBody>
+                    <a:bodyPr/>
+                    <a:lstStyle/>
+                    <a:p>
+                      <a:pPr algn="ctr" indent="0" marL="0">
+                        <a:buNone/>
+                      </a:pPr>
+                      <a:r>
+                        <a:rPr lang="en-US" sz="1300" b="1" dirty="0">
+                          <a:solidFill>
+                            <a:srgbClr val="FFFFFF"/>
+                          </a:solidFill>
+                          <a:latin typeface="Arial" pitchFamily="34" charset="0"/>
+                          <a:ea typeface="Arial" pitchFamily="34" charset="-122"/>
+                          <a:cs typeface="Arial" pitchFamily="34" charset="-120"/>
+                        </a:rPr>
+                        <a:t>L14:F7924</a:t>
+                      </a:r>
+                      <a:endParaRPr lang="en-US" sz="1300" dirty="0">
+                        <a:latin typeface="Arial" charset="0"/>
+                        <a:ea typeface="Arial" charset="0"/>
+                        <a:cs typeface="Arial" charset="0"/>
+                      </a:endParaRPr>
+                    </a:p>
+                  </a:txBody>
+                  <a:tcPr marL="73152" marR="73152" marT="36576" marB="36576" anchor="ctr">
+                    <a:lnL w="9525" cap="flat" cmpd="sng" algn="ctr">
+                      <a:solidFill>
+                        <a:srgbClr val="D8DEE6"/>
+                      </a:solidFill>
+                      <a:prstDash val="solid"/>
+                      <a:round/>
+                      <a:headEnd type="none" w="med" len="med"/>
+                      <a:tailEnd type="none" w="med" len="med"/>
+                    </a:lnL>
+                    <a:lnR w="9525" cap="flat" cmpd="sng" algn="ctr">
+                      <a:solidFill>
+                        <a:srgbClr val="D8DEE6"/>
+                      </a:solidFill>
+                      <a:prstDash val="solid"/>
+                      <a:round/>
+                      <a:headEnd type="none" w="med" len="med"/>
+                      <a:tailEnd type="none" w="med" len="med"/>
+                    </a:lnR>
+                    <a:lnT w="9525" cap="flat" cmpd="sng" algn="ctr">
+                      <a:solidFill>
+                        <a:srgbClr val="D8DEE6"/>
+                      </a:solidFill>
+                      <a:prstDash val="solid"/>
+                      <a:round/>
+                      <a:headEnd type="none" w="med" len="med"/>
+                      <a:tailEnd type="none" w="med" len="med"/>
+                    </a:lnT>
+                    <a:lnB w="9525" cap="flat" cmpd="sng" algn="ctr">
+                      <a:solidFill>
+                        <a:srgbClr val="D8DEE6"/>
+                      </a:solidFill>
+                      <a:prstDash val="solid"/>
+                      <a:round/>
+                      <a:headEnd type="none" w="med" len="med"/>
+                      <a:tailEnd type="none" w="med" len="med"/>
+                    </a:lnB>
+                    <a:solidFill>
+                      <a:srgbClr val="0F766E"/>
+                    </a:solidFill>
+                  </a:tcPr>
+                </a:tc>
+                <a:tc>
+                  <a:txBody>
+                    <a:bodyPr/>
+                    <a:lstStyle/>
+                    <a:p>
+                      <a:pPr algn="ctr" indent="0" marL="0">
+                        <a:buNone/>
+                      </a:pPr>
+                      <a:r>
+                        <a:rPr lang="en-US" sz="1300" dirty="0">
+                          <a:solidFill>
+                            <a:srgbClr val="1F2328"/>
+                          </a:solidFill>
+                          <a:latin typeface="Arial" pitchFamily="34" charset="0"/>
+                          <a:ea typeface="Arial" pitchFamily="34" charset="-122"/>
+                          <a:cs typeface="Arial" pitchFamily="34" charset="-120"/>
+                        </a:rPr>
+                        <a:t>L18:F7664</a:t>
+                      </a:r>
+                      <a:endParaRPr lang="en-US" sz="1300" dirty="0">
+                        <a:latin typeface="Arial" charset="0"/>
+                        <a:ea typeface="Arial" charset="0"/>
+                        <a:cs typeface="Arial" charset="0"/>
+                      </a:endParaRPr>
+                    </a:p>
+                  </a:txBody>
+                  <a:tcPr marL="73152" marR="73152" marT="36576" marB="36576" anchor="ctr">
+                    <a:lnL w="9525" cap="flat" cmpd="sng" algn="ctr">
+                      <a:solidFill>
+                        <a:srgbClr val="D8DEE6"/>
+                      </a:solidFill>
+                      <a:prstDash val="solid"/>
+                      <a:round/>
+                      <a:headEnd type="none" w="med" len="med"/>
+                      <a:tailEnd type="none" w="med" len="med"/>
+                    </a:lnL>
+                    <a:lnR w="9525" cap="flat" cmpd="sng" algn="ctr">
+                      <a:solidFill>
+                        <a:srgbClr val="D8DEE6"/>
+                      </a:solidFill>
+                      <a:prstDash val="solid"/>
+                      <a:round/>
+                      <a:headEnd type="none" w="med" len="med"/>
+                      <a:tailEnd type="none" w="med" len="med"/>
+                    </a:lnR>
+                    <a:lnT w="9525" cap="flat" cmpd="sng" algn="ctr">
+                      <a:solidFill>
+                        <a:srgbClr val="D8DEE6"/>
+                      </a:solidFill>
+                      <a:prstDash val="solid"/>
+                      <a:round/>
+                      <a:headEnd type="none" w="med" len="med"/>
+                      <a:tailEnd type="none" w="med" len="med"/>
+                    </a:lnT>
+                    <a:lnB w="9525" cap="flat" cmpd="sng" algn="ctr">
+                      <a:solidFill>
+                        <a:srgbClr val="D8DEE6"/>
+                      </a:solidFill>
+                      <a:prstDash val="solid"/>
+                      <a:round/>
+                      <a:headEnd type="none" w="med" len="med"/>
+                      <a:tailEnd type="none" w="med" len="med"/>
+                    </a:lnB>
+                    <a:solidFill>
+                      <a:srgbClr val="E6F2F1"/>
+                    </a:solidFill>
+                  </a:tcPr>
+                </a:tc>
+              </a:tr>
+              <a:tr h="384048">
+                <a:tc>
+                  <a:txBody>
+                    <a:bodyPr/>
+                    <a:lstStyle/>
+                    <a:p>
+                      <a:pPr algn="ctr" indent="0" marL="0">
+                        <a:buNone/>
+                      </a:pPr>
+                      <a:r>
+                        <a:rPr lang="en-US" sz="1300" dirty="0">
+                          <a:solidFill>
+                            <a:srgbClr val="5F6B7A"/>
+                          </a:solidFill>
+                          <a:latin typeface="Arial" pitchFamily="34" charset="0"/>
+                          <a:ea typeface="Arial" pitchFamily="34" charset="-122"/>
+                          <a:cs typeface="Arial" pitchFamily="34" charset="-120"/>
+                        </a:rPr>
+                        <a:t>2</a:t>
+                      </a:r>
+                      <a:endParaRPr lang="en-US" sz="1300" dirty="0">
+                        <a:latin typeface="Arial" charset="0"/>
+                        <a:ea typeface="Arial" charset="0"/>
+                        <a:cs typeface="Arial" charset="0"/>
+                      </a:endParaRPr>
+                    </a:p>
+                  </a:txBody>
+                  <a:tcPr marL="73152" marR="73152" marT="36576" marB="36576" anchor="ctr">
+                    <a:lnL w="9525" cap="flat" cmpd="sng" algn="ctr">
+                      <a:solidFill>
+                        <a:srgbClr val="D8DEE6"/>
+                      </a:solidFill>
+                      <a:prstDash val="solid"/>
+                      <a:round/>
+                      <a:headEnd type="none" w="med" len="med"/>
+                      <a:tailEnd type="none" w="med" len="med"/>
+                    </a:lnL>
+                    <a:lnR w="9525" cap="flat" cmpd="sng" algn="ctr">
+                      <a:solidFill>
+                        <a:srgbClr val="D8DEE6"/>
+                      </a:solidFill>
+                      <a:prstDash val="solid"/>
+                      <a:round/>
+                      <a:headEnd type="none" w="med" len="med"/>
+                      <a:tailEnd type="none" w="med" len="med"/>
+                    </a:lnR>
+                    <a:lnT w="9525" cap="flat" cmpd="sng" algn="ctr">
+                      <a:solidFill>
+                        <a:srgbClr val="D8DEE6"/>
+                      </a:solidFill>
+                      <a:prstDash val="solid"/>
+                      <a:round/>
+                      <a:headEnd type="none" w="med" len="med"/>
+                      <a:tailEnd type="none" w="med" len="med"/>
+                    </a:lnT>
+                    <a:lnB w="9525" cap="flat" cmpd="sng" algn="ctr">
+                      <a:solidFill>
+                        <a:srgbClr val="D8DEE6"/>
+                      </a:solidFill>
+                      <a:prstDash val="solid"/>
+                      <a:round/>
+                      <a:headEnd type="none" w="med" len="med"/>
+                      <a:tailEnd type="none" w="med" len="med"/>
+                    </a:lnB>
+                    <a:solidFill>
+                      <a:srgbClr val="FFFFFF"/>
+                    </a:solidFill>
+                  </a:tcPr>
+                </a:tc>
+                <a:tc>
+                  <a:txBody>
+                    <a:bodyPr/>
+                    <a:lstStyle/>
+                    <a:p>
+                      <a:pPr algn="ctr" indent="0" marL="0">
+                        <a:buNone/>
+                      </a:pPr>
+                      <a:r>
+                        <a:rPr lang="en-US" sz="1300" dirty="0">
+                          <a:solidFill>
+                            <a:srgbClr val="1F2328"/>
+                          </a:solidFill>
+                          <a:latin typeface="Arial" pitchFamily="34" charset="0"/>
+                          <a:ea typeface="Arial" pitchFamily="34" charset="-122"/>
+                          <a:cs typeface="Arial" pitchFamily="34" charset="-120"/>
+                        </a:rPr>
+                        <a:t>L16:F5318</a:t>
+                      </a:r>
+                      <a:endParaRPr lang="en-US" sz="1300" dirty="0">
+                        <a:latin typeface="Arial" charset="0"/>
+                        <a:ea typeface="Arial" charset="0"/>
+                        <a:cs typeface="Arial" charset="0"/>
+                      </a:endParaRPr>
+                    </a:p>
+                  </a:txBody>
+                  <a:tcPr marL="73152" marR="73152" marT="36576" marB="36576" anchor="ctr">
+                    <a:lnL w="9525" cap="flat" cmpd="sng" algn="ctr">
+                      <a:solidFill>
+                        <a:srgbClr val="D8DEE6"/>
+                      </a:solidFill>
+                      <a:prstDash val="solid"/>
+                      <a:round/>
+                      <a:headEnd type="none" w="med" len="med"/>
+                      <a:tailEnd type="none" w="med" len="med"/>
+                    </a:lnL>
+                    <a:lnR w="9525" cap="flat" cmpd="sng" algn="ctr">
+                      <a:solidFill>
+                        <a:srgbClr val="D8DEE6"/>
+                      </a:solidFill>
+                      <a:prstDash val="solid"/>
+                      <a:round/>
+                      <a:headEnd type="none" w="med" len="med"/>
+                      <a:tailEnd type="none" w="med" len="med"/>
+                    </a:lnR>
+                    <a:lnT w="9525" cap="flat" cmpd="sng" algn="ctr">
+                      <a:solidFill>
+                        <a:srgbClr val="D8DEE6"/>
+                      </a:solidFill>
+                      <a:prstDash val="solid"/>
+                      <a:round/>
+                      <a:headEnd type="none" w="med" len="med"/>
+                      <a:tailEnd type="none" w="med" len="med"/>
+                    </a:lnT>
+                    <a:lnB w="9525" cap="flat" cmpd="sng" algn="ctr">
+                      <a:solidFill>
+                        <a:srgbClr val="D8DEE6"/>
+                      </a:solidFill>
+                      <a:prstDash val="solid"/>
+                      <a:round/>
+                      <a:headEnd type="none" w="med" len="med"/>
+                      <a:tailEnd type="none" w="med" len="med"/>
+                    </a:lnB>
+                    <a:solidFill>
+                      <a:srgbClr val="E6F2F1"/>
+                    </a:solidFill>
+                  </a:tcPr>
+                </a:tc>
+                <a:tc>
+                  <a:txBody>
+                    <a:bodyPr/>
+                    <a:lstStyle/>
+                    <a:p>
+                      <a:pPr algn="ctr" indent="0" marL="0">
+                        <a:buNone/>
+                      </a:pPr>
+                      <a:r>
+                        <a:rPr lang="en-US" sz="1300" dirty="0">
+                          <a:solidFill>
+                            <a:srgbClr val="1F2328"/>
+                          </a:solidFill>
+                          <a:latin typeface="Arial" pitchFamily="34" charset="0"/>
+                          <a:ea typeface="Arial" pitchFamily="34" charset="-122"/>
+                          <a:cs typeface="Arial" pitchFamily="34" charset="-120"/>
+                        </a:rPr>
+                        <a:t>L16:F8474</a:t>
+                      </a:r>
+                      <a:endParaRPr lang="en-US" sz="1300" dirty="0">
+                        <a:latin typeface="Arial" charset="0"/>
+                        <a:ea typeface="Arial" charset="0"/>
+                        <a:cs typeface="Arial" charset="0"/>
+                      </a:endParaRPr>
+                    </a:p>
+                  </a:txBody>
+                  <a:tcPr marL="73152" marR="73152" marT="36576" marB="36576" anchor="ctr">
+                    <a:lnL w="9525" cap="flat" cmpd="sng" algn="ctr">
+                      <a:solidFill>
+                        <a:srgbClr val="D8DEE6"/>
+                      </a:solidFill>
+                      <a:prstDash val="solid"/>
+                      <a:round/>
+                      <a:headEnd type="none" w="med" len="med"/>
+                      <a:tailEnd type="none" w="med" len="med"/>
+                    </a:lnL>
+                    <a:lnR w="9525" cap="flat" cmpd="sng" algn="ctr">
+                      <a:solidFill>
+                        <a:srgbClr val="D8DEE6"/>
+                      </a:solidFill>
+                      <a:prstDash val="solid"/>
+                      <a:round/>
+                      <a:headEnd type="none" w="med" len="med"/>
+                      <a:tailEnd type="none" w="med" len="med"/>
+                    </a:lnR>
+                    <a:lnT w="9525" cap="flat" cmpd="sng" algn="ctr">
+                      <a:solidFill>
+                        <a:srgbClr val="D8DEE6"/>
+                      </a:solidFill>
+                      <a:prstDash val="solid"/>
+                      <a:round/>
+                      <a:headEnd type="none" w="med" len="med"/>
+                      <a:tailEnd type="none" w="med" len="med"/>
+                    </a:lnT>
+                    <a:lnB w="9525" cap="flat" cmpd="sng" algn="ctr">
+                      <a:solidFill>
+                        <a:srgbClr val="D8DEE6"/>
+                      </a:solidFill>
+                      <a:prstDash val="solid"/>
+                      <a:round/>
+                      <a:headEnd type="none" w="med" len="med"/>
+                      <a:tailEnd type="none" w="med" len="med"/>
+                    </a:lnB>
+                    <a:solidFill>
+                      <a:srgbClr val="E6F2F1"/>
+                    </a:solidFill>
+                  </a:tcPr>
+                </a:tc>
+              </a:tr>
+              <a:tr h="384048">
+                <a:tc>
+                  <a:txBody>
+                    <a:bodyPr/>
+                    <a:lstStyle/>
+                    <a:p>
+                      <a:pPr algn="ctr" indent="0" marL="0">
+                        <a:buNone/>
+                      </a:pPr>
+                      <a:r>
+                        <a:rPr lang="en-US" sz="1300" dirty="0">
+                          <a:solidFill>
+                            <a:srgbClr val="5F6B7A"/>
+                          </a:solidFill>
+                          <a:latin typeface="Arial" pitchFamily="34" charset="0"/>
+                          <a:ea typeface="Arial" pitchFamily="34" charset="-122"/>
+                          <a:cs typeface="Arial" pitchFamily="34" charset="-120"/>
+                        </a:rPr>
+                        <a:t>3</a:t>
+                      </a:r>
+                      <a:endParaRPr lang="en-US" sz="1300" dirty="0">
+                        <a:latin typeface="Arial" charset="0"/>
+                        <a:ea typeface="Arial" charset="0"/>
+                        <a:cs typeface="Arial" charset="0"/>
+                      </a:endParaRPr>
+                    </a:p>
+                  </a:txBody>
+                  <a:tcPr marL="73152" marR="73152" marT="36576" marB="36576" anchor="ctr">
+                    <a:lnL w="9525" cap="flat" cmpd="sng" algn="ctr">
+                      <a:solidFill>
+                        <a:srgbClr val="D8DEE6"/>
+                      </a:solidFill>
+                      <a:prstDash val="solid"/>
+                      <a:round/>
+                      <a:headEnd type="none" w="med" len="med"/>
+                      <a:tailEnd type="none" w="med" len="med"/>
+                    </a:lnL>
+                    <a:lnR w="9525" cap="flat" cmpd="sng" algn="ctr">
+                      <a:solidFill>
+                        <a:srgbClr val="D8DEE6"/>
+                      </a:solidFill>
+                      <a:prstDash val="solid"/>
+                      <a:round/>
+                      <a:headEnd type="none" w="med" len="med"/>
+                      <a:tailEnd type="none" w="med" len="med"/>
+                    </a:lnR>
+                    <a:lnT w="9525" cap="flat" cmpd="sng" algn="ctr">
+                      <a:solidFill>
+                        <a:srgbClr val="D8DEE6"/>
+                      </a:solidFill>
+                      <a:prstDash val="solid"/>
+                      <a:round/>
+                      <a:headEnd type="none" w="med" len="med"/>
+                      <a:tailEnd type="none" w="med" len="med"/>
+                    </a:lnT>
+                    <a:lnB w="9525" cap="flat" cmpd="sng" algn="ctr">
+                      <a:solidFill>
+                        <a:srgbClr val="D8DEE6"/>
+                      </a:solidFill>
+                      <a:prstDash val="solid"/>
+                      <a:round/>
+                      <a:headEnd type="none" w="med" len="med"/>
+                      <a:tailEnd type="none" w="med" len="med"/>
+                    </a:lnB>
+                    <a:solidFill>
+                      <a:srgbClr val="FFFFFF"/>
+                    </a:solidFill>
+                  </a:tcPr>
+                </a:tc>
+                <a:tc>
+                  <a:txBody>
+                    <a:bodyPr/>
+                    <a:lstStyle/>
+                    <a:p>
+                      <a:pPr algn="ctr" indent="0" marL="0">
+                        <a:buNone/>
+                      </a:pPr>
+                      <a:r>
+                        <a:rPr lang="en-US" sz="1300" dirty="0">
+                          <a:solidFill>
+                            <a:srgbClr val="1F2328"/>
+                          </a:solidFill>
+                          <a:latin typeface="Arial" pitchFamily="34" charset="0"/>
+                          <a:ea typeface="Arial" pitchFamily="34" charset="-122"/>
+                          <a:cs typeface="Arial" pitchFamily="34" charset="-120"/>
+                        </a:rPr>
+                        <a:t>L16:F227</a:t>
+                      </a:r>
+                      <a:endParaRPr lang="en-US" sz="1300" dirty="0">
+                        <a:latin typeface="Arial" charset="0"/>
+                        <a:ea typeface="Arial" charset="0"/>
+                        <a:cs typeface="Arial" charset="0"/>
+                      </a:endParaRPr>
+                    </a:p>
+                  </a:txBody>
+                  <a:tcPr marL="73152" marR="73152" marT="36576" marB="36576" anchor="ctr">
+                    <a:lnL w="9525" cap="flat" cmpd="sng" algn="ctr">
+                      <a:solidFill>
+                        <a:srgbClr val="D8DEE6"/>
+                      </a:solidFill>
+                      <a:prstDash val="solid"/>
+                      <a:round/>
+                      <a:headEnd type="none" w="med" len="med"/>
+                      <a:tailEnd type="none" w="med" len="med"/>
+                    </a:lnL>
+                    <a:lnR w="9525" cap="flat" cmpd="sng" algn="ctr">
+                      <a:solidFill>
+                        <a:srgbClr val="D8DEE6"/>
+                      </a:solidFill>
+                      <a:prstDash val="solid"/>
+                      <a:round/>
+                      <a:headEnd type="none" w="med" len="med"/>
+                      <a:tailEnd type="none" w="med" len="med"/>
+                    </a:lnR>
+                    <a:lnT w="9525" cap="flat" cmpd="sng" algn="ctr">
+                      <a:solidFill>
+                        <a:srgbClr val="D8DEE6"/>
+                      </a:solidFill>
+                      <a:prstDash val="solid"/>
+                      <a:round/>
+                      <a:headEnd type="none" w="med" len="med"/>
+                      <a:tailEnd type="none" w="med" len="med"/>
+                    </a:lnT>
+                    <a:lnB w="9525" cap="flat" cmpd="sng" algn="ctr">
+                      <a:solidFill>
+                        <a:srgbClr val="D8DEE6"/>
+                      </a:solidFill>
+                      <a:prstDash val="solid"/>
+                      <a:round/>
+                      <a:headEnd type="none" w="med" len="med"/>
+                      <a:tailEnd type="none" w="med" len="med"/>
+                    </a:lnB>
+                    <a:solidFill>
+                      <a:srgbClr val="FFFFFF"/>
+                    </a:solidFill>
+                  </a:tcPr>
+                </a:tc>
+                <a:tc>
+                  <a:txBody>
+                    <a:bodyPr/>
+                    <a:lstStyle/>
+                    <a:p>
+                      <a:pPr algn="ctr" indent="0" marL="0">
+                        <a:buNone/>
+                      </a:pPr>
+                      <a:r>
+                        <a:rPr lang="en-US" sz="1300" b="1" dirty="0">
+                          <a:solidFill>
+                            <a:srgbClr val="FFFFFF"/>
+                          </a:solidFill>
+                          <a:latin typeface="Arial" pitchFamily="34" charset="0"/>
+                          <a:ea typeface="Arial" pitchFamily="34" charset="-122"/>
+                          <a:cs typeface="Arial" pitchFamily="34" charset="-120"/>
+                        </a:rPr>
+                        <a:t>L14:F7924</a:t>
+                      </a:r>
+                      <a:endParaRPr lang="en-US" sz="1300" dirty="0">
+                        <a:latin typeface="Arial" charset="0"/>
+                        <a:ea typeface="Arial" charset="0"/>
+                        <a:cs typeface="Arial" charset="0"/>
+                      </a:endParaRPr>
+                    </a:p>
+                  </a:txBody>
+                  <a:tcPr marL="73152" marR="73152" marT="36576" marB="36576" anchor="ctr">
+                    <a:lnL w="9525" cap="flat" cmpd="sng" algn="ctr">
+                      <a:solidFill>
+                        <a:srgbClr val="D8DEE6"/>
+                      </a:solidFill>
+                      <a:prstDash val="solid"/>
+                      <a:round/>
+                      <a:headEnd type="none" w="med" len="med"/>
+                      <a:tailEnd type="none" w="med" len="med"/>
+                    </a:lnL>
+                    <a:lnR w="9525" cap="flat" cmpd="sng" algn="ctr">
+                      <a:solidFill>
+                        <a:srgbClr val="D8DEE6"/>
+                      </a:solidFill>
+                      <a:prstDash val="solid"/>
+                      <a:round/>
+                      <a:headEnd type="none" w="med" len="med"/>
+                      <a:tailEnd type="none" w="med" len="med"/>
+                    </a:lnR>
+                    <a:lnT w="9525" cap="flat" cmpd="sng" algn="ctr">
+                      <a:solidFill>
+                        <a:srgbClr val="D8DEE6"/>
+                      </a:solidFill>
+                      <a:prstDash val="solid"/>
+                      <a:round/>
+                      <a:headEnd type="none" w="med" len="med"/>
+                      <a:tailEnd type="none" w="med" len="med"/>
+                    </a:lnT>
+                    <a:lnB w="9525" cap="flat" cmpd="sng" algn="ctr">
+                      <a:solidFill>
+                        <a:srgbClr val="D8DEE6"/>
+                      </a:solidFill>
+                      <a:prstDash val="solid"/>
+                      <a:round/>
+                      <a:headEnd type="none" w="med" len="med"/>
+                      <a:tailEnd type="none" w="med" len="med"/>
+                    </a:lnB>
+                    <a:solidFill>
+                      <a:srgbClr val="0F766E"/>
+                    </a:solidFill>
+                  </a:tcPr>
+                </a:tc>
+              </a:tr>
+              <a:tr h="384048">
+                <a:tc>
+                  <a:txBody>
+                    <a:bodyPr/>
+                    <a:lstStyle/>
+                    <a:p>
+                      <a:pPr algn="ctr" indent="0" marL="0">
+                        <a:buNone/>
+                      </a:pPr>
+                      <a:r>
+                        <a:rPr lang="en-US" sz="1300" dirty="0">
+                          <a:solidFill>
+                            <a:srgbClr val="5F6B7A"/>
+                          </a:solidFill>
+                          <a:latin typeface="Arial" pitchFamily="34" charset="0"/>
+                          <a:ea typeface="Arial" pitchFamily="34" charset="-122"/>
+                          <a:cs typeface="Arial" pitchFamily="34" charset="-120"/>
+                        </a:rPr>
+                        <a:t>4</a:t>
+                      </a:r>
+                      <a:endParaRPr lang="en-US" sz="1300" dirty="0">
+                        <a:latin typeface="Arial" charset="0"/>
+                        <a:ea typeface="Arial" charset="0"/>
+                        <a:cs typeface="Arial" charset="0"/>
+                      </a:endParaRPr>
+                    </a:p>
+                  </a:txBody>
+                  <a:tcPr marL="73152" marR="73152" marT="36576" marB="36576" anchor="ctr">
+                    <a:lnL w="9525" cap="flat" cmpd="sng" algn="ctr">
+                      <a:solidFill>
+                        <a:srgbClr val="D8DEE6"/>
+                      </a:solidFill>
+                      <a:prstDash val="solid"/>
+                      <a:round/>
+                      <a:headEnd type="none" w="med" len="med"/>
+                      <a:tailEnd type="none" w="med" len="med"/>
+                    </a:lnL>
+                    <a:lnR w="9525" cap="flat" cmpd="sng" algn="ctr">
+                      <a:solidFill>
+                        <a:srgbClr val="D8DEE6"/>
+                      </a:solidFill>
+                      <a:prstDash val="solid"/>
+                      <a:round/>
+                      <a:headEnd type="none" w="med" len="med"/>
+                      <a:tailEnd type="none" w="med" len="med"/>
+                    </a:lnR>
+                    <a:lnT w="9525" cap="flat" cmpd="sng" algn="ctr">
+                      <a:solidFill>
+                        <a:srgbClr val="D8DEE6"/>
+                      </a:solidFill>
+                      <a:prstDash val="solid"/>
+                      <a:round/>
+                      <a:headEnd type="none" w="med" len="med"/>
+                      <a:tailEnd type="none" w="med" len="med"/>
+                    </a:lnT>
+                    <a:lnB w="9525" cap="flat" cmpd="sng" algn="ctr">
+                      <a:solidFill>
+                        <a:srgbClr val="D8DEE6"/>
+                      </a:solidFill>
+                      <a:prstDash val="solid"/>
+                      <a:round/>
+                      <a:headEnd type="none" w="med" len="med"/>
+                      <a:tailEnd type="none" w="med" len="med"/>
+                    </a:lnB>
+                    <a:solidFill>
+                      <a:srgbClr val="FFFFFF"/>
+                    </a:solidFill>
+                  </a:tcPr>
+                </a:tc>
+                <a:tc>
+                  <a:txBody>
+                    <a:bodyPr/>
+                    <a:lstStyle/>
+                    <a:p>
+                      <a:pPr algn="ctr" indent="0" marL="0">
+                        <a:buNone/>
+                      </a:pPr>
+                      <a:r>
+                        <a:rPr lang="en-US" sz="1300" dirty="0">
+                          <a:solidFill>
+                            <a:srgbClr val="1F2328"/>
+                          </a:solidFill>
+                          <a:latin typeface="Arial" pitchFamily="34" charset="0"/>
+                          <a:ea typeface="Arial" pitchFamily="34" charset="-122"/>
+                          <a:cs typeface="Arial" pitchFamily="34" charset="-120"/>
+                        </a:rPr>
+                        <a:t>L16:F8474</a:t>
+                      </a:r>
+                      <a:endParaRPr lang="en-US" sz="1300" dirty="0">
+                        <a:latin typeface="Arial" charset="0"/>
+                        <a:ea typeface="Arial" charset="0"/>
+                        <a:cs typeface="Arial" charset="0"/>
+                      </a:endParaRPr>
+                    </a:p>
+                  </a:txBody>
+                  <a:tcPr marL="73152" marR="73152" marT="36576" marB="36576" anchor="ctr">
+                    <a:lnL w="9525" cap="flat" cmpd="sng" algn="ctr">
+                      <a:solidFill>
+                        <a:srgbClr val="D8DEE6"/>
+                      </a:solidFill>
+                      <a:prstDash val="solid"/>
+                      <a:round/>
+                      <a:headEnd type="none" w="med" len="med"/>
+                      <a:tailEnd type="none" w="med" len="med"/>
+                    </a:lnL>
+                    <a:lnR w="9525" cap="flat" cmpd="sng" algn="ctr">
+                      <a:solidFill>
+                        <a:srgbClr val="D8DEE6"/>
+                      </a:solidFill>
+                      <a:prstDash val="solid"/>
+                      <a:round/>
+                      <a:headEnd type="none" w="med" len="med"/>
+                      <a:tailEnd type="none" w="med" len="med"/>
+                    </a:lnR>
+                    <a:lnT w="9525" cap="flat" cmpd="sng" algn="ctr">
+                      <a:solidFill>
+                        <a:srgbClr val="D8DEE6"/>
+                      </a:solidFill>
+                      <a:prstDash val="solid"/>
+                      <a:round/>
+                      <a:headEnd type="none" w="med" len="med"/>
+                      <a:tailEnd type="none" w="med" len="med"/>
+                    </a:lnT>
+                    <a:lnB w="9525" cap="flat" cmpd="sng" algn="ctr">
+                      <a:solidFill>
+                        <a:srgbClr val="D8DEE6"/>
+                      </a:solidFill>
+                      <a:prstDash val="solid"/>
+                      <a:round/>
+                      <a:headEnd type="none" w="med" len="med"/>
+                      <a:tailEnd type="none" w="med" len="med"/>
+                    </a:lnB>
+                    <a:solidFill>
+                      <a:srgbClr val="E6F2F1"/>
+                    </a:solidFill>
+                  </a:tcPr>
+                </a:tc>
+                <a:tc>
+                  <a:txBody>
+                    <a:bodyPr/>
+                    <a:lstStyle/>
+                    <a:p>
+                      <a:pPr algn="ctr" indent="0" marL="0">
+                        <a:buNone/>
+                      </a:pPr>
+                      <a:r>
+                        <a:rPr lang="en-US" sz="1300" dirty="0">
+                          <a:solidFill>
+                            <a:srgbClr val="1F2328"/>
+                          </a:solidFill>
+                          <a:latin typeface="Arial" pitchFamily="34" charset="0"/>
+                          <a:ea typeface="Arial" pitchFamily="34" charset="-122"/>
+                          <a:cs typeface="Arial" pitchFamily="34" charset="-120"/>
+                        </a:rPr>
+                        <a:t>L17:F11229</a:t>
+                      </a:r>
+                      <a:endParaRPr lang="en-US" sz="1300" dirty="0">
+                        <a:latin typeface="Arial" charset="0"/>
+                        <a:ea typeface="Arial" charset="0"/>
+                        <a:cs typeface="Arial" charset="0"/>
+                      </a:endParaRPr>
+                    </a:p>
+                  </a:txBody>
+                  <a:tcPr marL="73152" marR="73152" marT="36576" marB="36576" anchor="ctr">
+                    <a:lnL w="9525" cap="flat" cmpd="sng" algn="ctr">
+                      <a:solidFill>
+                        <a:srgbClr val="D8DEE6"/>
+                      </a:solidFill>
+                      <a:prstDash val="solid"/>
+                      <a:round/>
+                      <a:headEnd type="none" w="med" len="med"/>
+                      <a:tailEnd type="none" w="med" len="med"/>
+                    </a:lnL>
+                    <a:lnR w="9525" cap="flat" cmpd="sng" algn="ctr">
+                      <a:solidFill>
+                        <a:srgbClr val="D8DEE6"/>
+                      </a:solidFill>
+                      <a:prstDash val="solid"/>
+                      <a:round/>
+                      <a:headEnd type="none" w="med" len="med"/>
+                      <a:tailEnd type="none" w="med" len="med"/>
+                    </a:lnR>
+                    <a:lnT w="9525" cap="flat" cmpd="sng" algn="ctr">
+                      <a:solidFill>
+                        <a:srgbClr val="D8DEE6"/>
+                      </a:solidFill>
+                      <a:prstDash val="solid"/>
+                      <a:round/>
+                      <a:headEnd type="none" w="med" len="med"/>
+                      <a:tailEnd type="none" w="med" len="med"/>
+                    </a:lnT>
+                    <a:lnB w="9525" cap="flat" cmpd="sng" algn="ctr">
+                      <a:solidFill>
+                        <a:srgbClr val="D8DEE6"/>
+                      </a:solidFill>
+                      <a:prstDash val="solid"/>
+                      <a:round/>
+                      <a:headEnd type="none" w="med" len="med"/>
+                      <a:tailEnd type="none" w="med" len="med"/>
+                    </a:lnB>
+                    <a:solidFill>
+                      <a:srgbClr val="FFFFFF"/>
+                    </a:solidFill>
+                  </a:tcPr>
+                </a:tc>
+              </a:tr>
+              <a:tr h="384048">
+                <a:tc>
+                  <a:txBody>
+                    <a:bodyPr/>
+                    <a:lstStyle/>
+                    <a:p>
+                      <a:pPr algn="ctr" indent="0" marL="0">
+                        <a:buNone/>
+                      </a:pPr>
+                      <a:r>
+                        <a:rPr lang="en-US" sz="1300" dirty="0">
+                          <a:solidFill>
+                            <a:srgbClr val="5F6B7A"/>
+                          </a:solidFill>
+                          <a:latin typeface="Arial" pitchFamily="34" charset="0"/>
+                          <a:ea typeface="Arial" pitchFamily="34" charset="-122"/>
+                          <a:cs typeface="Arial" pitchFamily="34" charset="-120"/>
+                        </a:rPr>
+                        <a:t>5</a:t>
+                      </a:r>
+                      <a:endParaRPr lang="en-US" sz="1300" dirty="0">
+                        <a:latin typeface="Arial" charset="0"/>
+                        <a:ea typeface="Arial" charset="0"/>
+                        <a:cs typeface="Arial" charset="0"/>
+                      </a:endParaRPr>
+                    </a:p>
+                  </a:txBody>
+                  <a:tcPr marL="73152" marR="73152" marT="36576" marB="36576" anchor="ctr">
+                    <a:lnL w="9525" cap="flat" cmpd="sng" algn="ctr">
+                      <a:solidFill>
+                        <a:srgbClr val="D8DEE6"/>
+                      </a:solidFill>
+                      <a:prstDash val="solid"/>
+                      <a:round/>
+                      <a:headEnd type="none" w="med" len="med"/>
+                      <a:tailEnd type="none" w="med" len="med"/>
+                    </a:lnL>
+                    <a:lnR w="9525" cap="flat" cmpd="sng" algn="ctr">
+                      <a:solidFill>
+                        <a:srgbClr val="D8DEE6"/>
+                      </a:solidFill>
+                      <a:prstDash val="solid"/>
+                      <a:round/>
+                      <a:headEnd type="none" w="med" len="med"/>
+                      <a:tailEnd type="none" w="med" len="med"/>
+                    </a:lnR>
+                    <a:lnT w="9525" cap="flat" cmpd="sng" algn="ctr">
+                      <a:solidFill>
+                        <a:srgbClr val="D8DEE6"/>
+                      </a:solidFill>
+                      <a:prstDash val="solid"/>
+                      <a:round/>
+                      <a:headEnd type="none" w="med" len="med"/>
+                      <a:tailEnd type="none" w="med" len="med"/>
+                    </a:lnT>
+                    <a:lnB w="9525" cap="flat" cmpd="sng" algn="ctr">
+                      <a:solidFill>
+                        <a:srgbClr val="D8DEE6"/>
+                      </a:solidFill>
+                      <a:prstDash val="solid"/>
+                      <a:round/>
+                      <a:headEnd type="none" w="med" len="med"/>
+                      <a:tailEnd type="none" w="med" len="med"/>
+                    </a:lnB>
+                    <a:solidFill>
+                      <a:srgbClr val="FFFFFF"/>
+                    </a:solidFill>
+                  </a:tcPr>
+                </a:tc>
+                <a:tc>
+                  <a:txBody>
+                    <a:bodyPr/>
+                    <a:lstStyle/>
+                    <a:p>
+                      <a:pPr algn="ctr" indent="0" marL="0">
+                        <a:buNone/>
+                      </a:pPr>
+                      <a:r>
+                        <a:rPr lang="en-US" sz="1300" dirty="0">
+                          <a:solidFill>
+                            <a:srgbClr val="1F2328"/>
+                          </a:solidFill>
+                          <a:latin typeface="Arial" pitchFamily="34" charset="0"/>
+                          <a:ea typeface="Arial" pitchFamily="34" charset="-122"/>
+                          <a:cs typeface="Arial" pitchFamily="34" charset="-120"/>
+                        </a:rPr>
+                        <a:t>L18:F7664</a:t>
+                      </a:r>
+                      <a:endParaRPr lang="en-US" sz="1300" dirty="0">
+                        <a:latin typeface="Arial" charset="0"/>
+                        <a:ea typeface="Arial" charset="0"/>
+                        <a:cs typeface="Arial" charset="0"/>
+                      </a:endParaRPr>
+                    </a:p>
+                  </a:txBody>
+                  <a:tcPr marL="73152" marR="73152" marT="36576" marB="36576" anchor="ctr">
+                    <a:lnL w="9525" cap="flat" cmpd="sng" algn="ctr">
+                      <a:solidFill>
+                        <a:srgbClr val="D8DEE6"/>
+                      </a:solidFill>
+                      <a:prstDash val="solid"/>
+                      <a:round/>
+                      <a:headEnd type="none" w="med" len="med"/>
+                      <a:tailEnd type="none" w="med" len="med"/>
+                    </a:lnL>
+                    <a:lnR w="9525" cap="flat" cmpd="sng" algn="ctr">
+                      <a:solidFill>
+                        <a:srgbClr val="D8DEE6"/>
+                      </a:solidFill>
+                      <a:prstDash val="solid"/>
+                      <a:round/>
+                      <a:headEnd type="none" w="med" len="med"/>
+                      <a:tailEnd type="none" w="med" len="med"/>
+                    </a:lnR>
+                    <a:lnT w="9525" cap="flat" cmpd="sng" algn="ctr">
+                      <a:solidFill>
+                        <a:srgbClr val="D8DEE6"/>
+                      </a:solidFill>
+                      <a:prstDash val="solid"/>
+                      <a:round/>
+                      <a:headEnd type="none" w="med" len="med"/>
+                      <a:tailEnd type="none" w="med" len="med"/>
+                    </a:lnT>
+                    <a:lnB w="9525" cap="flat" cmpd="sng" algn="ctr">
+                      <a:solidFill>
+                        <a:srgbClr val="D8DEE6"/>
+                      </a:solidFill>
+                      <a:prstDash val="solid"/>
+                      <a:round/>
+                      <a:headEnd type="none" w="med" len="med"/>
+                      <a:tailEnd type="none" w="med" len="med"/>
+                    </a:lnB>
+                    <a:solidFill>
+                      <a:srgbClr val="E6F2F1"/>
+                    </a:solidFill>
+                  </a:tcPr>
+                </a:tc>
+                <a:tc>
+                  <a:txBody>
+                    <a:bodyPr/>
+                    <a:lstStyle/>
+                    <a:p>
+                      <a:pPr algn="ctr" indent="0" marL="0">
+                        <a:buNone/>
+                      </a:pPr>
+                      <a:r>
+                        <a:rPr lang="en-US" sz="1300" dirty="0">
+                          <a:solidFill>
+                            <a:srgbClr val="1F2328"/>
+                          </a:solidFill>
+                          <a:latin typeface="Arial" pitchFamily="34" charset="0"/>
+                          <a:ea typeface="Arial" pitchFamily="34" charset="-122"/>
+                          <a:cs typeface="Arial" pitchFamily="34" charset="-120"/>
+                        </a:rPr>
+                        <a:t>L16:F5318</a:t>
+                      </a:r>
+                      <a:endParaRPr lang="en-US" sz="1300" dirty="0">
+                        <a:latin typeface="Arial" charset="0"/>
+                        <a:ea typeface="Arial" charset="0"/>
+                        <a:cs typeface="Arial" charset="0"/>
+                      </a:endParaRPr>
+                    </a:p>
+                  </a:txBody>
+                  <a:tcPr marL="73152" marR="73152" marT="36576" marB="36576" anchor="ctr">
+                    <a:lnL w="9525" cap="flat" cmpd="sng" algn="ctr">
+                      <a:solidFill>
+                        <a:srgbClr val="D8DEE6"/>
+                      </a:solidFill>
+                      <a:prstDash val="solid"/>
+                      <a:round/>
+                      <a:headEnd type="none" w="med" len="med"/>
+                      <a:tailEnd type="none" w="med" len="med"/>
+                    </a:lnL>
+                    <a:lnR w="9525" cap="flat" cmpd="sng" algn="ctr">
+                      <a:solidFill>
+                        <a:srgbClr val="D8DEE6"/>
+                      </a:solidFill>
+                      <a:prstDash val="solid"/>
+                      <a:round/>
+                      <a:headEnd type="none" w="med" len="med"/>
+                      <a:tailEnd type="none" w="med" len="med"/>
+                    </a:lnR>
+                    <a:lnT w="9525" cap="flat" cmpd="sng" algn="ctr">
+                      <a:solidFill>
+                        <a:srgbClr val="D8DEE6"/>
+                      </a:solidFill>
+                      <a:prstDash val="solid"/>
+                      <a:round/>
+                      <a:headEnd type="none" w="med" len="med"/>
+                      <a:tailEnd type="none" w="med" len="med"/>
+                    </a:lnT>
+                    <a:lnB w="9525" cap="flat" cmpd="sng" algn="ctr">
+                      <a:solidFill>
+                        <a:srgbClr val="D8DEE6"/>
+                      </a:solidFill>
+                      <a:prstDash val="solid"/>
+                      <a:round/>
+                      <a:headEnd type="none" w="med" len="med"/>
+                      <a:tailEnd type="none" w="med" len="med"/>
+                    </a:lnB>
+                    <a:solidFill>
+                      <a:srgbClr val="E6F2F1"/>
+                    </a:solidFill>
+                  </a:tcPr>
+                </a:tc>
+              </a:tr>
+            </a:tbl>
           </a:graphicData>
         </a:graphic>
       </p:graphicFrame>
       <p:sp>
         <p:nvSpPr>
-          <p:cNvPr id="7" name="Text 3"/>
-          <p:cNvSpPr/>
-          <p:nvPr/>
-        </p:nvSpPr>
-        <p:spPr>
-          <a:xfrm>
-            <a:off x="7589520" y="1645920"/>
-            <a:ext cx="4023360" cy="822960"/>
+          <p:cNvPr id="8" name="Text 4"/>
+          <p:cNvSpPr/>
+          <p:nvPr/>
+        </p:nvSpPr>
+        <p:spPr>
+          <a:xfrm>
+            <a:off x="548640" y="4206240"/>
+            <a:ext cx="3520440" cy="320040"/>
           </a:xfrm>
           <a:prstGeom prst="rect">
             <a:avLst/>
@@ -30805,36 +31855,22 @@
           <a:ln/>
         </p:spPr>
         <p:txBody>
-          <a:bodyPr wrap="square" lIns="0" tIns="0" rIns="0" bIns="0" rtlCol="0" anchor="t"/>
-          <a:lstStyle/>
-          <a:p>
-            <a:pPr indent="0" marL="0">
+          <a:bodyPr wrap="square" lIns="0" tIns="0" rIns="0" bIns="0" rtlCol="0" anchor="ctr"/>
+          <a:lstStyle/>
+          <a:p>
+            <a:pPr algn="ctr" indent="0" marL="0">
               <a:buNone/>
             </a:pPr>
             <a:r>
               <a:rPr lang="en-US" sz="1400" b="1" dirty="0">
                 <a:solidFill>
-                  <a:srgbClr val="5F6B7A"/>
-                </a:solidFill>
-                <a:latin typeface="Arial" pitchFamily="34" charset="0"/>
-                <a:ea typeface="Arial" pitchFamily="34" charset="-122"/>
-                <a:cs typeface="Arial" pitchFamily="34" charset="-120"/>
-              </a:rPr>
-              <a:t>AUROC: </a:t>
-            </a:r>
-            <a:pPr indent="0" marL="0">
-              <a:buNone/>
-            </a:pPr>
-            <a:r>
-              <a:rPr lang="en-US" sz="1400" dirty="0">
-                <a:solidFill>
-                  <a:srgbClr val="5F6B7A"/>
-                </a:solidFill>
-                <a:latin typeface="Arial" pitchFamily="34" charset="0"/>
-                <a:ea typeface="Arial" pitchFamily="34" charset="-122"/>
-                <a:cs typeface="Arial" pitchFamily="34" charset="-120"/>
-              </a:rPr>
-              <a:t>1.0 = perfect separation of harmful from harmless, 0.5 = coin flip.</a:t>
+                  <a:srgbClr val="0F766E"/>
+                </a:solidFill>
+                <a:latin typeface="Arial" pitchFamily="34" charset="0"/>
+                <a:ea typeface="Arial" pitchFamily="34" charset="-122"/>
+                <a:cs typeface="Arial" pitchFamily="34" charset="-120"/>
+              </a:rPr>
+              <a:t>4 of 5 shared</a:t>
             </a:r>
             <a:endParaRPr lang="en-US" sz="1400" dirty="0"/>
           </a:p>
@@ -30842,14 +31878,14 @@
       </p:sp>
       <p:sp>
         <p:nvSpPr>
-          <p:cNvPr id="8" name="Text 4"/>
-          <p:cNvSpPr/>
-          <p:nvPr/>
-        </p:nvSpPr>
-        <p:spPr>
-          <a:xfrm>
-            <a:off x="7589520" y="2560320"/>
-            <a:ext cx="4023360" cy="822960"/>
+          <p:cNvPr id="9" name="Text 5"/>
+          <p:cNvSpPr/>
+          <p:nvPr/>
+        </p:nvSpPr>
+        <p:spPr>
+          <a:xfrm>
+            <a:off x="4334256" y="1417320"/>
+            <a:ext cx="3520440" cy="365760"/>
           </a:xfrm>
           <a:prstGeom prst="rect">
             <a:avLst/>
@@ -30858,37 +31894,1304 @@
           <a:ln/>
         </p:spPr>
         <p:txBody>
-          <a:bodyPr wrap="square" lIns="0" tIns="0" rIns="0" bIns="0" rtlCol="0" anchor="t"/>
-          <a:lstStyle/>
-          <a:p>
-            <a:pPr indent="0" marL="0">
-              <a:buNone/>
-            </a:pPr>
-            <a:r>
-              <a:rPr lang="en-US" sz="1400" dirty="0">
-                <a:solidFill>
-                  <a:srgbClr val="5F6B7A"/>
-                </a:solidFill>
-                <a:latin typeface="Arial" pitchFamily="34" charset="0"/>
-                <a:ea typeface="Arial" pitchFamily="34" charset="-122"/>
-                <a:cs typeface="Arial" pitchFamily="34" charset="-120"/>
-              </a:rPr>
-              <a:t>100 harmful MultiJail prompts vs 100 normal Aya prompts, in each language.</a:t>
-            </a:r>
-            <a:endParaRPr lang="en-US" sz="1400" dirty="0"/>
-          </a:p>
-        </p:txBody>
-      </p:sp>
-      <p:sp>
-        <p:nvSpPr>
-          <p:cNvPr id="9" name="Text 5"/>
-          <p:cNvSpPr/>
-          <p:nvPr/>
-        </p:nvSpPr>
-        <p:spPr>
-          <a:xfrm>
-            <a:off x="7589520" y="3474720"/>
-            <a:ext cx="4023360" cy="914400"/>
+          <a:bodyPr wrap="square" lIns="0" tIns="0" rIns="0" bIns="0" rtlCol="0" anchor="ctr"/>
+          <a:lstStyle/>
+          <a:p>
+            <a:pPr algn="ctr" indent="0" marL="0">
+              <a:buNone/>
+            </a:pPr>
+            <a:r>
+              <a:rPr lang="en-US" sz="1700" b="1" dirty="0">
+                <a:solidFill>
+                  <a:srgbClr val="1F2328"/>
+                </a:solidFill>
+                <a:latin typeface="Arial" pitchFamily="34" charset="0"/>
+                <a:ea typeface="Arial" pitchFamily="34" charset="-122"/>
+                <a:cs typeface="Arial" pitchFamily="34" charset="-120"/>
+              </a:rPr>
+              <a:t>Llama-3.1-8B</a:t>
+            </a:r>
+            <a:endParaRPr lang="en-US" sz="1700" dirty="0"/>
+          </a:p>
+        </p:txBody>
+      </p:sp>
+      <p:graphicFrame>
+        <p:nvGraphicFramePr>
+          <p:cNvPr id="53" name="Table 1"/>
+          <p:cNvGraphicFramePr>
+            <a:graphicFrameLocks noGrp="1"/>
+          </p:cNvGraphicFramePr>
+          <p:nvPr>
+            <p:extLst>
+              <p:ext uri="{D42A27DB-BD31-4B8C-83A1-F6EECF244321}">
+                <p14:modId xmlns:p14="http://schemas.microsoft.com/office/powerpoint/2010/main" val="1579011935"/>
+              </p:ext>
+            </p:extLst>
+          </p:nvPr>
+        </p:nvGraphicFramePr>
+        <p:xfrm>
+          <a:off x="4334256" y="1828800"/>
+          <a:ext cx="3520440" cy="914400"/>
+        </p:xfrm>
+        <a:graphic>
+          <a:graphicData uri="http://schemas.openxmlformats.org/drawingml/2006/table">
+            <a:tbl>
+              <a:tblPr/>
+              <a:tblGrid>
+                <a:gridCol w="502920"/>
+                <a:gridCol w="1508760"/>
+                <a:gridCol w="1508760"/>
+              </a:tblGrid>
+              <a:tr h="384048">
+                <a:tc>
+                  <a:txBody>
+                    <a:bodyPr/>
+                    <a:lstStyle/>
+                    <a:p>
+                      <a:pPr algn="ctr" indent="0" marL="0">
+                        <a:buNone/>
+                      </a:pPr>
+                      <a:r>
+                        <a:rPr lang="en-US" sz="1300" b="1" dirty="0">
+                          <a:solidFill>
+                            <a:srgbClr val="1F2328"/>
+                          </a:solidFill>
+                          <a:latin typeface="Arial" pitchFamily="34" charset="0"/>
+                          <a:ea typeface="Arial" pitchFamily="34" charset="-122"/>
+                          <a:cs typeface="Arial" pitchFamily="34" charset="-120"/>
+                        </a:rPr>
+                        <a:t>rank</a:t>
+                      </a:r>
+                      <a:endParaRPr lang="en-US" sz="1300" dirty="0">
+                        <a:latin typeface="Arial" charset="0"/>
+                        <a:ea typeface="Arial" charset="0"/>
+                        <a:cs typeface="Arial" charset="0"/>
+                      </a:endParaRPr>
+                    </a:p>
+                  </a:txBody>
+                  <a:tcPr marL="73152" marR="73152" marT="36576" marB="36576" anchor="ctr">
+                    <a:lnL w="9525" cap="flat" cmpd="sng" algn="ctr">
+                      <a:solidFill>
+                        <a:srgbClr val="D8DEE6"/>
+                      </a:solidFill>
+                      <a:prstDash val="solid"/>
+                      <a:round/>
+                      <a:headEnd type="none" w="med" len="med"/>
+                      <a:tailEnd type="none" w="med" len="med"/>
+                    </a:lnL>
+                    <a:lnR w="9525" cap="flat" cmpd="sng" algn="ctr">
+                      <a:solidFill>
+                        <a:srgbClr val="D8DEE6"/>
+                      </a:solidFill>
+                      <a:prstDash val="solid"/>
+                      <a:round/>
+                      <a:headEnd type="none" w="med" len="med"/>
+                      <a:tailEnd type="none" w="med" len="med"/>
+                    </a:lnR>
+                    <a:lnT w="9525" cap="flat" cmpd="sng" algn="ctr">
+                      <a:solidFill>
+                        <a:srgbClr val="D8DEE6"/>
+                      </a:solidFill>
+                      <a:prstDash val="solid"/>
+                      <a:round/>
+                      <a:headEnd type="none" w="med" len="med"/>
+                      <a:tailEnd type="none" w="med" len="med"/>
+                    </a:lnT>
+                    <a:lnB w="9525" cap="flat" cmpd="sng" algn="ctr">
+                      <a:solidFill>
+                        <a:srgbClr val="D8DEE6"/>
+                      </a:solidFill>
+                      <a:prstDash val="solid"/>
+                      <a:round/>
+                      <a:headEnd type="none" w="med" len="med"/>
+                      <a:tailEnd type="none" w="med" len="med"/>
+                    </a:lnB>
+                    <a:solidFill>
+                      <a:srgbClr val="F4F6F9"/>
+                    </a:solidFill>
+                  </a:tcPr>
+                </a:tc>
+                <a:tc>
+                  <a:txBody>
+                    <a:bodyPr/>
+                    <a:lstStyle/>
+                    <a:p>
+                      <a:pPr algn="ctr" indent="0" marL="0">
+                        <a:buNone/>
+                      </a:pPr>
+                      <a:r>
+                        <a:rPr lang="en-US" sz="1300" b="1" dirty="0">
+                          <a:solidFill>
+                            <a:srgbClr val="1F2328"/>
+                          </a:solidFill>
+                          <a:latin typeface="Arial" pitchFamily="34" charset="0"/>
+                          <a:ea typeface="Arial" pitchFamily="34" charset="-122"/>
+                          <a:cs typeface="Arial" pitchFamily="34" charset="-120"/>
+                        </a:rPr>
+                        <a:t>English search</a:t>
+                      </a:r>
+                      <a:endParaRPr lang="en-US" sz="1300" dirty="0">
+                        <a:latin typeface="Arial" charset="0"/>
+                        <a:ea typeface="Arial" charset="0"/>
+                        <a:cs typeface="Arial" charset="0"/>
+                      </a:endParaRPr>
+                    </a:p>
+                  </a:txBody>
+                  <a:tcPr marL="73152" marR="73152" marT="36576" marB="36576" anchor="ctr">
+                    <a:lnL w="9525" cap="flat" cmpd="sng" algn="ctr">
+                      <a:solidFill>
+                        <a:srgbClr val="D8DEE6"/>
+                      </a:solidFill>
+                      <a:prstDash val="solid"/>
+                      <a:round/>
+                      <a:headEnd type="none" w="med" len="med"/>
+                      <a:tailEnd type="none" w="med" len="med"/>
+                    </a:lnL>
+                    <a:lnR w="9525" cap="flat" cmpd="sng" algn="ctr">
+                      <a:solidFill>
+                        <a:srgbClr val="D8DEE6"/>
+                      </a:solidFill>
+                      <a:prstDash val="solid"/>
+                      <a:round/>
+                      <a:headEnd type="none" w="med" len="med"/>
+                      <a:tailEnd type="none" w="med" len="med"/>
+                    </a:lnR>
+                    <a:lnT w="9525" cap="flat" cmpd="sng" algn="ctr">
+                      <a:solidFill>
+                        <a:srgbClr val="D8DEE6"/>
+                      </a:solidFill>
+                      <a:prstDash val="solid"/>
+                      <a:round/>
+                      <a:headEnd type="none" w="med" len="med"/>
+                      <a:tailEnd type="none" w="med" len="med"/>
+                    </a:lnT>
+                    <a:lnB w="9525" cap="flat" cmpd="sng" algn="ctr">
+                      <a:solidFill>
+                        <a:srgbClr val="D8DEE6"/>
+                      </a:solidFill>
+                      <a:prstDash val="solid"/>
+                      <a:round/>
+                      <a:headEnd type="none" w="med" len="med"/>
+                      <a:tailEnd type="none" w="med" len="med"/>
+                    </a:lnB>
+                    <a:solidFill>
+                      <a:srgbClr val="F4F6F9"/>
+                    </a:solidFill>
+                  </a:tcPr>
+                </a:tc>
+                <a:tc>
+                  <a:txBody>
+                    <a:bodyPr/>
+                    <a:lstStyle/>
+                    <a:p>
+                      <a:pPr algn="ctr" indent="0" marL="0">
+                        <a:buNone/>
+                      </a:pPr>
+                      <a:r>
+                        <a:rPr lang="en-US" sz="1300" b="1" dirty="0">
+                          <a:solidFill>
+                            <a:srgbClr val="1F2328"/>
+                          </a:solidFill>
+                          <a:latin typeface="Arial" pitchFamily="34" charset="0"/>
+                          <a:ea typeface="Arial" pitchFamily="34" charset="-122"/>
+                          <a:cs typeface="Arial" pitchFamily="34" charset="-120"/>
+                        </a:rPr>
+                        <a:t>Arabic search</a:t>
+                      </a:r>
+                      <a:endParaRPr lang="en-US" sz="1300" dirty="0">
+                        <a:latin typeface="Arial" charset="0"/>
+                        <a:ea typeface="Arial" charset="0"/>
+                        <a:cs typeface="Arial" charset="0"/>
+                      </a:endParaRPr>
+                    </a:p>
+                  </a:txBody>
+                  <a:tcPr marL="73152" marR="73152" marT="36576" marB="36576" anchor="ctr">
+                    <a:lnL w="9525" cap="flat" cmpd="sng" algn="ctr">
+                      <a:solidFill>
+                        <a:srgbClr val="D8DEE6"/>
+                      </a:solidFill>
+                      <a:prstDash val="solid"/>
+                      <a:round/>
+                      <a:headEnd type="none" w="med" len="med"/>
+                      <a:tailEnd type="none" w="med" len="med"/>
+                    </a:lnL>
+                    <a:lnR w="9525" cap="flat" cmpd="sng" algn="ctr">
+                      <a:solidFill>
+                        <a:srgbClr val="D8DEE6"/>
+                      </a:solidFill>
+                      <a:prstDash val="solid"/>
+                      <a:round/>
+                      <a:headEnd type="none" w="med" len="med"/>
+                      <a:tailEnd type="none" w="med" len="med"/>
+                    </a:lnR>
+                    <a:lnT w="9525" cap="flat" cmpd="sng" algn="ctr">
+                      <a:solidFill>
+                        <a:srgbClr val="D8DEE6"/>
+                      </a:solidFill>
+                      <a:prstDash val="solid"/>
+                      <a:round/>
+                      <a:headEnd type="none" w="med" len="med"/>
+                      <a:tailEnd type="none" w="med" len="med"/>
+                    </a:lnT>
+                    <a:lnB w="9525" cap="flat" cmpd="sng" algn="ctr">
+                      <a:solidFill>
+                        <a:srgbClr val="D8DEE6"/>
+                      </a:solidFill>
+                      <a:prstDash val="solid"/>
+                      <a:round/>
+                      <a:headEnd type="none" w="med" len="med"/>
+                      <a:tailEnd type="none" w="med" len="med"/>
+                    </a:lnB>
+                    <a:solidFill>
+                      <a:srgbClr val="F4F6F9"/>
+                    </a:solidFill>
+                  </a:tcPr>
+                </a:tc>
+              </a:tr>
+              <a:tr h="384048">
+                <a:tc>
+                  <a:txBody>
+                    <a:bodyPr/>
+                    <a:lstStyle/>
+                    <a:p>
+                      <a:pPr algn="ctr" indent="0" marL="0">
+                        <a:buNone/>
+                      </a:pPr>
+                      <a:r>
+                        <a:rPr lang="en-US" sz="1300" dirty="0">
+                          <a:solidFill>
+                            <a:srgbClr val="5F6B7A"/>
+                          </a:solidFill>
+                          <a:latin typeface="Arial" pitchFamily="34" charset="0"/>
+                          <a:ea typeface="Arial" pitchFamily="34" charset="-122"/>
+                          <a:cs typeface="Arial" pitchFamily="34" charset="-120"/>
+                        </a:rPr>
+                        <a:t>1</a:t>
+                      </a:r>
+                      <a:endParaRPr lang="en-US" sz="1300" dirty="0">
+                        <a:latin typeface="Arial" charset="0"/>
+                        <a:ea typeface="Arial" charset="0"/>
+                        <a:cs typeface="Arial" charset="0"/>
+                      </a:endParaRPr>
+                    </a:p>
+                  </a:txBody>
+                  <a:tcPr marL="73152" marR="73152" marT="36576" marB="36576" anchor="ctr">
+                    <a:lnL w="9525" cap="flat" cmpd="sng" algn="ctr">
+                      <a:solidFill>
+                        <a:srgbClr val="D8DEE6"/>
+                      </a:solidFill>
+                      <a:prstDash val="solid"/>
+                      <a:round/>
+                      <a:headEnd type="none" w="med" len="med"/>
+                      <a:tailEnd type="none" w="med" len="med"/>
+                    </a:lnL>
+                    <a:lnR w="9525" cap="flat" cmpd="sng" algn="ctr">
+                      <a:solidFill>
+                        <a:srgbClr val="D8DEE6"/>
+                      </a:solidFill>
+                      <a:prstDash val="solid"/>
+                      <a:round/>
+                      <a:headEnd type="none" w="med" len="med"/>
+                      <a:tailEnd type="none" w="med" len="med"/>
+                    </a:lnR>
+                    <a:lnT w="9525" cap="flat" cmpd="sng" algn="ctr">
+                      <a:solidFill>
+                        <a:srgbClr val="D8DEE6"/>
+                      </a:solidFill>
+                      <a:prstDash val="solid"/>
+                      <a:round/>
+                      <a:headEnd type="none" w="med" len="med"/>
+                      <a:tailEnd type="none" w="med" len="med"/>
+                    </a:lnT>
+                    <a:lnB w="9525" cap="flat" cmpd="sng" algn="ctr">
+                      <a:solidFill>
+                        <a:srgbClr val="D8DEE6"/>
+                      </a:solidFill>
+                      <a:prstDash val="solid"/>
+                      <a:round/>
+                      <a:headEnd type="none" w="med" len="med"/>
+                      <a:tailEnd type="none" w="med" len="med"/>
+                    </a:lnB>
+                    <a:solidFill>
+                      <a:srgbClr val="FFFFFF"/>
+                    </a:solidFill>
+                  </a:tcPr>
+                </a:tc>
+                <a:tc>
+                  <a:txBody>
+                    <a:bodyPr/>
+                    <a:lstStyle/>
+                    <a:p>
+                      <a:pPr algn="ctr" indent="0" marL="0">
+                        <a:buNone/>
+                      </a:pPr>
+                      <a:r>
+                        <a:rPr lang="en-US" sz="1300" dirty="0">
+                          <a:solidFill>
+                            <a:srgbClr val="1F2328"/>
+                          </a:solidFill>
+                          <a:latin typeface="Arial" pitchFamily="34" charset="0"/>
+                          <a:ea typeface="Arial" pitchFamily="34" charset="-122"/>
+                          <a:cs typeface="Arial" pitchFamily="34" charset="-120"/>
+                        </a:rPr>
+                        <a:t>L20:F9928</a:t>
+                      </a:r>
+                      <a:endParaRPr lang="en-US" sz="1300" dirty="0">
+                        <a:latin typeface="Arial" charset="0"/>
+                        <a:ea typeface="Arial" charset="0"/>
+                        <a:cs typeface="Arial" charset="0"/>
+                      </a:endParaRPr>
+                    </a:p>
+                  </a:txBody>
+                  <a:tcPr marL="73152" marR="73152" marT="36576" marB="36576" anchor="ctr">
+                    <a:lnL w="9525" cap="flat" cmpd="sng" algn="ctr">
+                      <a:solidFill>
+                        <a:srgbClr val="D8DEE6"/>
+                      </a:solidFill>
+                      <a:prstDash val="solid"/>
+                      <a:round/>
+                      <a:headEnd type="none" w="med" len="med"/>
+                      <a:tailEnd type="none" w="med" len="med"/>
+                    </a:lnL>
+                    <a:lnR w="9525" cap="flat" cmpd="sng" algn="ctr">
+                      <a:solidFill>
+                        <a:srgbClr val="D8DEE6"/>
+                      </a:solidFill>
+                      <a:prstDash val="solid"/>
+                      <a:round/>
+                      <a:headEnd type="none" w="med" len="med"/>
+                      <a:tailEnd type="none" w="med" len="med"/>
+                    </a:lnR>
+                    <a:lnT w="9525" cap="flat" cmpd="sng" algn="ctr">
+                      <a:solidFill>
+                        <a:srgbClr val="D8DEE6"/>
+                      </a:solidFill>
+                      <a:prstDash val="solid"/>
+                      <a:round/>
+                      <a:headEnd type="none" w="med" len="med"/>
+                      <a:tailEnd type="none" w="med" len="med"/>
+                    </a:lnT>
+                    <a:lnB w="9525" cap="flat" cmpd="sng" algn="ctr">
+                      <a:solidFill>
+                        <a:srgbClr val="D8DEE6"/>
+                      </a:solidFill>
+                      <a:prstDash val="solid"/>
+                      <a:round/>
+                      <a:headEnd type="none" w="med" len="med"/>
+                      <a:tailEnd type="none" w="med" len="med"/>
+                    </a:lnB>
+                    <a:solidFill>
+                      <a:srgbClr val="FFFFFF"/>
+                    </a:solidFill>
+                  </a:tcPr>
+                </a:tc>
+                <a:tc>
+                  <a:txBody>
+                    <a:bodyPr/>
+                    <a:lstStyle/>
+                    <a:p>
+                      <a:pPr algn="ctr" indent="0" marL="0">
+                        <a:buNone/>
+                      </a:pPr>
+                      <a:r>
+                        <a:rPr lang="en-US" sz="1300" b="1" dirty="0">
+                          <a:solidFill>
+                            <a:srgbClr val="FFFFFF"/>
+                          </a:solidFill>
+                          <a:latin typeface="Arial" pitchFamily="34" charset="0"/>
+                          <a:ea typeface="Arial" pitchFamily="34" charset="-122"/>
+                          <a:cs typeface="Arial" pitchFamily="34" charset="-120"/>
+                        </a:rPr>
+                        <a:t>L11:F4258</a:t>
+                      </a:r>
+                      <a:endParaRPr lang="en-US" sz="1300" dirty="0">
+                        <a:latin typeface="Arial" charset="0"/>
+                        <a:ea typeface="Arial" charset="0"/>
+                        <a:cs typeface="Arial" charset="0"/>
+                      </a:endParaRPr>
+                    </a:p>
+                  </a:txBody>
+                  <a:tcPr marL="73152" marR="73152" marT="36576" marB="36576" anchor="ctr">
+                    <a:lnL w="9525" cap="flat" cmpd="sng" algn="ctr">
+                      <a:solidFill>
+                        <a:srgbClr val="D8DEE6"/>
+                      </a:solidFill>
+                      <a:prstDash val="solid"/>
+                      <a:round/>
+                      <a:headEnd type="none" w="med" len="med"/>
+                      <a:tailEnd type="none" w="med" len="med"/>
+                    </a:lnL>
+                    <a:lnR w="9525" cap="flat" cmpd="sng" algn="ctr">
+                      <a:solidFill>
+                        <a:srgbClr val="D8DEE6"/>
+                      </a:solidFill>
+                      <a:prstDash val="solid"/>
+                      <a:round/>
+                      <a:headEnd type="none" w="med" len="med"/>
+                      <a:tailEnd type="none" w="med" len="med"/>
+                    </a:lnR>
+                    <a:lnT w="9525" cap="flat" cmpd="sng" algn="ctr">
+                      <a:solidFill>
+                        <a:srgbClr val="D8DEE6"/>
+                      </a:solidFill>
+                      <a:prstDash val="solid"/>
+                      <a:round/>
+                      <a:headEnd type="none" w="med" len="med"/>
+                      <a:tailEnd type="none" w="med" len="med"/>
+                    </a:lnT>
+                    <a:lnB w="9525" cap="flat" cmpd="sng" algn="ctr">
+                      <a:solidFill>
+                        <a:srgbClr val="D8DEE6"/>
+                      </a:solidFill>
+                      <a:prstDash val="solid"/>
+                      <a:round/>
+                      <a:headEnd type="none" w="med" len="med"/>
+                      <a:tailEnd type="none" w="med" len="med"/>
+                    </a:lnB>
+                    <a:solidFill>
+                      <a:srgbClr val="0F766E"/>
+                    </a:solidFill>
+                  </a:tcPr>
+                </a:tc>
+              </a:tr>
+              <a:tr h="384048">
+                <a:tc>
+                  <a:txBody>
+                    <a:bodyPr/>
+                    <a:lstStyle/>
+                    <a:p>
+                      <a:pPr algn="ctr" indent="0" marL="0">
+                        <a:buNone/>
+                      </a:pPr>
+                      <a:r>
+                        <a:rPr lang="en-US" sz="1300" dirty="0">
+                          <a:solidFill>
+                            <a:srgbClr val="5F6B7A"/>
+                          </a:solidFill>
+                          <a:latin typeface="Arial" pitchFamily="34" charset="0"/>
+                          <a:ea typeface="Arial" pitchFamily="34" charset="-122"/>
+                          <a:cs typeface="Arial" pitchFamily="34" charset="-120"/>
+                        </a:rPr>
+                        <a:t>2</a:t>
+                      </a:r>
+                      <a:endParaRPr lang="en-US" sz="1300" dirty="0">
+                        <a:latin typeface="Arial" charset="0"/>
+                        <a:ea typeface="Arial" charset="0"/>
+                        <a:cs typeface="Arial" charset="0"/>
+                      </a:endParaRPr>
+                    </a:p>
+                  </a:txBody>
+                  <a:tcPr marL="73152" marR="73152" marT="36576" marB="36576" anchor="ctr">
+                    <a:lnL w="9525" cap="flat" cmpd="sng" algn="ctr">
+                      <a:solidFill>
+                        <a:srgbClr val="D8DEE6"/>
+                      </a:solidFill>
+                      <a:prstDash val="solid"/>
+                      <a:round/>
+                      <a:headEnd type="none" w="med" len="med"/>
+                      <a:tailEnd type="none" w="med" len="med"/>
+                    </a:lnL>
+                    <a:lnR w="9525" cap="flat" cmpd="sng" algn="ctr">
+                      <a:solidFill>
+                        <a:srgbClr val="D8DEE6"/>
+                      </a:solidFill>
+                      <a:prstDash val="solid"/>
+                      <a:round/>
+                      <a:headEnd type="none" w="med" len="med"/>
+                      <a:tailEnd type="none" w="med" len="med"/>
+                    </a:lnR>
+                    <a:lnT w="9525" cap="flat" cmpd="sng" algn="ctr">
+                      <a:solidFill>
+                        <a:srgbClr val="D8DEE6"/>
+                      </a:solidFill>
+                      <a:prstDash val="solid"/>
+                      <a:round/>
+                      <a:headEnd type="none" w="med" len="med"/>
+                      <a:tailEnd type="none" w="med" len="med"/>
+                    </a:lnT>
+                    <a:lnB w="9525" cap="flat" cmpd="sng" algn="ctr">
+                      <a:solidFill>
+                        <a:srgbClr val="D8DEE6"/>
+                      </a:solidFill>
+                      <a:prstDash val="solid"/>
+                      <a:round/>
+                      <a:headEnd type="none" w="med" len="med"/>
+                      <a:tailEnd type="none" w="med" len="med"/>
+                    </a:lnB>
+                    <a:solidFill>
+                      <a:srgbClr val="FFFFFF"/>
+                    </a:solidFill>
+                  </a:tcPr>
+                </a:tc>
+                <a:tc>
+                  <a:txBody>
+                    <a:bodyPr/>
+                    <a:lstStyle/>
+                    <a:p>
+                      <a:pPr algn="ctr" indent="0" marL="0">
+                        <a:buNone/>
+                      </a:pPr>
+                      <a:r>
+                        <a:rPr lang="en-US" sz="1300" dirty="0">
+                          <a:solidFill>
+                            <a:srgbClr val="1F2328"/>
+                          </a:solidFill>
+                          <a:latin typeface="Arial" pitchFamily="34" charset="0"/>
+                          <a:ea typeface="Arial" pitchFamily="34" charset="-122"/>
+                          <a:cs typeface="Arial" pitchFamily="34" charset="-120"/>
+                        </a:rPr>
+                        <a:t>L20:F9424</a:t>
+                      </a:r>
+                      <a:endParaRPr lang="en-US" sz="1300" dirty="0">
+                        <a:latin typeface="Arial" charset="0"/>
+                        <a:ea typeface="Arial" charset="0"/>
+                        <a:cs typeface="Arial" charset="0"/>
+                      </a:endParaRPr>
+                    </a:p>
+                  </a:txBody>
+                  <a:tcPr marL="73152" marR="73152" marT="36576" marB="36576" anchor="ctr">
+                    <a:lnL w="9525" cap="flat" cmpd="sng" algn="ctr">
+                      <a:solidFill>
+                        <a:srgbClr val="D8DEE6"/>
+                      </a:solidFill>
+                      <a:prstDash val="solid"/>
+                      <a:round/>
+                      <a:headEnd type="none" w="med" len="med"/>
+                      <a:tailEnd type="none" w="med" len="med"/>
+                    </a:lnL>
+                    <a:lnR w="9525" cap="flat" cmpd="sng" algn="ctr">
+                      <a:solidFill>
+                        <a:srgbClr val="D8DEE6"/>
+                      </a:solidFill>
+                      <a:prstDash val="solid"/>
+                      <a:round/>
+                      <a:headEnd type="none" w="med" len="med"/>
+                      <a:tailEnd type="none" w="med" len="med"/>
+                    </a:lnR>
+                    <a:lnT w="9525" cap="flat" cmpd="sng" algn="ctr">
+                      <a:solidFill>
+                        <a:srgbClr val="D8DEE6"/>
+                      </a:solidFill>
+                      <a:prstDash val="solid"/>
+                      <a:round/>
+                      <a:headEnd type="none" w="med" len="med"/>
+                      <a:tailEnd type="none" w="med" len="med"/>
+                    </a:lnT>
+                    <a:lnB w="9525" cap="flat" cmpd="sng" algn="ctr">
+                      <a:solidFill>
+                        <a:srgbClr val="D8DEE6"/>
+                      </a:solidFill>
+                      <a:prstDash val="solid"/>
+                      <a:round/>
+                      <a:headEnd type="none" w="med" len="med"/>
+                      <a:tailEnd type="none" w="med" len="med"/>
+                    </a:lnB>
+                    <a:solidFill>
+                      <a:srgbClr val="FFFFFF"/>
+                    </a:solidFill>
+                  </a:tcPr>
+                </a:tc>
+                <a:tc>
+                  <a:txBody>
+                    <a:bodyPr/>
+                    <a:lstStyle/>
+                    <a:p>
+                      <a:pPr algn="ctr" indent="0" marL="0">
+                        <a:buNone/>
+                      </a:pPr>
+                      <a:r>
+                        <a:rPr lang="en-US" sz="1300" dirty="0">
+                          <a:solidFill>
+                            <a:srgbClr val="1F2328"/>
+                          </a:solidFill>
+                          <a:latin typeface="Arial" pitchFamily="34" charset="0"/>
+                          <a:ea typeface="Arial" pitchFamily="34" charset="-122"/>
+                          <a:cs typeface="Arial" pitchFamily="34" charset="-120"/>
+                        </a:rPr>
+                        <a:t>L15:F9635</a:t>
+                      </a:r>
+                      <a:endParaRPr lang="en-US" sz="1300" dirty="0">
+                        <a:latin typeface="Arial" charset="0"/>
+                        <a:ea typeface="Arial" charset="0"/>
+                        <a:cs typeface="Arial" charset="0"/>
+                      </a:endParaRPr>
+                    </a:p>
+                  </a:txBody>
+                  <a:tcPr marL="73152" marR="73152" marT="36576" marB="36576" anchor="ctr">
+                    <a:lnL w="9525" cap="flat" cmpd="sng" algn="ctr">
+                      <a:solidFill>
+                        <a:srgbClr val="D8DEE6"/>
+                      </a:solidFill>
+                      <a:prstDash val="solid"/>
+                      <a:round/>
+                      <a:headEnd type="none" w="med" len="med"/>
+                      <a:tailEnd type="none" w="med" len="med"/>
+                    </a:lnL>
+                    <a:lnR w="9525" cap="flat" cmpd="sng" algn="ctr">
+                      <a:solidFill>
+                        <a:srgbClr val="D8DEE6"/>
+                      </a:solidFill>
+                      <a:prstDash val="solid"/>
+                      <a:round/>
+                      <a:headEnd type="none" w="med" len="med"/>
+                      <a:tailEnd type="none" w="med" len="med"/>
+                    </a:lnR>
+                    <a:lnT w="9525" cap="flat" cmpd="sng" algn="ctr">
+                      <a:solidFill>
+                        <a:srgbClr val="D8DEE6"/>
+                      </a:solidFill>
+                      <a:prstDash val="solid"/>
+                      <a:round/>
+                      <a:headEnd type="none" w="med" len="med"/>
+                      <a:tailEnd type="none" w="med" len="med"/>
+                    </a:lnT>
+                    <a:lnB w="9525" cap="flat" cmpd="sng" algn="ctr">
+                      <a:solidFill>
+                        <a:srgbClr val="D8DEE6"/>
+                      </a:solidFill>
+                      <a:prstDash val="solid"/>
+                      <a:round/>
+                      <a:headEnd type="none" w="med" len="med"/>
+                      <a:tailEnd type="none" w="med" len="med"/>
+                    </a:lnB>
+                    <a:solidFill>
+                      <a:srgbClr val="E6F2F1"/>
+                    </a:solidFill>
+                  </a:tcPr>
+                </a:tc>
+              </a:tr>
+              <a:tr h="384048">
+                <a:tc>
+                  <a:txBody>
+                    <a:bodyPr/>
+                    <a:lstStyle/>
+                    <a:p>
+                      <a:pPr algn="ctr" indent="0" marL="0">
+                        <a:buNone/>
+                      </a:pPr>
+                      <a:r>
+                        <a:rPr lang="en-US" sz="1300" dirty="0">
+                          <a:solidFill>
+                            <a:srgbClr val="5F6B7A"/>
+                          </a:solidFill>
+                          <a:latin typeface="Arial" pitchFamily="34" charset="0"/>
+                          <a:ea typeface="Arial" pitchFamily="34" charset="-122"/>
+                          <a:cs typeface="Arial" pitchFamily="34" charset="-120"/>
+                        </a:rPr>
+                        <a:t>3</a:t>
+                      </a:r>
+                      <a:endParaRPr lang="en-US" sz="1300" dirty="0">
+                        <a:latin typeface="Arial" charset="0"/>
+                        <a:ea typeface="Arial" charset="0"/>
+                        <a:cs typeface="Arial" charset="0"/>
+                      </a:endParaRPr>
+                    </a:p>
+                  </a:txBody>
+                  <a:tcPr marL="73152" marR="73152" marT="36576" marB="36576" anchor="ctr">
+                    <a:lnL w="9525" cap="flat" cmpd="sng" algn="ctr">
+                      <a:solidFill>
+                        <a:srgbClr val="D8DEE6"/>
+                      </a:solidFill>
+                      <a:prstDash val="solid"/>
+                      <a:round/>
+                      <a:headEnd type="none" w="med" len="med"/>
+                      <a:tailEnd type="none" w="med" len="med"/>
+                    </a:lnL>
+                    <a:lnR w="9525" cap="flat" cmpd="sng" algn="ctr">
+                      <a:solidFill>
+                        <a:srgbClr val="D8DEE6"/>
+                      </a:solidFill>
+                      <a:prstDash val="solid"/>
+                      <a:round/>
+                      <a:headEnd type="none" w="med" len="med"/>
+                      <a:tailEnd type="none" w="med" len="med"/>
+                    </a:lnR>
+                    <a:lnT w="9525" cap="flat" cmpd="sng" algn="ctr">
+                      <a:solidFill>
+                        <a:srgbClr val="D8DEE6"/>
+                      </a:solidFill>
+                      <a:prstDash val="solid"/>
+                      <a:round/>
+                      <a:headEnd type="none" w="med" len="med"/>
+                      <a:tailEnd type="none" w="med" len="med"/>
+                    </a:lnT>
+                    <a:lnB w="9525" cap="flat" cmpd="sng" algn="ctr">
+                      <a:solidFill>
+                        <a:srgbClr val="D8DEE6"/>
+                      </a:solidFill>
+                      <a:prstDash val="solid"/>
+                      <a:round/>
+                      <a:headEnd type="none" w="med" len="med"/>
+                      <a:tailEnd type="none" w="med" len="med"/>
+                    </a:lnB>
+                    <a:solidFill>
+                      <a:srgbClr val="FFFFFF"/>
+                    </a:solidFill>
+                  </a:tcPr>
+                </a:tc>
+                <a:tc>
+                  <a:txBody>
+                    <a:bodyPr/>
+                    <a:lstStyle/>
+                    <a:p>
+                      <a:pPr algn="ctr" indent="0" marL="0">
+                        <a:buNone/>
+                      </a:pPr>
+                      <a:r>
+                        <a:rPr lang="en-US" sz="1300" dirty="0">
+                          <a:solidFill>
+                            <a:srgbClr val="1F2328"/>
+                          </a:solidFill>
+                          <a:latin typeface="Arial" pitchFamily="34" charset="0"/>
+                          <a:ea typeface="Arial" pitchFamily="34" charset="-122"/>
+                          <a:cs typeface="Arial" pitchFamily="34" charset="-120"/>
+                        </a:rPr>
+                        <a:t>L15:F9635</a:t>
+                      </a:r>
+                      <a:endParaRPr lang="en-US" sz="1300" dirty="0">
+                        <a:latin typeface="Arial" charset="0"/>
+                        <a:ea typeface="Arial" charset="0"/>
+                        <a:cs typeface="Arial" charset="0"/>
+                      </a:endParaRPr>
+                    </a:p>
+                  </a:txBody>
+                  <a:tcPr marL="73152" marR="73152" marT="36576" marB="36576" anchor="ctr">
+                    <a:lnL w="9525" cap="flat" cmpd="sng" algn="ctr">
+                      <a:solidFill>
+                        <a:srgbClr val="D8DEE6"/>
+                      </a:solidFill>
+                      <a:prstDash val="solid"/>
+                      <a:round/>
+                      <a:headEnd type="none" w="med" len="med"/>
+                      <a:tailEnd type="none" w="med" len="med"/>
+                    </a:lnL>
+                    <a:lnR w="9525" cap="flat" cmpd="sng" algn="ctr">
+                      <a:solidFill>
+                        <a:srgbClr val="D8DEE6"/>
+                      </a:solidFill>
+                      <a:prstDash val="solid"/>
+                      <a:round/>
+                      <a:headEnd type="none" w="med" len="med"/>
+                      <a:tailEnd type="none" w="med" len="med"/>
+                    </a:lnR>
+                    <a:lnT w="9525" cap="flat" cmpd="sng" algn="ctr">
+                      <a:solidFill>
+                        <a:srgbClr val="D8DEE6"/>
+                      </a:solidFill>
+                      <a:prstDash val="solid"/>
+                      <a:round/>
+                      <a:headEnd type="none" w="med" len="med"/>
+                      <a:tailEnd type="none" w="med" len="med"/>
+                    </a:lnT>
+                    <a:lnB w="9525" cap="flat" cmpd="sng" algn="ctr">
+                      <a:solidFill>
+                        <a:srgbClr val="D8DEE6"/>
+                      </a:solidFill>
+                      <a:prstDash val="solid"/>
+                      <a:round/>
+                      <a:headEnd type="none" w="med" len="med"/>
+                      <a:tailEnd type="none" w="med" len="med"/>
+                    </a:lnB>
+                    <a:solidFill>
+                      <a:srgbClr val="E6F2F1"/>
+                    </a:solidFill>
+                  </a:tcPr>
+                </a:tc>
+                <a:tc>
+                  <a:txBody>
+                    <a:bodyPr/>
+                    <a:lstStyle/>
+                    <a:p>
+                      <a:pPr algn="ctr" indent="0" marL="0">
+                        <a:buNone/>
+                      </a:pPr>
+                      <a:r>
+                        <a:rPr lang="en-US" sz="1300" dirty="0">
+                          <a:solidFill>
+                            <a:srgbClr val="1F2328"/>
+                          </a:solidFill>
+                          <a:latin typeface="Arial" pitchFamily="34" charset="0"/>
+                          <a:ea typeface="Arial" pitchFamily="34" charset="-122"/>
+                          <a:cs typeface="Arial" pitchFamily="34" charset="-120"/>
+                        </a:rPr>
+                        <a:t>L10:F1084</a:t>
+                      </a:r>
+                      <a:endParaRPr lang="en-US" sz="1300" dirty="0">
+                        <a:latin typeface="Arial" charset="0"/>
+                        <a:ea typeface="Arial" charset="0"/>
+                        <a:cs typeface="Arial" charset="0"/>
+                      </a:endParaRPr>
+                    </a:p>
+                  </a:txBody>
+                  <a:tcPr marL="73152" marR="73152" marT="36576" marB="36576" anchor="ctr">
+                    <a:lnL w="9525" cap="flat" cmpd="sng" algn="ctr">
+                      <a:solidFill>
+                        <a:srgbClr val="D8DEE6"/>
+                      </a:solidFill>
+                      <a:prstDash val="solid"/>
+                      <a:round/>
+                      <a:headEnd type="none" w="med" len="med"/>
+                      <a:tailEnd type="none" w="med" len="med"/>
+                    </a:lnL>
+                    <a:lnR w="9525" cap="flat" cmpd="sng" algn="ctr">
+                      <a:solidFill>
+                        <a:srgbClr val="D8DEE6"/>
+                      </a:solidFill>
+                      <a:prstDash val="solid"/>
+                      <a:round/>
+                      <a:headEnd type="none" w="med" len="med"/>
+                      <a:tailEnd type="none" w="med" len="med"/>
+                    </a:lnR>
+                    <a:lnT w="9525" cap="flat" cmpd="sng" algn="ctr">
+                      <a:solidFill>
+                        <a:srgbClr val="D8DEE6"/>
+                      </a:solidFill>
+                      <a:prstDash val="solid"/>
+                      <a:round/>
+                      <a:headEnd type="none" w="med" len="med"/>
+                      <a:tailEnd type="none" w="med" len="med"/>
+                    </a:lnT>
+                    <a:lnB w="9525" cap="flat" cmpd="sng" algn="ctr">
+                      <a:solidFill>
+                        <a:srgbClr val="D8DEE6"/>
+                      </a:solidFill>
+                      <a:prstDash val="solid"/>
+                      <a:round/>
+                      <a:headEnd type="none" w="med" len="med"/>
+                      <a:tailEnd type="none" w="med" len="med"/>
+                    </a:lnB>
+                    <a:solidFill>
+                      <a:srgbClr val="FFFFFF"/>
+                    </a:solidFill>
+                  </a:tcPr>
+                </a:tc>
+              </a:tr>
+              <a:tr h="384048">
+                <a:tc>
+                  <a:txBody>
+                    <a:bodyPr/>
+                    <a:lstStyle/>
+                    <a:p>
+                      <a:pPr algn="ctr" indent="0" marL="0">
+                        <a:buNone/>
+                      </a:pPr>
+                      <a:r>
+                        <a:rPr lang="en-US" sz="1300" dirty="0">
+                          <a:solidFill>
+                            <a:srgbClr val="5F6B7A"/>
+                          </a:solidFill>
+                          <a:latin typeface="Arial" pitchFamily="34" charset="0"/>
+                          <a:ea typeface="Arial" pitchFamily="34" charset="-122"/>
+                          <a:cs typeface="Arial" pitchFamily="34" charset="-120"/>
+                        </a:rPr>
+                        <a:t>4</a:t>
+                      </a:r>
+                      <a:endParaRPr lang="en-US" sz="1300" dirty="0">
+                        <a:latin typeface="Arial" charset="0"/>
+                        <a:ea typeface="Arial" charset="0"/>
+                        <a:cs typeface="Arial" charset="0"/>
+                      </a:endParaRPr>
+                    </a:p>
+                  </a:txBody>
+                  <a:tcPr marL="73152" marR="73152" marT="36576" marB="36576" anchor="ctr">
+                    <a:lnL w="9525" cap="flat" cmpd="sng" algn="ctr">
+                      <a:solidFill>
+                        <a:srgbClr val="D8DEE6"/>
+                      </a:solidFill>
+                      <a:prstDash val="solid"/>
+                      <a:round/>
+                      <a:headEnd type="none" w="med" len="med"/>
+                      <a:tailEnd type="none" w="med" len="med"/>
+                    </a:lnL>
+                    <a:lnR w="9525" cap="flat" cmpd="sng" algn="ctr">
+                      <a:solidFill>
+                        <a:srgbClr val="D8DEE6"/>
+                      </a:solidFill>
+                      <a:prstDash val="solid"/>
+                      <a:round/>
+                      <a:headEnd type="none" w="med" len="med"/>
+                      <a:tailEnd type="none" w="med" len="med"/>
+                    </a:lnR>
+                    <a:lnT w="9525" cap="flat" cmpd="sng" algn="ctr">
+                      <a:solidFill>
+                        <a:srgbClr val="D8DEE6"/>
+                      </a:solidFill>
+                      <a:prstDash val="solid"/>
+                      <a:round/>
+                      <a:headEnd type="none" w="med" len="med"/>
+                      <a:tailEnd type="none" w="med" len="med"/>
+                    </a:lnT>
+                    <a:lnB w="9525" cap="flat" cmpd="sng" algn="ctr">
+                      <a:solidFill>
+                        <a:srgbClr val="D8DEE6"/>
+                      </a:solidFill>
+                      <a:prstDash val="solid"/>
+                      <a:round/>
+                      <a:headEnd type="none" w="med" len="med"/>
+                      <a:tailEnd type="none" w="med" len="med"/>
+                    </a:lnB>
+                    <a:solidFill>
+                      <a:srgbClr val="FFFFFF"/>
+                    </a:solidFill>
+                  </a:tcPr>
+                </a:tc>
+                <a:tc>
+                  <a:txBody>
+                    <a:bodyPr/>
+                    <a:lstStyle/>
+                    <a:p>
+                      <a:pPr algn="ctr" indent="0" marL="0">
+                        <a:buNone/>
+                      </a:pPr>
+                      <a:r>
+                        <a:rPr lang="en-US" sz="1300" b="1" dirty="0">
+                          <a:solidFill>
+                            <a:srgbClr val="FFFFFF"/>
+                          </a:solidFill>
+                          <a:latin typeface="Arial" pitchFamily="34" charset="0"/>
+                          <a:ea typeface="Arial" pitchFamily="34" charset="-122"/>
+                          <a:cs typeface="Arial" pitchFamily="34" charset="-120"/>
+                        </a:rPr>
+                        <a:t>L11:F4258</a:t>
+                      </a:r>
+                      <a:endParaRPr lang="en-US" sz="1300" dirty="0">
+                        <a:latin typeface="Arial" charset="0"/>
+                        <a:ea typeface="Arial" charset="0"/>
+                        <a:cs typeface="Arial" charset="0"/>
+                      </a:endParaRPr>
+                    </a:p>
+                  </a:txBody>
+                  <a:tcPr marL="73152" marR="73152" marT="36576" marB="36576" anchor="ctr">
+                    <a:lnL w="9525" cap="flat" cmpd="sng" algn="ctr">
+                      <a:solidFill>
+                        <a:srgbClr val="D8DEE6"/>
+                      </a:solidFill>
+                      <a:prstDash val="solid"/>
+                      <a:round/>
+                      <a:headEnd type="none" w="med" len="med"/>
+                      <a:tailEnd type="none" w="med" len="med"/>
+                    </a:lnL>
+                    <a:lnR w="9525" cap="flat" cmpd="sng" algn="ctr">
+                      <a:solidFill>
+                        <a:srgbClr val="D8DEE6"/>
+                      </a:solidFill>
+                      <a:prstDash val="solid"/>
+                      <a:round/>
+                      <a:headEnd type="none" w="med" len="med"/>
+                      <a:tailEnd type="none" w="med" len="med"/>
+                    </a:lnR>
+                    <a:lnT w="9525" cap="flat" cmpd="sng" algn="ctr">
+                      <a:solidFill>
+                        <a:srgbClr val="D8DEE6"/>
+                      </a:solidFill>
+                      <a:prstDash val="solid"/>
+                      <a:round/>
+                      <a:headEnd type="none" w="med" len="med"/>
+                      <a:tailEnd type="none" w="med" len="med"/>
+                    </a:lnT>
+                    <a:lnB w="9525" cap="flat" cmpd="sng" algn="ctr">
+                      <a:solidFill>
+                        <a:srgbClr val="D8DEE6"/>
+                      </a:solidFill>
+                      <a:prstDash val="solid"/>
+                      <a:round/>
+                      <a:headEnd type="none" w="med" len="med"/>
+                      <a:tailEnd type="none" w="med" len="med"/>
+                    </a:lnB>
+                    <a:solidFill>
+                      <a:srgbClr val="0F766E"/>
+                    </a:solidFill>
+                  </a:tcPr>
+                </a:tc>
+                <a:tc>
+                  <a:txBody>
+                    <a:bodyPr/>
+                    <a:lstStyle/>
+                    <a:p>
+                      <a:pPr algn="ctr" indent="0" marL="0">
+                        <a:buNone/>
+                      </a:pPr>
+                      <a:r>
+                        <a:rPr lang="en-US" sz="1300" dirty="0">
+                          <a:solidFill>
+                            <a:srgbClr val="1F2328"/>
+                          </a:solidFill>
+                          <a:latin typeface="Arial" pitchFamily="34" charset="0"/>
+                          <a:ea typeface="Arial" pitchFamily="34" charset="-122"/>
+                          <a:cs typeface="Arial" pitchFamily="34" charset="-120"/>
+                        </a:rPr>
+                        <a:t>L10:F9064</a:t>
+                      </a:r>
+                      <a:endParaRPr lang="en-US" sz="1300" dirty="0">
+                        <a:latin typeface="Arial" charset="0"/>
+                        <a:ea typeface="Arial" charset="0"/>
+                        <a:cs typeface="Arial" charset="0"/>
+                      </a:endParaRPr>
+                    </a:p>
+                  </a:txBody>
+                  <a:tcPr marL="73152" marR="73152" marT="36576" marB="36576" anchor="ctr">
+                    <a:lnL w="9525" cap="flat" cmpd="sng" algn="ctr">
+                      <a:solidFill>
+                        <a:srgbClr val="D8DEE6"/>
+                      </a:solidFill>
+                      <a:prstDash val="solid"/>
+                      <a:round/>
+                      <a:headEnd type="none" w="med" len="med"/>
+                      <a:tailEnd type="none" w="med" len="med"/>
+                    </a:lnL>
+                    <a:lnR w="9525" cap="flat" cmpd="sng" algn="ctr">
+                      <a:solidFill>
+                        <a:srgbClr val="D8DEE6"/>
+                      </a:solidFill>
+                      <a:prstDash val="solid"/>
+                      <a:round/>
+                      <a:headEnd type="none" w="med" len="med"/>
+                      <a:tailEnd type="none" w="med" len="med"/>
+                    </a:lnR>
+                    <a:lnT w="9525" cap="flat" cmpd="sng" algn="ctr">
+                      <a:solidFill>
+                        <a:srgbClr val="D8DEE6"/>
+                      </a:solidFill>
+                      <a:prstDash val="solid"/>
+                      <a:round/>
+                      <a:headEnd type="none" w="med" len="med"/>
+                      <a:tailEnd type="none" w="med" len="med"/>
+                    </a:lnT>
+                    <a:lnB w="9525" cap="flat" cmpd="sng" algn="ctr">
+                      <a:solidFill>
+                        <a:srgbClr val="D8DEE6"/>
+                      </a:solidFill>
+                      <a:prstDash val="solid"/>
+                      <a:round/>
+                      <a:headEnd type="none" w="med" len="med"/>
+                      <a:tailEnd type="none" w="med" len="med"/>
+                    </a:lnB>
+                    <a:solidFill>
+                      <a:srgbClr val="FFFFFF"/>
+                    </a:solidFill>
+                  </a:tcPr>
+                </a:tc>
+              </a:tr>
+              <a:tr h="384048">
+                <a:tc>
+                  <a:txBody>
+                    <a:bodyPr/>
+                    <a:lstStyle/>
+                    <a:p>
+                      <a:pPr algn="ctr" indent="0" marL="0">
+                        <a:buNone/>
+                      </a:pPr>
+                      <a:r>
+                        <a:rPr lang="en-US" sz="1300" dirty="0">
+                          <a:solidFill>
+                            <a:srgbClr val="5F6B7A"/>
+                          </a:solidFill>
+                          <a:latin typeface="Arial" pitchFamily="34" charset="0"/>
+                          <a:ea typeface="Arial" pitchFamily="34" charset="-122"/>
+                          <a:cs typeface="Arial" pitchFamily="34" charset="-120"/>
+                        </a:rPr>
+                        <a:t>5</a:t>
+                      </a:r>
+                      <a:endParaRPr lang="en-US" sz="1300" dirty="0">
+                        <a:latin typeface="Arial" charset="0"/>
+                        <a:ea typeface="Arial" charset="0"/>
+                        <a:cs typeface="Arial" charset="0"/>
+                      </a:endParaRPr>
+                    </a:p>
+                  </a:txBody>
+                  <a:tcPr marL="73152" marR="73152" marT="36576" marB="36576" anchor="ctr">
+                    <a:lnL w="9525" cap="flat" cmpd="sng" algn="ctr">
+                      <a:solidFill>
+                        <a:srgbClr val="D8DEE6"/>
+                      </a:solidFill>
+                      <a:prstDash val="solid"/>
+                      <a:round/>
+                      <a:headEnd type="none" w="med" len="med"/>
+                      <a:tailEnd type="none" w="med" len="med"/>
+                    </a:lnL>
+                    <a:lnR w="9525" cap="flat" cmpd="sng" algn="ctr">
+                      <a:solidFill>
+                        <a:srgbClr val="D8DEE6"/>
+                      </a:solidFill>
+                      <a:prstDash val="solid"/>
+                      <a:round/>
+                      <a:headEnd type="none" w="med" len="med"/>
+                      <a:tailEnd type="none" w="med" len="med"/>
+                    </a:lnR>
+                    <a:lnT w="9525" cap="flat" cmpd="sng" algn="ctr">
+                      <a:solidFill>
+                        <a:srgbClr val="D8DEE6"/>
+                      </a:solidFill>
+                      <a:prstDash val="solid"/>
+                      <a:round/>
+                      <a:headEnd type="none" w="med" len="med"/>
+                      <a:tailEnd type="none" w="med" len="med"/>
+                    </a:lnT>
+                    <a:lnB w="9525" cap="flat" cmpd="sng" algn="ctr">
+                      <a:solidFill>
+                        <a:srgbClr val="D8DEE6"/>
+                      </a:solidFill>
+                      <a:prstDash val="solid"/>
+                      <a:round/>
+                      <a:headEnd type="none" w="med" len="med"/>
+                      <a:tailEnd type="none" w="med" len="med"/>
+                    </a:lnB>
+                    <a:solidFill>
+                      <a:srgbClr val="FFFFFF"/>
+                    </a:solidFill>
+                  </a:tcPr>
+                </a:tc>
+                <a:tc>
+                  <a:txBody>
+                    <a:bodyPr/>
+                    <a:lstStyle/>
+                    <a:p>
+                      <a:pPr algn="ctr" indent="0" marL="0">
+                        <a:buNone/>
+                      </a:pPr>
+                      <a:r>
+                        <a:rPr lang="en-US" sz="1300" dirty="0">
+                          <a:solidFill>
+                            <a:srgbClr val="1F2328"/>
+                          </a:solidFill>
+                          <a:latin typeface="Arial" pitchFamily="34" charset="0"/>
+                          <a:ea typeface="Arial" pitchFamily="34" charset="-122"/>
+                          <a:cs typeface="Arial" pitchFamily="34" charset="-120"/>
+                        </a:rPr>
+                        <a:t>L17:F13532</a:t>
+                      </a:r>
+                      <a:endParaRPr lang="en-US" sz="1300" dirty="0">
+                        <a:latin typeface="Arial" charset="0"/>
+                        <a:ea typeface="Arial" charset="0"/>
+                        <a:cs typeface="Arial" charset="0"/>
+                      </a:endParaRPr>
+                    </a:p>
+                  </a:txBody>
+                  <a:tcPr marL="73152" marR="73152" marT="36576" marB="36576" anchor="ctr">
+                    <a:lnL w="9525" cap="flat" cmpd="sng" algn="ctr">
+                      <a:solidFill>
+                        <a:srgbClr val="D8DEE6"/>
+                      </a:solidFill>
+                      <a:prstDash val="solid"/>
+                      <a:round/>
+                      <a:headEnd type="none" w="med" len="med"/>
+                      <a:tailEnd type="none" w="med" len="med"/>
+                    </a:lnL>
+                    <a:lnR w="9525" cap="flat" cmpd="sng" algn="ctr">
+                      <a:solidFill>
+                        <a:srgbClr val="D8DEE6"/>
+                      </a:solidFill>
+                      <a:prstDash val="solid"/>
+                      <a:round/>
+                      <a:headEnd type="none" w="med" len="med"/>
+                      <a:tailEnd type="none" w="med" len="med"/>
+                    </a:lnR>
+                    <a:lnT w="9525" cap="flat" cmpd="sng" algn="ctr">
+                      <a:solidFill>
+                        <a:srgbClr val="D8DEE6"/>
+                      </a:solidFill>
+                      <a:prstDash val="solid"/>
+                      <a:round/>
+                      <a:headEnd type="none" w="med" len="med"/>
+                      <a:tailEnd type="none" w="med" len="med"/>
+                    </a:lnT>
+                    <a:lnB w="9525" cap="flat" cmpd="sng" algn="ctr">
+                      <a:solidFill>
+                        <a:srgbClr val="D8DEE6"/>
+                      </a:solidFill>
+                      <a:prstDash val="solid"/>
+                      <a:round/>
+                      <a:headEnd type="none" w="med" len="med"/>
+                      <a:tailEnd type="none" w="med" len="med"/>
+                    </a:lnB>
+                    <a:solidFill>
+                      <a:srgbClr val="FFFFFF"/>
+                    </a:solidFill>
+                  </a:tcPr>
+                </a:tc>
+                <a:tc>
+                  <a:txBody>
+                    <a:bodyPr/>
+                    <a:lstStyle/>
+                    <a:p>
+                      <a:pPr algn="ctr" indent="0" marL="0">
+                        <a:buNone/>
+                      </a:pPr>
+                      <a:r>
+                        <a:rPr lang="en-US" sz="1300" dirty="0">
+                          <a:solidFill>
+                            <a:srgbClr val="1F2328"/>
+                          </a:solidFill>
+                          <a:latin typeface="Arial" pitchFamily="34" charset="0"/>
+                          <a:ea typeface="Arial" pitchFamily="34" charset="-122"/>
+                          <a:cs typeface="Arial" pitchFamily="34" charset="-120"/>
+                        </a:rPr>
+                        <a:t>L13:F1358</a:t>
+                      </a:r>
+                      <a:endParaRPr lang="en-US" sz="1300" dirty="0">
+                        <a:latin typeface="Arial" charset="0"/>
+                        <a:ea typeface="Arial" charset="0"/>
+                        <a:cs typeface="Arial" charset="0"/>
+                      </a:endParaRPr>
+                    </a:p>
+                  </a:txBody>
+                  <a:tcPr marL="73152" marR="73152" marT="36576" marB="36576" anchor="ctr">
+                    <a:lnL w="9525" cap="flat" cmpd="sng" algn="ctr">
+                      <a:solidFill>
+                        <a:srgbClr val="D8DEE6"/>
+                      </a:solidFill>
+                      <a:prstDash val="solid"/>
+                      <a:round/>
+                      <a:headEnd type="none" w="med" len="med"/>
+                      <a:tailEnd type="none" w="med" len="med"/>
+                    </a:lnL>
+                    <a:lnR w="9525" cap="flat" cmpd="sng" algn="ctr">
+                      <a:solidFill>
+                        <a:srgbClr val="D8DEE6"/>
+                      </a:solidFill>
+                      <a:prstDash val="solid"/>
+                      <a:round/>
+                      <a:headEnd type="none" w="med" len="med"/>
+                      <a:tailEnd type="none" w="med" len="med"/>
+                    </a:lnR>
+                    <a:lnT w="9525" cap="flat" cmpd="sng" algn="ctr">
+                      <a:solidFill>
+                        <a:srgbClr val="D8DEE6"/>
+                      </a:solidFill>
+                      <a:prstDash val="solid"/>
+                      <a:round/>
+                      <a:headEnd type="none" w="med" len="med"/>
+                      <a:tailEnd type="none" w="med" len="med"/>
+                    </a:lnT>
+                    <a:lnB w="9525" cap="flat" cmpd="sng" algn="ctr">
+                      <a:solidFill>
+                        <a:srgbClr val="D8DEE6"/>
+                      </a:solidFill>
+                      <a:prstDash val="solid"/>
+                      <a:round/>
+                      <a:headEnd type="none" w="med" len="med"/>
+                      <a:tailEnd type="none" w="med" len="med"/>
+                    </a:lnB>
+                    <a:solidFill>
+                      <a:srgbClr val="FFFFFF"/>
+                    </a:solidFill>
+                  </a:tcPr>
+                </a:tc>
+              </a:tr>
+            </a:tbl>
+          </a:graphicData>
+        </a:graphic>
+      </p:graphicFrame>
+      <p:sp>
+        <p:nvSpPr>
+          <p:cNvPr id="11" name="Text 6"/>
+          <p:cNvSpPr/>
+          <p:nvPr/>
+        </p:nvSpPr>
+        <p:spPr>
+          <a:xfrm>
+            <a:off x="4334256" y="4206240"/>
+            <a:ext cx="3520440" cy="320040"/>
           </a:xfrm>
           <a:prstGeom prst="rect">
             <a:avLst/>
@@ -30897,14 +33200,1423 @@
           <a:ln/>
         </p:spPr>
         <p:txBody>
-          <a:bodyPr wrap="square" lIns="0" tIns="0" rIns="0" bIns="0" rtlCol="0" anchor="t"/>
+          <a:bodyPr wrap="square" lIns="0" tIns="0" rIns="0" bIns="0" rtlCol="0" anchor="ctr"/>
+          <a:lstStyle/>
+          <a:p>
+            <a:pPr algn="ctr" indent="0" marL="0">
+              <a:buNone/>
+            </a:pPr>
+            <a:r>
+              <a:rPr lang="en-US" sz="1400" b="1" dirty="0">
+                <a:solidFill>
+                  <a:srgbClr val="0F766E"/>
+                </a:solidFill>
+                <a:latin typeface="Arial" pitchFamily="34" charset="0"/>
+                <a:ea typeface="Arial" pitchFamily="34" charset="-122"/>
+                <a:cs typeface="Arial" pitchFamily="34" charset="-120"/>
+              </a:rPr>
+              <a:t>2 of 5 shared</a:t>
+            </a:r>
+            <a:endParaRPr lang="en-US" sz="1400" dirty="0"/>
+          </a:p>
+        </p:txBody>
+      </p:sp>
+      <p:sp>
+        <p:nvSpPr>
+          <p:cNvPr id="12" name="Text 7"/>
+          <p:cNvSpPr/>
+          <p:nvPr/>
+        </p:nvSpPr>
+        <p:spPr>
+          <a:xfrm>
+            <a:off x="8119872" y="1417320"/>
+            <a:ext cx="3520440" cy="365760"/>
+          </a:xfrm>
+          <a:prstGeom prst="rect">
+            <a:avLst/>
+          </a:prstGeom>
+          <a:noFill/>
+          <a:ln/>
+        </p:spPr>
+        <p:txBody>
+          <a:bodyPr wrap="square" lIns="0" tIns="0" rIns="0" bIns="0" rtlCol="0" anchor="ctr"/>
+          <a:lstStyle/>
+          <a:p>
+            <a:pPr algn="ctr" indent="0" marL="0">
+              <a:buNone/>
+            </a:pPr>
+            <a:r>
+              <a:rPr lang="en-US" sz="1700" b="1" dirty="0">
+                <a:solidFill>
+                  <a:srgbClr val="1F2328"/>
+                </a:solidFill>
+                <a:latin typeface="Arial" pitchFamily="34" charset="0"/>
+                <a:ea typeface="Arial" pitchFamily="34" charset="-122"/>
+                <a:cs typeface="Arial" pitchFamily="34" charset="-120"/>
+              </a:rPr>
+              <a:t>Qwen3-1.7B</a:t>
+            </a:r>
+            <a:endParaRPr lang="en-US" sz="1700" dirty="0"/>
+          </a:p>
+        </p:txBody>
+      </p:sp>
+      <p:graphicFrame>
+        <p:nvGraphicFramePr>
+          <p:cNvPr id="79" name="Table 2"/>
+          <p:cNvGraphicFramePr>
+            <a:graphicFrameLocks noGrp="1"/>
+          </p:cNvGraphicFramePr>
+          <p:nvPr>
+            <p:extLst>
+              <p:ext uri="{D42A27DB-BD31-4B8C-83A1-F6EECF244321}">
+                <p14:modId xmlns:p14="http://schemas.microsoft.com/office/powerpoint/2010/main" val="1579011935"/>
+              </p:ext>
+            </p:extLst>
+          </p:nvPr>
+        </p:nvGraphicFramePr>
+        <p:xfrm>
+          <a:off x="8119872" y="1828800"/>
+          <a:ext cx="3520440" cy="914400"/>
+        </p:xfrm>
+        <a:graphic>
+          <a:graphicData uri="http://schemas.openxmlformats.org/drawingml/2006/table">
+            <a:tbl>
+              <a:tblPr/>
+              <a:tblGrid>
+                <a:gridCol w="502920"/>
+                <a:gridCol w="1508760"/>
+                <a:gridCol w="1508760"/>
+              </a:tblGrid>
+              <a:tr h="384048">
+                <a:tc>
+                  <a:txBody>
+                    <a:bodyPr/>
+                    <a:lstStyle/>
+                    <a:p>
+                      <a:pPr algn="ctr" indent="0" marL="0">
+                        <a:buNone/>
+                      </a:pPr>
+                      <a:r>
+                        <a:rPr lang="en-US" sz="1300" b="1" dirty="0">
+                          <a:solidFill>
+                            <a:srgbClr val="1F2328"/>
+                          </a:solidFill>
+                          <a:latin typeface="Arial" pitchFamily="34" charset="0"/>
+                          <a:ea typeface="Arial" pitchFamily="34" charset="-122"/>
+                          <a:cs typeface="Arial" pitchFamily="34" charset="-120"/>
+                        </a:rPr>
+                        <a:t>rank</a:t>
+                      </a:r>
+                      <a:endParaRPr lang="en-US" sz="1300" dirty="0">
+                        <a:latin typeface="Arial" charset="0"/>
+                        <a:ea typeface="Arial" charset="0"/>
+                        <a:cs typeface="Arial" charset="0"/>
+                      </a:endParaRPr>
+                    </a:p>
+                  </a:txBody>
+                  <a:tcPr marL="73152" marR="73152" marT="36576" marB="36576" anchor="ctr">
+                    <a:lnL w="9525" cap="flat" cmpd="sng" algn="ctr">
+                      <a:solidFill>
+                        <a:srgbClr val="D8DEE6"/>
+                      </a:solidFill>
+                      <a:prstDash val="solid"/>
+                      <a:round/>
+                      <a:headEnd type="none" w="med" len="med"/>
+                      <a:tailEnd type="none" w="med" len="med"/>
+                    </a:lnL>
+                    <a:lnR w="9525" cap="flat" cmpd="sng" algn="ctr">
+                      <a:solidFill>
+                        <a:srgbClr val="D8DEE6"/>
+                      </a:solidFill>
+                      <a:prstDash val="solid"/>
+                      <a:round/>
+                      <a:headEnd type="none" w="med" len="med"/>
+                      <a:tailEnd type="none" w="med" len="med"/>
+                    </a:lnR>
+                    <a:lnT w="9525" cap="flat" cmpd="sng" algn="ctr">
+                      <a:solidFill>
+                        <a:srgbClr val="D8DEE6"/>
+                      </a:solidFill>
+                      <a:prstDash val="solid"/>
+                      <a:round/>
+                      <a:headEnd type="none" w="med" len="med"/>
+                      <a:tailEnd type="none" w="med" len="med"/>
+                    </a:lnT>
+                    <a:lnB w="9525" cap="flat" cmpd="sng" algn="ctr">
+                      <a:solidFill>
+                        <a:srgbClr val="D8DEE6"/>
+                      </a:solidFill>
+                      <a:prstDash val="solid"/>
+                      <a:round/>
+                      <a:headEnd type="none" w="med" len="med"/>
+                      <a:tailEnd type="none" w="med" len="med"/>
+                    </a:lnB>
+                    <a:solidFill>
+                      <a:srgbClr val="F4F6F9"/>
+                    </a:solidFill>
+                  </a:tcPr>
+                </a:tc>
+                <a:tc>
+                  <a:txBody>
+                    <a:bodyPr/>
+                    <a:lstStyle/>
+                    <a:p>
+                      <a:pPr algn="ctr" indent="0" marL="0">
+                        <a:buNone/>
+                      </a:pPr>
+                      <a:r>
+                        <a:rPr lang="en-US" sz="1300" b="1" dirty="0">
+                          <a:solidFill>
+                            <a:srgbClr val="1F2328"/>
+                          </a:solidFill>
+                          <a:latin typeface="Arial" pitchFamily="34" charset="0"/>
+                          <a:ea typeface="Arial" pitchFamily="34" charset="-122"/>
+                          <a:cs typeface="Arial" pitchFamily="34" charset="-120"/>
+                        </a:rPr>
+                        <a:t>English search</a:t>
+                      </a:r>
+                      <a:endParaRPr lang="en-US" sz="1300" dirty="0">
+                        <a:latin typeface="Arial" charset="0"/>
+                        <a:ea typeface="Arial" charset="0"/>
+                        <a:cs typeface="Arial" charset="0"/>
+                      </a:endParaRPr>
+                    </a:p>
+                  </a:txBody>
+                  <a:tcPr marL="73152" marR="73152" marT="36576" marB="36576" anchor="ctr">
+                    <a:lnL w="9525" cap="flat" cmpd="sng" algn="ctr">
+                      <a:solidFill>
+                        <a:srgbClr val="D8DEE6"/>
+                      </a:solidFill>
+                      <a:prstDash val="solid"/>
+                      <a:round/>
+                      <a:headEnd type="none" w="med" len="med"/>
+                      <a:tailEnd type="none" w="med" len="med"/>
+                    </a:lnL>
+                    <a:lnR w="9525" cap="flat" cmpd="sng" algn="ctr">
+                      <a:solidFill>
+                        <a:srgbClr val="D8DEE6"/>
+                      </a:solidFill>
+                      <a:prstDash val="solid"/>
+                      <a:round/>
+                      <a:headEnd type="none" w="med" len="med"/>
+                      <a:tailEnd type="none" w="med" len="med"/>
+                    </a:lnR>
+                    <a:lnT w="9525" cap="flat" cmpd="sng" algn="ctr">
+                      <a:solidFill>
+                        <a:srgbClr val="D8DEE6"/>
+                      </a:solidFill>
+                      <a:prstDash val="solid"/>
+                      <a:round/>
+                      <a:headEnd type="none" w="med" len="med"/>
+                      <a:tailEnd type="none" w="med" len="med"/>
+                    </a:lnT>
+                    <a:lnB w="9525" cap="flat" cmpd="sng" algn="ctr">
+                      <a:solidFill>
+                        <a:srgbClr val="D8DEE6"/>
+                      </a:solidFill>
+                      <a:prstDash val="solid"/>
+                      <a:round/>
+                      <a:headEnd type="none" w="med" len="med"/>
+                      <a:tailEnd type="none" w="med" len="med"/>
+                    </a:lnB>
+                    <a:solidFill>
+                      <a:srgbClr val="F4F6F9"/>
+                    </a:solidFill>
+                  </a:tcPr>
+                </a:tc>
+                <a:tc>
+                  <a:txBody>
+                    <a:bodyPr/>
+                    <a:lstStyle/>
+                    <a:p>
+                      <a:pPr algn="ctr" indent="0" marL="0">
+                        <a:buNone/>
+                      </a:pPr>
+                      <a:r>
+                        <a:rPr lang="en-US" sz="1300" b="1" dirty="0">
+                          <a:solidFill>
+                            <a:srgbClr val="1F2328"/>
+                          </a:solidFill>
+                          <a:latin typeface="Arial" pitchFamily="34" charset="0"/>
+                          <a:ea typeface="Arial" pitchFamily="34" charset="-122"/>
+                          <a:cs typeface="Arial" pitchFamily="34" charset="-120"/>
+                        </a:rPr>
+                        <a:t>Arabic search</a:t>
+                      </a:r>
+                      <a:endParaRPr lang="en-US" sz="1300" dirty="0">
+                        <a:latin typeface="Arial" charset="0"/>
+                        <a:ea typeface="Arial" charset="0"/>
+                        <a:cs typeface="Arial" charset="0"/>
+                      </a:endParaRPr>
+                    </a:p>
+                  </a:txBody>
+                  <a:tcPr marL="73152" marR="73152" marT="36576" marB="36576" anchor="ctr">
+                    <a:lnL w="9525" cap="flat" cmpd="sng" algn="ctr">
+                      <a:solidFill>
+                        <a:srgbClr val="D8DEE6"/>
+                      </a:solidFill>
+                      <a:prstDash val="solid"/>
+                      <a:round/>
+                      <a:headEnd type="none" w="med" len="med"/>
+                      <a:tailEnd type="none" w="med" len="med"/>
+                    </a:lnL>
+                    <a:lnR w="9525" cap="flat" cmpd="sng" algn="ctr">
+                      <a:solidFill>
+                        <a:srgbClr val="D8DEE6"/>
+                      </a:solidFill>
+                      <a:prstDash val="solid"/>
+                      <a:round/>
+                      <a:headEnd type="none" w="med" len="med"/>
+                      <a:tailEnd type="none" w="med" len="med"/>
+                    </a:lnR>
+                    <a:lnT w="9525" cap="flat" cmpd="sng" algn="ctr">
+                      <a:solidFill>
+                        <a:srgbClr val="D8DEE6"/>
+                      </a:solidFill>
+                      <a:prstDash val="solid"/>
+                      <a:round/>
+                      <a:headEnd type="none" w="med" len="med"/>
+                      <a:tailEnd type="none" w="med" len="med"/>
+                    </a:lnT>
+                    <a:lnB w="9525" cap="flat" cmpd="sng" algn="ctr">
+                      <a:solidFill>
+                        <a:srgbClr val="D8DEE6"/>
+                      </a:solidFill>
+                      <a:prstDash val="solid"/>
+                      <a:round/>
+                      <a:headEnd type="none" w="med" len="med"/>
+                      <a:tailEnd type="none" w="med" len="med"/>
+                    </a:lnB>
+                    <a:solidFill>
+                      <a:srgbClr val="F4F6F9"/>
+                    </a:solidFill>
+                  </a:tcPr>
+                </a:tc>
+              </a:tr>
+              <a:tr h="384048">
+                <a:tc>
+                  <a:txBody>
+                    <a:bodyPr/>
+                    <a:lstStyle/>
+                    <a:p>
+                      <a:pPr algn="ctr" indent="0" marL="0">
+                        <a:buNone/>
+                      </a:pPr>
+                      <a:r>
+                        <a:rPr lang="en-US" sz="1300" dirty="0">
+                          <a:solidFill>
+                            <a:srgbClr val="5F6B7A"/>
+                          </a:solidFill>
+                          <a:latin typeface="Arial" pitchFamily="34" charset="0"/>
+                          <a:ea typeface="Arial" pitchFamily="34" charset="-122"/>
+                          <a:cs typeface="Arial" pitchFamily="34" charset="-120"/>
+                        </a:rPr>
+                        <a:t>1</a:t>
+                      </a:r>
+                      <a:endParaRPr lang="en-US" sz="1300" dirty="0">
+                        <a:latin typeface="Arial" charset="0"/>
+                        <a:ea typeface="Arial" charset="0"/>
+                        <a:cs typeface="Arial" charset="0"/>
+                      </a:endParaRPr>
+                    </a:p>
+                  </a:txBody>
+                  <a:tcPr marL="73152" marR="73152" marT="36576" marB="36576" anchor="ctr">
+                    <a:lnL w="9525" cap="flat" cmpd="sng" algn="ctr">
+                      <a:solidFill>
+                        <a:srgbClr val="D8DEE6"/>
+                      </a:solidFill>
+                      <a:prstDash val="solid"/>
+                      <a:round/>
+                      <a:headEnd type="none" w="med" len="med"/>
+                      <a:tailEnd type="none" w="med" len="med"/>
+                    </a:lnL>
+                    <a:lnR w="9525" cap="flat" cmpd="sng" algn="ctr">
+                      <a:solidFill>
+                        <a:srgbClr val="D8DEE6"/>
+                      </a:solidFill>
+                      <a:prstDash val="solid"/>
+                      <a:round/>
+                      <a:headEnd type="none" w="med" len="med"/>
+                      <a:tailEnd type="none" w="med" len="med"/>
+                    </a:lnR>
+                    <a:lnT w="9525" cap="flat" cmpd="sng" algn="ctr">
+                      <a:solidFill>
+                        <a:srgbClr val="D8DEE6"/>
+                      </a:solidFill>
+                      <a:prstDash val="solid"/>
+                      <a:round/>
+                      <a:headEnd type="none" w="med" len="med"/>
+                      <a:tailEnd type="none" w="med" len="med"/>
+                    </a:lnT>
+                    <a:lnB w="9525" cap="flat" cmpd="sng" algn="ctr">
+                      <a:solidFill>
+                        <a:srgbClr val="D8DEE6"/>
+                      </a:solidFill>
+                      <a:prstDash val="solid"/>
+                      <a:round/>
+                      <a:headEnd type="none" w="med" len="med"/>
+                      <a:tailEnd type="none" w="med" len="med"/>
+                    </a:lnB>
+                    <a:solidFill>
+                      <a:srgbClr val="FFFFFF"/>
+                    </a:solidFill>
+                  </a:tcPr>
+                </a:tc>
+                <a:tc>
+                  <a:txBody>
+                    <a:bodyPr/>
+                    <a:lstStyle/>
+                    <a:p>
+                      <a:pPr algn="ctr" indent="0" marL="0">
+                        <a:buNone/>
+                      </a:pPr>
+                      <a:r>
+                        <a:rPr lang="en-US" sz="1300" dirty="0">
+                          <a:solidFill>
+                            <a:srgbClr val="1F2328"/>
+                          </a:solidFill>
+                          <a:latin typeface="Arial" pitchFamily="34" charset="0"/>
+                          <a:ea typeface="Arial" pitchFamily="34" charset="-122"/>
+                          <a:cs typeface="Arial" pitchFamily="34" charset="-120"/>
+                        </a:rPr>
+                        <a:t>L12:F4580</a:t>
+                      </a:r>
+                      <a:endParaRPr lang="en-US" sz="1300" dirty="0">
+                        <a:latin typeface="Arial" charset="0"/>
+                        <a:ea typeface="Arial" charset="0"/>
+                        <a:cs typeface="Arial" charset="0"/>
+                      </a:endParaRPr>
+                    </a:p>
+                  </a:txBody>
+                  <a:tcPr marL="73152" marR="73152" marT="36576" marB="36576" anchor="ctr">
+                    <a:lnL w="9525" cap="flat" cmpd="sng" algn="ctr">
+                      <a:solidFill>
+                        <a:srgbClr val="D8DEE6"/>
+                      </a:solidFill>
+                      <a:prstDash val="solid"/>
+                      <a:round/>
+                      <a:headEnd type="none" w="med" len="med"/>
+                      <a:tailEnd type="none" w="med" len="med"/>
+                    </a:lnL>
+                    <a:lnR w="9525" cap="flat" cmpd="sng" algn="ctr">
+                      <a:solidFill>
+                        <a:srgbClr val="D8DEE6"/>
+                      </a:solidFill>
+                      <a:prstDash val="solid"/>
+                      <a:round/>
+                      <a:headEnd type="none" w="med" len="med"/>
+                      <a:tailEnd type="none" w="med" len="med"/>
+                    </a:lnR>
+                    <a:lnT w="9525" cap="flat" cmpd="sng" algn="ctr">
+                      <a:solidFill>
+                        <a:srgbClr val="D8DEE6"/>
+                      </a:solidFill>
+                      <a:prstDash val="solid"/>
+                      <a:round/>
+                      <a:headEnd type="none" w="med" len="med"/>
+                      <a:tailEnd type="none" w="med" len="med"/>
+                    </a:lnT>
+                    <a:lnB w="9525" cap="flat" cmpd="sng" algn="ctr">
+                      <a:solidFill>
+                        <a:srgbClr val="D8DEE6"/>
+                      </a:solidFill>
+                      <a:prstDash val="solid"/>
+                      <a:round/>
+                      <a:headEnd type="none" w="med" len="med"/>
+                      <a:tailEnd type="none" w="med" len="med"/>
+                    </a:lnB>
+                    <a:solidFill>
+                      <a:srgbClr val="E6F2F1"/>
+                    </a:solidFill>
+                  </a:tcPr>
+                </a:tc>
+                <a:tc>
+                  <a:txBody>
+                    <a:bodyPr/>
+                    <a:lstStyle/>
+                    <a:p>
+                      <a:pPr algn="ctr" indent="0" marL="0">
+                        <a:buNone/>
+                      </a:pPr>
+                      <a:r>
+                        <a:rPr lang="en-US" sz="1300" b="1" dirty="0">
+                          <a:solidFill>
+                            <a:srgbClr val="FFFFFF"/>
+                          </a:solidFill>
+                          <a:latin typeface="Arial" pitchFamily="34" charset="0"/>
+                          <a:ea typeface="Arial" pitchFamily="34" charset="-122"/>
+                          <a:cs typeface="Arial" pitchFamily="34" charset="-120"/>
+                        </a:rPr>
+                        <a:t>L13:F3270</a:t>
+                      </a:r>
+                      <a:endParaRPr lang="en-US" sz="1300" dirty="0">
+                        <a:latin typeface="Arial" charset="0"/>
+                        <a:ea typeface="Arial" charset="0"/>
+                        <a:cs typeface="Arial" charset="0"/>
+                      </a:endParaRPr>
+                    </a:p>
+                  </a:txBody>
+                  <a:tcPr marL="73152" marR="73152" marT="36576" marB="36576" anchor="ctr">
+                    <a:lnL w="9525" cap="flat" cmpd="sng" algn="ctr">
+                      <a:solidFill>
+                        <a:srgbClr val="D8DEE6"/>
+                      </a:solidFill>
+                      <a:prstDash val="solid"/>
+                      <a:round/>
+                      <a:headEnd type="none" w="med" len="med"/>
+                      <a:tailEnd type="none" w="med" len="med"/>
+                    </a:lnL>
+                    <a:lnR w="9525" cap="flat" cmpd="sng" algn="ctr">
+                      <a:solidFill>
+                        <a:srgbClr val="D8DEE6"/>
+                      </a:solidFill>
+                      <a:prstDash val="solid"/>
+                      <a:round/>
+                      <a:headEnd type="none" w="med" len="med"/>
+                      <a:tailEnd type="none" w="med" len="med"/>
+                    </a:lnR>
+                    <a:lnT w="9525" cap="flat" cmpd="sng" algn="ctr">
+                      <a:solidFill>
+                        <a:srgbClr val="D8DEE6"/>
+                      </a:solidFill>
+                      <a:prstDash val="solid"/>
+                      <a:round/>
+                      <a:headEnd type="none" w="med" len="med"/>
+                      <a:tailEnd type="none" w="med" len="med"/>
+                    </a:lnT>
+                    <a:lnB w="9525" cap="flat" cmpd="sng" algn="ctr">
+                      <a:solidFill>
+                        <a:srgbClr val="D8DEE6"/>
+                      </a:solidFill>
+                      <a:prstDash val="solid"/>
+                      <a:round/>
+                      <a:headEnd type="none" w="med" len="med"/>
+                      <a:tailEnd type="none" w="med" len="med"/>
+                    </a:lnB>
+                    <a:solidFill>
+                      <a:srgbClr val="0F766E"/>
+                    </a:solidFill>
+                  </a:tcPr>
+                </a:tc>
+              </a:tr>
+              <a:tr h="384048">
+                <a:tc>
+                  <a:txBody>
+                    <a:bodyPr/>
+                    <a:lstStyle/>
+                    <a:p>
+                      <a:pPr algn="ctr" indent="0" marL="0">
+                        <a:buNone/>
+                      </a:pPr>
+                      <a:r>
+                        <a:rPr lang="en-US" sz="1300" dirty="0">
+                          <a:solidFill>
+                            <a:srgbClr val="5F6B7A"/>
+                          </a:solidFill>
+                          <a:latin typeface="Arial" pitchFamily="34" charset="0"/>
+                          <a:ea typeface="Arial" pitchFamily="34" charset="-122"/>
+                          <a:cs typeface="Arial" pitchFamily="34" charset="-120"/>
+                        </a:rPr>
+                        <a:t>2</a:t>
+                      </a:r>
+                      <a:endParaRPr lang="en-US" sz="1300" dirty="0">
+                        <a:latin typeface="Arial" charset="0"/>
+                        <a:ea typeface="Arial" charset="0"/>
+                        <a:cs typeface="Arial" charset="0"/>
+                      </a:endParaRPr>
+                    </a:p>
+                  </a:txBody>
+                  <a:tcPr marL="73152" marR="73152" marT="36576" marB="36576" anchor="ctr">
+                    <a:lnL w="9525" cap="flat" cmpd="sng" algn="ctr">
+                      <a:solidFill>
+                        <a:srgbClr val="D8DEE6"/>
+                      </a:solidFill>
+                      <a:prstDash val="solid"/>
+                      <a:round/>
+                      <a:headEnd type="none" w="med" len="med"/>
+                      <a:tailEnd type="none" w="med" len="med"/>
+                    </a:lnL>
+                    <a:lnR w="9525" cap="flat" cmpd="sng" algn="ctr">
+                      <a:solidFill>
+                        <a:srgbClr val="D8DEE6"/>
+                      </a:solidFill>
+                      <a:prstDash val="solid"/>
+                      <a:round/>
+                      <a:headEnd type="none" w="med" len="med"/>
+                      <a:tailEnd type="none" w="med" len="med"/>
+                    </a:lnR>
+                    <a:lnT w="9525" cap="flat" cmpd="sng" algn="ctr">
+                      <a:solidFill>
+                        <a:srgbClr val="D8DEE6"/>
+                      </a:solidFill>
+                      <a:prstDash val="solid"/>
+                      <a:round/>
+                      <a:headEnd type="none" w="med" len="med"/>
+                      <a:tailEnd type="none" w="med" len="med"/>
+                    </a:lnT>
+                    <a:lnB w="9525" cap="flat" cmpd="sng" algn="ctr">
+                      <a:solidFill>
+                        <a:srgbClr val="D8DEE6"/>
+                      </a:solidFill>
+                      <a:prstDash val="solid"/>
+                      <a:round/>
+                      <a:headEnd type="none" w="med" len="med"/>
+                      <a:tailEnd type="none" w="med" len="med"/>
+                    </a:lnB>
+                    <a:solidFill>
+                      <a:srgbClr val="FFFFFF"/>
+                    </a:solidFill>
+                  </a:tcPr>
+                </a:tc>
+                <a:tc>
+                  <a:txBody>
+                    <a:bodyPr/>
+                    <a:lstStyle/>
+                    <a:p>
+                      <a:pPr algn="ctr" indent="0" marL="0">
+                        <a:buNone/>
+                      </a:pPr>
+                      <a:r>
+                        <a:rPr lang="en-US" sz="1300" dirty="0">
+                          <a:solidFill>
+                            <a:srgbClr val="1F2328"/>
+                          </a:solidFill>
+                          <a:latin typeface="Arial" pitchFamily="34" charset="0"/>
+                          <a:ea typeface="Arial" pitchFamily="34" charset="-122"/>
+                          <a:cs typeface="Arial" pitchFamily="34" charset="-120"/>
+                        </a:rPr>
+                        <a:t>L15:F1109</a:t>
+                      </a:r>
+                      <a:endParaRPr lang="en-US" sz="1300" dirty="0">
+                        <a:latin typeface="Arial" charset="0"/>
+                        <a:ea typeface="Arial" charset="0"/>
+                        <a:cs typeface="Arial" charset="0"/>
+                      </a:endParaRPr>
+                    </a:p>
+                  </a:txBody>
+                  <a:tcPr marL="73152" marR="73152" marT="36576" marB="36576" anchor="ctr">
+                    <a:lnL w="9525" cap="flat" cmpd="sng" algn="ctr">
+                      <a:solidFill>
+                        <a:srgbClr val="D8DEE6"/>
+                      </a:solidFill>
+                      <a:prstDash val="solid"/>
+                      <a:round/>
+                      <a:headEnd type="none" w="med" len="med"/>
+                      <a:tailEnd type="none" w="med" len="med"/>
+                    </a:lnL>
+                    <a:lnR w="9525" cap="flat" cmpd="sng" algn="ctr">
+                      <a:solidFill>
+                        <a:srgbClr val="D8DEE6"/>
+                      </a:solidFill>
+                      <a:prstDash val="solid"/>
+                      <a:round/>
+                      <a:headEnd type="none" w="med" len="med"/>
+                      <a:tailEnd type="none" w="med" len="med"/>
+                    </a:lnR>
+                    <a:lnT w="9525" cap="flat" cmpd="sng" algn="ctr">
+                      <a:solidFill>
+                        <a:srgbClr val="D8DEE6"/>
+                      </a:solidFill>
+                      <a:prstDash val="solid"/>
+                      <a:round/>
+                      <a:headEnd type="none" w="med" len="med"/>
+                      <a:tailEnd type="none" w="med" len="med"/>
+                    </a:lnT>
+                    <a:lnB w="9525" cap="flat" cmpd="sng" algn="ctr">
+                      <a:solidFill>
+                        <a:srgbClr val="D8DEE6"/>
+                      </a:solidFill>
+                      <a:prstDash val="solid"/>
+                      <a:round/>
+                      <a:headEnd type="none" w="med" len="med"/>
+                      <a:tailEnd type="none" w="med" len="med"/>
+                    </a:lnB>
+                    <a:solidFill>
+                      <a:srgbClr val="E6F2F1"/>
+                    </a:solidFill>
+                  </a:tcPr>
+                </a:tc>
+                <a:tc>
+                  <a:txBody>
+                    <a:bodyPr/>
+                    <a:lstStyle/>
+                    <a:p>
+                      <a:pPr algn="ctr" indent="0" marL="0">
+                        <a:buNone/>
+                      </a:pPr>
+                      <a:r>
+                        <a:rPr lang="en-US" sz="1300" dirty="0">
+                          <a:solidFill>
+                            <a:srgbClr val="1F2328"/>
+                          </a:solidFill>
+                          <a:latin typeface="Arial" pitchFamily="34" charset="0"/>
+                          <a:ea typeface="Arial" pitchFamily="34" charset="-122"/>
+                          <a:cs typeface="Arial" pitchFamily="34" charset="-120"/>
+                        </a:rPr>
+                        <a:t>L10:F244</a:t>
+                      </a:r>
+                      <a:endParaRPr lang="en-US" sz="1300" dirty="0">
+                        <a:latin typeface="Arial" charset="0"/>
+                        <a:ea typeface="Arial" charset="0"/>
+                        <a:cs typeface="Arial" charset="0"/>
+                      </a:endParaRPr>
+                    </a:p>
+                  </a:txBody>
+                  <a:tcPr marL="73152" marR="73152" marT="36576" marB="36576" anchor="ctr">
+                    <a:lnL w="9525" cap="flat" cmpd="sng" algn="ctr">
+                      <a:solidFill>
+                        <a:srgbClr val="D8DEE6"/>
+                      </a:solidFill>
+                      <a:prstDash val="solid"/>
+                      <a:round/>
+                      <a:headEnd type="none" w="med" len="med"/>
+                      <a:tailEnd type="none" w="med" len="med"/>
+                    </a:lnL>
+                    <a:lnR w="9525" cap="flat" cmpd="sng" algn="ctr">
+                      <a:solidFill>
+                        <a:srgbClr val="D8DEE6"/>
+                      </a:solidFill>
+                      <a:prstDash val="solid"/>
+                      <a:round/>
+                      <a:headEnd type="none" w="med" len="med"/>
+                      <a:tailEnd type="none" w="med" len="med"/>
+                    </a:lnR>
+                    <a:lnT w="9525" cap="flat" cmpd="sng" algn="ctr">
+                      <a:solidFill>
+                        <a:srgbClr val="D8DEE6"/>
+                      </a:solidFill>
+                      <a:prstDash val="solid"/>
+                      <a:round/>
+                      <a:headEnd type="none" w="med" len="med"/>
+                      <a:tailEnd type="none" w="med" len="med"/>
+                    </a:lnT>
+                    <a:lnB w="9525" cap="flat" cmpd="sng" algn="ctr">
+                      <a:solidFill>
+                        <a:srgbClr val="D8DEE6"/>
+                      </a:solidFill>
+                      <a:prstDash val="solid"/>
+                      <a:round/>
+                      <a:headEnd type="none" w="med" len="med"/>
+                      <a:tailEnd type="none" w="med" len="med"/>
+                    </a:lnB>
+                    <a:solidFill>
+                      <a:srgbClr val="E6F2F1"/>
+                    </a:solidFill>
+                  </a:tcPr>
+                </a:tc>
+              </a:tr>
+              <a:tr h="384048">
+                <a:tc>
+                  <a:txBody>
+                    <a:bodyPr/>
+                    <a:lstStyle/>
+                    <a:p>
+                      <a:pPr algn="ctr" indent="0" marL="0">
+                        <a:buNone/>
+                      </a:pPr>
+                      <a:r>
+                        <a:rPr lang="en-US" sz="1300" dirty="0">
+                          <a:solidFill>
+                            <a:srgbClr val="5F6B7A"/>
+                          </a:solidFill>
+                          <a:latin typeface="Arial" pitchFamily="34" charset="0"/>
+                          <a:ea typeface="Arial" pitchFamily="34" charset="-122"/>
+                          <a:cs typeface="Arial" pitchFamily="34" charset="-120"/>
+                        </a:rPr>
+                        <a:t>3</a:t>
+                      </a:r>
+                      <a:endParaRPr lang="en-US" sz="1300" dirty="0">
+                        <a:latin typeface="Arial" charset="0"/>
+                        <a:ea typeface="Arial" charset="0"/>
+                        <a:cs typeface="Arial" charset="0"/>
+                      </a:endParaRPr>
+                    </a:p>
+                  </a:txBody>
+                  <a:tcPr marL="73152" marR="73152" marT="36576" marB="36576" anchor="ctr">
+                    <a:lnL w="9525" cap="flat" cmpd="sng" algn="ctr">
+                      <a:solidFill>
+                        <a:srgbClr val="D8DEE6"/>
+                      </a:solidFill>
+                      <a:prstDash val="solid"/>
+                      <a:round/>
+                      <a:headEnd type="none" w="med" len="med"/>
+                      <a:tailEnd type="none" w="med" len="med"/>
+                    </a:lnL>
+                    <a:lnR w="9525" cap="flat" cmpd="sng" algn="ctr">
+                      <a:solidFill>
+                        <a:srgbClr val="D8DEE6"/>
+                      </a:solidFill>
+                      <a:prstDash val="solid"/>
+                      <a:round/>
+                      <a:headEnd type="none" w="med" len="med"/>
+                      <a:tailEnd type="none" w="med" len="med"/>
+                    </a:lnR>
+                    <a:lnT w="9525" cap="flat" cmpd="sng" algn="ctr">
+                      <a:solidFill>
+                        <a:srgbClr val="D8DEE6"/>
+                      </a:solidFill>
+                      <a:prstDash val="solid"/>
+                      <a:round/>
+                      <a:headEnd type="none" w="med" len="med"/>
+                      <a:tailEnd type="none" w="med" len="med"/>
+                    </a:lnT>
+                    <a:lnB w="9525" cap="flat" cmpd="sng" algn="ctr">
+                      <a:solidFill>
+                        <a:srgbClr val="D8DEE6"/>
+                      </a:solidFill>
+                      <a:prstDash val="solid"/>
+                      <a:round/>
+                      <a:headEnd type="none" w="med" len="med"/>
+                      <a:tailEnd type="none" w="med" len="med"/>
+                    </a:lnB>
+                    <a:solidFill>
+                      <a:srgbClr val="FFFFFF"/>
+                    </a:solidFill>
+                  </a:tcPr>
+                </a:tc>
+                <a:tc>
+                  <a:txBody>
+                    <a:bodyPr/>
+                    <a:lstStyle/>
+                    <a:p>
+                      <a:pPr algn="ctr" indent="0" marL="0">
+                        <a:buNone/>
+                      </a:pPr>
+                      <a:r>
+                        <a:rPr lang="en-US" sz="1300" dirty="0">
+                          <a:solidFill>
+                            <a:srgbClr val="1F2328"/>
+                          </a:solidFill>
+                          <a:latin typeface="Arial" pitchFamily="34" charset="0"/>
+                          <a:ea typeface="Arial" pitchFamily="34" charset="-122"/>
+                          <a:cs typeface="Arial" pitchFamily="34" charset="-120"/>
+                        </a:rPr>
+                        <a:t>L10:F244</a:t>
+                      </a:r>
+                      <a:endParaRPr lang="en-US" sz="1300" dirty="0">
+                        <a:latin typeface="Arial" charset="0"/>
+                        <a:ea typeface="Arial" charset="0"/>
+                        <a:cs typeface="Arial" charset="0"/>
+                      </a:endParaRPr>
+                    </a:p>
+                  </a:txBody>
+                  <a:tcPr marL="73152" marR="73152" marT="36576" marB="36576" anchor="ctr">
+                    <a:lnL w="9525" cap="flat" cmpd="sng" algn="ctr">
+                      <a:solidFill>
+                        <a:srgbClr val="D8DEE6"/>
+                      </a:solidFill>
+                      <a:prstDash val="solid"/>
+                      <a:round/>
+                      <a:headEnd type="none" w="med" len="med"/>
+                      <a:tailEnd type="none" w="med" len="med"/>
+                    </a:lnL>
+                    <a:lnR w="9525" cap="flat" cmpd="sng" algn="ctr">
+                      <a:solidFill>
+                        <a:srgbClr val="D8DEE6"/>
+                      </a:solidFill>
+                      <a:prstDash val="solid"/>
+                      <a:round/>
+                      <a:headEnd type="none" w="med" len="med"/>
+                      <a:tailEnd type="none" w="med" len="med"/>
+                    </a:lnR>
+                    <a:lnT w="9525" cap="flat" cmpd="sng" algn="ctr">
+                      <a:solidFill>
+                        <a:srgbClr val="D8DEE6"/>
+                      </a:solidFill>
+                      <a:prstDash val="solid"/>
+                      <a:round/>
+                      <a:headEnd type="none" w="med" len="med"/>
+                      <a:tailEnd type="none" w="med" len="med"/>
+                    </a:lnT>
+                    <a:lnB w="9525" cap="flat" cmpd="sng" algn="ctr">
+                      <a:solidFill>
+                        <a:srgbClr val="D8DEE6"/>
+                      </a:solidFill>
+                      <a:prstDash val="solid"/>
+                      <a:round/>
+                      <a:headEnd type="none" w="med" len="med"/>
+                      <a:tailEnd type="none" w="med" len="med"/>
+                    </a:lnB>
+                    <a:solidFill>
+                      <a:srgbClr val="E6F2F1"/>
+                    </a:solidFill>
+                  </a:tcPr>
+                </a:tc>
+                <a:tc>
+                  <a:txBody>
+                    <a:bodyPr/>
+                    <a:lstStyle/>
+                    <a:p>
+                      <a:pPr algn="ctr" indent="0" marL="0">
+                        <a:buNone/>
+                      </a:pPr>
+                      <a:r>
+                        <a:rPr lang="en-US" sz="1300" dirty="0">
+                          <a:solidFill>
+                            <a:srgbClr val="1F2328"/>
+                          </a:solidFill>
+                          <a:latin typeface="Arial" pitchFamily="34" charset="0"/>
+                          <a:ea typeface="Arial" pitchFamily="34" charset="-122"/>
+                          <a:cs typeface="Arial" pitchFamily="34" charset="-120"/>
+                        </a:rPr>
+                        <a:t>L15:F1109</a:t>
+                      </a:r>
+                      <a:endParaRPr lang="en-US" sz="1300" dirty="0">
+                        <a:latin typeface="Arial" charset="0"/>
+                        <a:ea typeface="Arial" charset="0"/>
+                        <a:cs typeface="Arial" charset="0"/>
+                      </a:endParaRPr>
+                    </a:p>
+                  </a:txBody>
+                  <a:tcPr marL="73152" marR="73152" marT="36576" marB="36576" anchor="ctr">
+                    <a:lnL w="9525" cap="flat" cmpd="sng" algn="ctr">
+                      <a:solidFill>
+                        <a:srgbClr val="D8DEE6"/>
+                      </a:solidFill>
+                      <a:prstDash val="solid"/>
+                      <a:round/>
+                      <a:headEnd type="none" w="med" len="med"/>
+                      <a:tailEnd type="none" w="med" len="med"/>
+                    </a:lnL>
+                    <a:lnR w="9525" cap="flat" cmpd="sng" algn="ctr">
+                      <a:solidFill>
+                        <a:srgbClr val="D8DEE6"/>
+                      </a:solidFill>
+                      <a:prstDash val="solid"/>
+                      <a:round/>
+                      <a:headEnd type="none" w="med" len="med"/>
+                      <a:tailEnd type="none" w="med" len="med"/>
+                    </a:lnR>
+                    <a:lnT w="9525" cap="flat" cmpd="sng" algn="ctr">
+                      <a:solidFill>
+                        <a:srgbClr val="D8DEE6"/>
+                      </a:solidFill>
+                      <a:prstDash val="solid"/>
+                      <a:round/>
+                      <a:headEnd type="none" w="med" len="med"/>
+                      <a:tailEnd type="none" w="med" len="med"/>
+                    </a:lnT>
+                    <a:lnB w="9525" cap="flat" cmpd="sng" algn="ctr">
+                      <a:solidFill>
+                        <a:srgbClr val="D8DEE6"/>
+                      </a:solidFill>
+                      <a:prstDash val="solid"/>
+                      <a:round/>
+                      <a:headEnd type="none" w="med" len="med"/>
+                      <a:tailEnd type="none" w="med" len="med"/>
+                    </a:lnB>
+                    <a:solidFill>
+                      <a:srgbClr val="E6F2F1"/>
+                    </a:solidFill>
+                  </a:tcPr>
+                </a:tc>
+              </a:tr>
+              <a:tr h="384048">
+                <a:tc>
+                  <a:txBody>
+                    <a:bodyPr/>
+                    <a:lstStyle/>
+                    <a:p>
+                      <a:pPr algn="ctr" indent="0" marL="0">
+                        <a:buNone/>
+                      </a:pPr>
+                      <a:r>
+                        <a:rPr lang="en-US" sz="1300" dirty="0">
+                          <a:solidFill>
+                            <a:srgbClr val="5F6B7A"/>
+                          </a:solidFill>
+                          <a:latin typeface="Arial" pitchFamily="34" charset="0"/>
+                          <a:ea typeface="Arial" pitchFamily="34" charset="-122"/>
+                          <a:cs typeface="Arial" pitchFamily="34" charset="-120"/>
+                        </a:rPr>
+                        <a:t>4</a:t>
+                      </a:r>
+                      <a:endParaRPr lang="en-US" sz="1300" dirty="0">
+                        <a:latin typeface="Arial" charset="0"/>
+                        <a:ea typeface="Arial" charset="0"/>
+                        <a:cs typeface="Arial" charset="0"/>
+                      </a:endParaRPr>
+                    </a:p>
+                  </a:txBody>
+                  <a:tcPr marL="73152" marR="73152" marT="36576" marB="36576" anchor="ctr">
+                    <a:lnL w="9525" cap="flat" cmpd="sng" algn="ctr">
+                      <a:solidFill>
+                        <a:srgbClr val="D8DEE6"/>
+                      </a:solidFill>
+                      <a:prstDash val="solid"/>
+                      <a:round/>
+                      <a:headEnd type="none" w="med" len="med"/>
+                      <a:tailEnd type="none" w="med" len="med"/>
+                    </a:lnL>
+                    <a:lnR w="9525" cap="flat" cmpd="sng" algn="ctr">
+                      <a:solidFill>
+                        <a:srgbClr val="D8DEE6"/>
+                      </a:solidFill>
+                      <a:prstDash val="solid"/>
+                      <a:round/>
+                      <a:headEnd type="none" w="med" len="med"/>
+                      <a:tailEnd type="none" w="med" len="med"/>
+                    </a:lnR>
+                    <a:lnT w="9525" cap="flat" cmpd="sng" algn="ctr">
+                      <a:solidFill>
+                        <a:srgbClr val="D8DEE6"/>
+                      </a:solidFill>
+                      <a:prstDash val="solid"/>
+                      <a:round/>
+                      <a:headEnd type="none" w="med" len="med"/>
+                      <a:tailEnd type="none" w="med" len="med"/>
+                    </a:lnT>
+                    <a:lnB w="9525" cap="flat" cmpd="sng" algn="ctr">
+                      <a:solidFill>
+                        <a:srgbClr val="D8DEE6"/>
+                      </a:solidFill>
+                      <a:prstDash val="solid"/>
+                      <a:round/>
+                      <a:headEnd type="none" w="med" len="med"/>
+                      <a:tailEnd type="none" w="med" len="med"/>
+                    </a:lnB>
+                    <a:solidFill>
+                      <a:srgbClr val="FFFFFF"/>
+                    </a:solidFill>
+                  </a:tcPr>
+                </a:tc>
+                <a:tc>
+                  <a:txBody>
+                    <a:bodyPr/>
+                    <a:lstStyle/>
+                    <a:p>
+                      <a:pPr algn="ctr" indent="0" marL="0">
+                        <a:buNone/>
+                      </a:pPr>
+                      <a:r>
+                        <a:rPr lang="en-US" sz="1300" b="1" dirty="0">
+                          <a:solidFill>
+                            <a:srgbClr val="FFFFFF"/>
+                          </a:solidFill>
+                          <a:latin typeface="Arial" pitchFamily="34" charset="0"/>
+                          <a:ea typeface="Arial" pitchFamily="34" charset="-122"/>
+                          <a:cs typeface="Arial" pitchFamily="34" charset="-120"/>
+                        </a:rPr>
+                        <a:t>L13:F3270</a:t>
+                      </a:r>
+                      <a:endParaRPr lang="en-US" sz="1300" dirty="0">
+                        <a:latin typeface="Arial" charset="0"/>
+                        <a:ea typeface="Arial" charset="0"/>
+                        <a:cs typeface="Arial" charset="0"/>
+                      </a:endParaRPr>
+                    </a:p>
+                  </a:txBody>
+                  <a:tcPr marL="73152" marR="73152" marT="36576" marB="36576" anchor="ctr">
+                    <a:lnL w="9525" cap="flat" cmpd="sng" algn="ctr">
+                      <a:solidFill>
+                        <a:srgbClr val="D8DEE6"/>
+                      </a:solidFill>
+                      <a:prstDash val="solid"/>
+                      <a:round/>
+                      <a:headEnd type="none" w="med" len="med"/>
+                      <a:tailEnd type="none" w="med" len="med"/>
+                    </a:lnL>
+                    <a:lnR w="9525" cap="flat" cmpd="sng" algn="ctr">
+                      <a:solidFill>
+                        <a:srgbClr val="D8DEE6"/>
+                      </a:solidFill>
+                      <a:prstDash val="solid"/>
+                      <a:round/>
+                      <a:headEnd type="none" w="med" len="med"/>
+                      <a:tailEnd type="none" w="med" len="med"/>
+                    </a:lnR>
+                    <a:lnT w="9525" cap="flat" cmpd="sng" algn="ctr">
+                      <a:solidFill>
+                        <a:srgbClr val="D8DEE6"/>
+                      </a:solidFill>
+                      <a:prstDash val="solid"/>
+                      <a:round/>
+                      <a:headEnd type="none" w="med" len="med"/>
+                      <a:tailEnd type="none" w="med" len="med"/>
+                    </a:lnT>
+                    <a:lnB w="9525" cap="flat" cmpd="sng" algn="ctr">
+                      <a:solidFill>
+                        <a:srgbClr val="D8DEE6"/>
+                      </a:solidFill>
+                      <a:prstDash val="solid"/>
+                      <a:round/>
+                      <a:headEnd type="none" w="med" len="med"/>
+                      <a:tailEnd type="none" w="med" len="med"/>
+                    </a:lnB>
+                    <a:solidFill>
+                      <a:srgbClr val="0F766E"/>
+                    </a:solidFill>
+                  </a:tcPr>
+                </a:tc>
+                <a:tc>
+                  <a:txBody>
+                    <a:bodyPr/>
+                    <a:lstStyle/>
+                    <a:p>
+                      <a:pPr algn="ctr" indent="0" marL="0">
+                        <a:buNone/>
+                      </a:pPr>
+                      <a:r>
+                        <a:rPr lang="en-US" sz="1300" dirty="0">
+                          <a:solidFill>
+                            <a:srgbClr val="1F2328"/>
+                          </a:solidFill>
+                          <a:latin typeface="Arial" pitchFamily="34" charset="0"/>
+                          <a:ea typeface="Arial" pitchFamily="34" charset="-122"/>
+                          <a:cs typeface="Arial" pitchFamily="34" charset="-120"/>
+                        </a:rPr>
+                        <a:t>L12:F4580</a:t>
+                      </a:r>
+                      <a:endParaRPr lang="en-US" sz="1300" dirty="0">
+                        <a:latin typeface="Arial" charset="0"/>
+                        <a:ea typeface="Arial" charset="0"/>
+                        <a:cs typeface="Arial" charset="0"/>
+                      </a:endParaRPr>
+                    </a:p>
+                  </a:txBody>
+                  <a:tcPr marL="73152" marR="73152" marT="36576" marB="36576" anchor="ctr">
+                    <a:lnL w="9525" cap="flat" cmpd="sng" algn="ctr">
+                      <a:solidFill>
+                        <a:srgbClr val="D8DEE6"/>
+                      </a:solidFill>
+                      <a:prstDash val="solid"/>
+                      <a:round/>
+                      <a:headEnd type="none" w="med" len="med"/>
+                      <a:tailEnd type="none" w="med" len="med"/>
+                    </a:lnL>
+                    <a:lnR w="9525" cap="flat" cmpd="sng" algn="ctr">
+                      <a:solidFill>
+                        <a:srgbClr val="D8DEE6"/>
+                      </a:solidFill>
+                      <a:prstDash val="solid"/>
+                      <a:round/>
+                      <a:headEnd type="none" w="med" len="med"/>
+                      <a:tailEnd type="none" w="med" len="med"/>
+                    </a:lnR>
+                    <a:lnT w="9525" cap="flat" cmpd="sng" algn="ctr">
+                      <a:solidFill>
+                        <a:srgbClr val="D8DEE6"/>
+                      </a:solidFill>
+                      <a:prstDash val="solid"/>
+                      <a:round/>
+                      <a:headEnd type="none" w="med" len="med"/>
+                      <a:tailEnd type="none" w="med" len="med"/>
+                    </a:lnT>
+                    <a:lnB w="9525" cap="flat" cmpd="sng" algn="ctr">
+                      <a:solidFill>
+                        <a:srgbClr val="D8DEE6"/>
+                      </a:solidFill>
+                      <a:prstDash val="solid"/>
+                      <a:round/>
+                      <a:headEnd type="none" w="med" len="med"/>
+                      <a:tailEnd type="none" w="med" len="med"/>
+                    </a:lnB>
+                    <a:solidFill>
+                      <a:srgbClr val="E6F2F1"/>
+                    </a:solidFill>
+                  </a:tcPr>
+                </a:tc>
+              </a:tr>
+              <a:tr h="384048">
+                <a:tc>
+                  <a:txBody>
+                    <a:bodyPr/>
+                    <a:lstStyle/>
+                    <a:p>
+                      <a:pPr algn="ctr" indent="0" marL="0">
+                        <a:buNone/>
+                      </a:pPr>
+                      <a:r>
+                        <a:rPr lang="en-US" sz="1300" dirty="0">
+                          <a:solidFill>
+                            <a:srgbClr val="5F6B7A"/>
+                          </a:solidFill>
+                          <a:latin typeface="Arial" pitchFamily="34" charset="0"/>
+                          <a:ea typeface="Arial" pitchFamily="34" charset="-122"/>
+                          <a:cs typeface="Arial" pitchFamily="34" charset="-120"/>
+                        </a:rPr>
+                        <a:t>5</a:t>
+                      </a:r>
+                      <a:endParaRPr lang="en-US" sz="1300" dirty="0">
+                        <a:latin typeface="Arial" charset="0"/>
+                        <a:ea typeface="Arial" charset="0"/>
+                        <a:cs typeface="Arial" charset="0"/>
+                      </a:endParaRPr>
+                    </a:p>
+                  </a:txBody>
+                  <a:tcPr marL="73152" marR="73152" marT="36576" marB="36576" anchor="ctr">
+                    <a:lnL w="9525" cap="flat" cmpd="sng" algn="ctr">
+                      <a:solidFill>
+                        <a:srgbClr val="D8DEE6"/>
+                      </a:solidFill>
+                      <a:prstDash val="solid"/>
+                      <a:round/>
+                      <a:headEnd type="none" w="med" len="med"/>
+                      <a:tailEnd type="none" w="med" len="med"/>
+                    </a:lnL>
+                    <a:lnR w="9525" cap="flat" cmpd="sng" algn="ctr">
+                      <a:solidFill>
+                        <a:srgbClr val="D8DEE6"/>
+                      </a:solidFill>
+                      <a:prstDash val="solid"/>
+                      <a:round/>
+                      <a:headEnd type="none" w="med" len="med"/>
+                      <a:tailEnd type="none" w="med" len="med"/>
+                    </a:lnR>
+                    <a:lnT w="9525" cap="flat" cmpd="sng" algn="ctr">
+                      <a:solidFill>
+                        <a:srgbClr val="D8DEE6"/>
+                      </a:solidFill>
+                      <a:prstDash val="solid"/>
+                      <a:round/>
+                      <a:headEnd type="none" w="med" len="med"/>
+                      <a:tailEnd type="none" w="med" len="med"/>
+                    </a:lnT>
+                    <a:lnB w="9525" cap="flat" cmpd="sng" algn="ctr">
+                      <a:solidFill>
+                        <a:srgbClr val="D8DEE6"/>
+                      </a:solidFill>
+                      <a:prstDash val="solid"/>
+                      <a:round/>
+                      <a:headEnd type="none" w="med" len="med"/>
+                      <a:tailEnd type="none" w="med" len="med"/>
+                    </a:lnB>
+                    <a:solidFill>
+                      <a:srgbClr val="FFFFFF"/>
+                    </a:solidFill>
+                  </a:tcPr>
+                </a:tc>
+                <a:tc>
+                  <a:txBody>
+                    <a:bodyPr/>
+                    <a:lstStyle/>
+                    <a:p>
+                      <a:pPr algn="ctr" indent="0" marL="0">
+                        <a:buNone/>
+                      </a:pPr>
+                      <a:r>
+                        <a:rPr lang="en-US" sz="1300" dirty="0">
+                          <a:solidFill>
+                            <a:srgbClr val="1F2328"/>
+                          </a:solidFill>
+                          <a:latin typeface="Arial" pitchFamily="34" charset="0"/>
+                          <a:ea typeface="Arial" pitchFamily="34" charset="-122"/>
+                          <a:cs typeface="Arial" pitchFamily="34" charset="-120"/>
+                        </a:rPr>
+                        <a:t>L9:F3183</a:t>
+                      </a:r>
+                      <a:endParaRPr lang="en-US" sz="1300" dirty="0">
+                        <a:latin typeface="Arial" charset="0"/>
+                        <a:ea typeface="Arial" charset="0"/>
+                        <a:cs typeface="Arial" charset="0"/>
+                      </a:endParaRPr>
+                    </a:p>
+                  </a:txBody>
+                  <a:tcPr marL="73152" marR="73152" marT="36576" marB="36576" anchor="ctr">
+                    <a:lnL w="9525" cap="flat" cmpd="sng" algn="ctr">
+                      <a:solidFill>
+                        <a:srgbClr val="D8DEE6"/>
+                      </a:solidFill>
+                      <a:prstDash val="solid"/>
+                      <a:round/>
+                      <a:headEnd type="none" w="med" len="med"/>
+                      <a:tailEnd type="none" w="med" len="med"/>
+                    </a:lnL>
+                    <a:lnR w="9525" cap="flat" cmpd="sng" algn="ctr">
+                      <a:solidFill>
+                        <a:srgbClr val="D8DEE6"/>
+                      </a:solidFill>
+                      <a:prstDash val="solid"/>
+                      <a:round/>
+                      <a:headEnd type="none" w="med" len="med"/>
+                      <a:tailEnd type="none" w="med" len="med"/>
+                    </a:lnR>
+                    <a:lnT w="9525" cap="flat" cmpd="sng" algn="ctr">
+                      <a:solidFill>
+                        <a:srgbClr val="D8DEE6"/>
+                      </a:solidFill>
+                      <a:prstDash val="solid"/>
+                      <a:round/>
+                      <a:headEnd type="none" w="med" len="med"/>
+                      <a:tailEnd type="none" w="med" len="med"/>
+                    </a:lnT>
+                    <a:lnB w="9525" cap="flat" cmpd="sng" algn="ctr">
+                      <a:solidFill>
+                        <a:srgbClr val="D8DEE6"/>
+                      </a:solidFill>
+                      <a:prstDash val="solid"/>
+                      <a:round/>
+                      <a:headEnd type="none" w="med" len="med"/>
+                      <a:tailEnd type="none" w="med" len="med"/>
+                    </a:lnB>
+                    <a:solidFill>
+                      <a:srgbClr val="FFFFFF"/>
+                    </a:solidFill>
+                  </a:tcPr>
+                </a:tc>
+                <a:tc>
+                  <a:txBody>
+                    <a:bodyPr/>
+                    <a:lstStyle/>
+                    <a:p>
+                      <a:pPr algn="ctr" indent="0" marL="0">
+                        <a:buNone/>
+                      </a:pPr>
+                      <a:r>
+                        <a:rPr lang="en-US" sz="1300" dirty="0">
+                          <a:solidFill>
+                            <a:srgbClr val="1F2328"/>
+                          </a:solidFill>
+                          <a:latin typeface="Arial" pitchFamily="34" charset="0"/>
+                          <a:ea typeface="Arial" pitchFamily="34" charset="-122"/>
+                          <a:cs typeface="Arial" pitchFamily="34" charset="-120"/>
+                        </a:rPr>
+                        <a:t>L12:F5880</a:t>
+                      </a:r>
+                      <a:endParaRPr lang="en-US" sz="1300" dirty="0">
+                        <a:latin typeface="Arial" charset="0"/>
+                        <a:ea typeface="Arial" charset="0"/>
+                        <a:cs typeface="Arial" charset="0"/>
+                      </a:endParaRPr>
+                    </a:p>
+                  </a:txBody>
+                  <a:tcPr marL="73152" marR="73152" marT="36576" marB="36576" anchor="ctr">
+                    <a:lnL w="9525" cap="flat" cmpd="sng" algn="ctr">
+                      <a:solidFill>
+                        <a:srgbClr val="D8DEE6"/>
+                      </a:solidFill>
+                      <a:prstDash val="solid"/>
+                      <a:round/>
+                      <a:headEnd type="none" w="med" len="med"/>
+                      <a:tailEnd type="none" w="med" len="med"/>
+                    </a:lnL>
+                    <a:lnR w="9525" cap="flat" cmpd="sng" algn="ctr">
+                      <a:solidFill>
+                        <a:srgbClr val="D8DEE6"/>
+                      </a:solidFill>
+                      <a:prstDash val="solid"/>
+                      <a:round/>
+                      <a:headEnd type="none" w="med" len="med"/>
+                      <a:tailEnd type="none" w="med" len="med"/>
+                    </a:lnR>
+                    <a:lnT w="9525" cap="flat" cmpd="sng" algn="ctr">
+                      <a:solidFill>
+                        <a:srgbClr val="D8DEE6"/>
+                      </a:solidFill>
+                      <a:prstDash val="solid"/>
+                      <a:round/>
+                      <a:headEnd type="none" w="med" len="med"/>
+                      <a:tailEnd type="none" w="med" len="med"/>
+                    </a:lnT>
+                    <a:lnB w="9525" cap="flat" cmpd="sng" algn="ctr">
+                      <a:solidFill>
+                        <a:srgbClr val="D8DEE6"/>
+                      </a:solidFill>
+                      <a:prstDash val="solid"/>
+                      <a:round/>
+                      <a:headEnd type="none" w="med" len="med"/>
+                      <a:tailEnd type="none" w="med" len="med"/>
+                    </a:lnB>
+                    <a:solidFill>
+                      <a:srgbClr val="FFFFFF"/>
+                    </a:solidFill>
+                  </a:tcPr>
+                </a:tc>
+              </a:tr>
+            </a:tbl>
+          </a:graphicData>
+        </a:graphic>
+      </p:graphicFrame>
+      <p:sp>
+        <p:nvSpPr>
+          <p:cNvPr id="14" name="Text 8"/>
+          <p:cNvSpPr/>
+          <p:nvPr/>
+        </p:nvSpPr>
+        <p:spPr>
+          <a:xfrm>
+            <a:off x="8119872" y="4206240"/>
+            <a:ext cx="3520440" cy="320040"/>
+          </a:xfrm>
+          <a:prstGeom prst="rect">
+            <a:avLst/>
+          </a:prstGeom>
+          <a:noFill/>
+          <a:ln/>
+        </p:spPr>
+        <p:txBody>
+          <a:bodyPr wrap="square" lIns="0" tIns="0" rIns="0" bIns="0" rtlCol="0" anchor="ctr"/>
+          <a:lstStyle/>
+          <a:p>
+            <a:pPr algn="ctr" indent="0" marL="0">
+              <a:buNone/>
+            </a:pPr>
+            <a:r>
+              <a:rPr lang="en-US" sz="1400" b="1" dirty="0">
+                <a:solidFill>
+                  <a:srgbClr val="0F766E"/>
+                </a:solidFill>
+                <a:latin typeface="Arial" pitchFamily="34" charset="0"/>
+                <a:ea typeface="Arial" pitchFamily="34" charset="-122"/>
+                <a:cs typeface="Arial" pitchFamily="34" charset="-120"/>
+              </a:rPr>
+              <a:t>4 of 5 shared</a:t>
+            </a:r>
+            <a:endParaRPr lang="en-US" sz="1400" dirty="0"/>
+          </a:p>
+        </p:txBody>
+      </p:sp>
+      <p:sp>
+        <p:nvSpPr>
+          <p:cNvPr id="15" name="Shape 9"/>
+          <p:cNvSpPr/>
+          <p:nvPr/>
+        </p:nvSpPr>
+        <p:spPr>
+          <a:xfrm>
+            <a:off x="548640" y="4681728"/>
+            <a:ext cx="274320" cy="201168"/>
+          </a:xfrm>
+          <a:prstGeom prst="rect">
+            <a:avLst/>
+          </a:prstGeom>
+          <a:solidFill>
+            <a:srgbClr val="0F766E"/>
+          </a:solidFill>
+          <a:ln w="12700">
+            <a:solidFill>
+              <a:srgbClr val="0F766E"/>
+            </a:solidFill>
+            <a:prstDash val="solid"/>
+          </a:ln>
+        </p:spPr>
+      </p:sp>
+      <p:sp>
+        <p:nvSpPr>
+          <p:cNvPr id="16" name="Text 10"/>
+          <p:cNvSpPr/>
+          <p:nvPr/>
+        </p:nvSpPr>
+        <p:spPr>
+          <a:xfrm>
+            <a:off x="914400" y="4645152"/>
+            <a:ext cx="2377440" cy="274320"/>
+          </a:xfrm>
+          <a:prstGeom prst="rect">
+            <a:avLst/>
+          </a:prstGeom>
+          <a:noFill/>
+          <a:ln/>
+        </p:spPr>
+        <p:txBody>
+          <a:bodyPr wrap="square" lIns="0" tIns="0" rIns="0" bIns="0" rtlCol="0" anchor="ctr"/>
           <a:lstStyle/>
           <a:p>
             <a:pPr indent="0" marL="0">
               <a:buNone/>
             </a:pPr>
             <a:r>
-              <a:rPr lang="en-US" sz="1700" b="1" dirty="0">
+              <a:rPr lang="en-US" sz="1200" dirty="0">
                 <a:solidFill>
                   <a:srgbClr val="1F2328"/>
                 </a:solidFill>
@@ -30912,13 +34624,63 @@
                 <a:ea typeface="Arial" pitchFamily="34" charset="-122"/>
                 <a:cs typeface="Arial" pitchFamily="34" charset="-120"/>
               </a:rPr>
-              <a:t>Llama-Guard drops a lot in Arabic; </a:t>
-            </a:r>
+              <a:t>Apple's refusal neuron</a:t>
+            </a:r>
+            <a:endParaRPr lang="en-US" sz="1200" dirty="0"/>
+          </a:p>
+        </p:txBody>
+      </p:sp>
+      <p:sp>
+        <p:nvSpPr>
+          <p:cNvPr id="17" name="Shape 11"/>
+          <p:cNvSpPr/>
+          <p:nvPr/>
+        </p:nvSpPr>
+        <p:spPr>
+          <a:xfrm>
+            <a:off x="3291840" y="4681728"/>
+            <a:ext cx="274320" cy="201168"/>
+          </a:xfrm>
+          <a:prstGeom prst="rect">
+            <a:avLst/>
+          </a:prstGeom>
+          <a:solidFill>
+            <a:srgbClr val="E6F2F1"/>
+          </a:solidFill>
+          <a:ln w="12700">
+            <a:solidFill>
+              <a:srgbClr val="D8DEE6"/>
+            </a:solidFill>
+            <a:prstDash val="solid"/>
+          </a:ln>
+        </p:spPr>
+      </p:sp>
+      <p:sp>
+        <p:nvSpPr>
+          <p:cNvPr id="18" name="Text 12"/>
+          <p:cNvSpPr/>
+          <p:nvPr/>
+        </p:nvSpPr>
+        <p:spPr>
+          <a:xfrm>
+            <a:off x="3657600" y="4645152"/>
+            <a:ext cx="1828800" cy="274320"/>
+          </a:xfrm>
+          <a:prstGeom prst="rect">
+            <a:avLst/>
+          </a:prstGeom>
+          <a:noFill/>
+          <a:ln/>
+        </p:spPr>
+        <p:txBody>
+          <a:bodyPr wrap="square" lIns="0" tIns="0" rIns="0" bIns="0" rtlCol="0" anchor="ctr"/>
+          <a:lstStyle/>
+          <a:p>
             <a:pPr indent="0" marL="0">
               <a:buNone/>
             </a:pPr>
             <a:r>
-              <a:rPr lang="en-US" sz="1700" dirty="0">
+              <a:rPr lang="en-US" sz="1200" dirty="0">
                 <a:solidFill>
                   <a:srgbClr val="1F2328"/>
                 </a:solidFill>
@@ -30926,22 +34688,61 @@
                 <a:ea typeface="Arial" pitchFamily="34" charset="-122"/>
                 <a:cs typeface="Arial" pitchFamily="34" charset="-120"/>
               </a:rPr>
-              <a:t>the neuron barely does.</a:t>
-            </a:r>
-            <a:endParaRPr lang="en-US" sz="1700" dirty="0"/>
-          </a:p>
-        </p:txBody>
-      </p:sp>
-      <p:sp>
-        <p:nvSpPr>
-          <p:cNvPr id="10" name="Shape 6"/>
-          <p:cNvSpPr/>
-          <p:nvPr/>
-        </p:nvSpPr>
-        <p:spPr>
-          <a:xfrm>
-            <a:off x="548640" y="5623560"/>
-            <a:ext cx="11094415" cy="640080"/>
+              <a:t>in both lists</a:t>
+            </a:r>
+            <a:endParaRPr lang="en-US" sz="1200" dirty="0"/>
+          </a:p>
+        </p:txBody>
+      </p:sp>
+      <p:sp>
+        <p:nvSpPr>
+          <p:cNvPr id="19" name="Text 13"/>
+          <p:cNvSpPr/>
+          <p:nvPr/>
+        </p:nvSpPr>
+        <p:spPr>
+          <a:xfrm>
+            <a:off x="5303520" y="4645152"/>
+            <a:ext cx="6309360" cy="274320"/>
+          </a:xfrm>
+          <a:prstGeom prst="rect">
+            <a:avLst/>
+          </a:prstGeom>
+          <a:noFill/>
+          <a:ln/>
+        </p:spPr>
+        <p:txBody>
+          <a:bodyPr wrap="square" lIns="0" tIns="0" rIns="0" bIns="0" rtlCol="0" anchor="ctr"/>
+          <a:lstStyle/>
+          <a:p>
+            <a:pPr indent="0" marL="0">
+              <a:buNone/>
+            </a:pPr>
+            <a:r>
+              <a:rPr lang="en-US" sz="1200" dirty="0">
+                <a:solidFill>
+                  <a:srgbClr val="5F6B7A"/>
+                </a:solidFill>
+                <a:latin typeface="Arial" pitchFamily="34" charset="0"/>
+                <a:ea typeface="Arial" pitchFamily="34" charset="-122"/>
+                <a:cs typeface="Arial" pitchFamily="34" charset="-120"/>
+              </a:rPr>
+              <a:t>Searched over 294,912 (Qwen3-8B), 301,056 (Llama) and 110,592 (Qwen3-1.7B) neurons.</a:t>
+            </a:r>
+            <a:endParaRPr lang="en-US" sz="1200" dirty="0"/>
+          </a:p>
+        </p:txBody>
+      </p:sp>
+      <p:sp>
+        <p:nvSpPr>
+          <p:cNvPr id="20" name="Shape 14"/>
+          <p:cNvSpPr/>
+          <p:nvPr/>
+        </p:nvSpPr>
+        <p:spPr>
+          <a:xfrm>
+            <a:off x="548640" y="5166360"/>
+            <a:ext cx="11094415" cy="685800"/>
           </a:xfrm>
           <a:prstGeom prst="rect">
             <a:avLst/>
@@ -30959,14 +34760,14 @@
       </p:sp>
       <p:sp>
         <p:nvSpPr>
-          <p:cNvPr id="11" name="Shape 7"/>
-          <p:cNvSpPr/>
-          <p:nvPr/>
-        </p:nvSpPr>
-        <p:spPr>
-          <a:xfrm>
-            <a:off x="548640" y="5623560"/>
-            <a:ext cx="73152" cy="640080"/>
+          <p:cNvPr id="21" name="Shape 15"/>
+          <p:cNvSpPr/>
+          <p:nvPr/>
+        </p:nvSpPr>
+        <p:spPr>
+          <a:xfrm>
+            <a:off x="548640" y="5166360"/>
+            <a:ext cx="73152" cy="685800"/>
           </a:xfrm>
           <a:prstGeom prst="rect">
             <a:avLst/>
@@ -30984,14 +34785,14 @@
       </p:sp>
       <p:sp>
         <p:nvSpPr>
-          <p:cNvPr id="12" name="Text 8"/>
-          <p:cNvSpPr/>
-          <p:nvPr/>
-        </p:nvSpPr>
-        <p:spPr>
-          <a:xfrm>
-            <a:off x="822960" y="5623560"/>
-            <a:ext cx="10728655" cy="640080"/>
+          <p:cNvPr id="22" name="Text 16"/>
+          <p:cNvSpPr/>
+          <p:nvPr/>
+        </p:nvSpPr>
+        <p:spPr>
+          <a:xfrm>
+            <a:off x="822960" y="5166360"/>
+            <a:ext cx="10728655" cy="685800"/>
           </a:xfrm>
           <a:prstGeom prst="rect">
             <a:avLst/>
@@ -31007,7 +34808,7 @@
               <a:buNone/>
             </a:pPr>
             <a:r>
-              <a:rPr lang="en-US" sz="1700" b="1" dirty="0">
+              <a:rPr lang="en-US" sz="1500" b="1" dirty="0">
                 <a:solidFill>
                   <a:srgbClr val="1F2328"/>
                 </a:solidFill>
@@ -31015,9 +34816,23 @@
                 <a:ea typeface="Arial" pitchFamily="34" charset="-122"/>
                 <a:cs typeface="Arial" pitchFamily="34" charset="-120"/>
               </a:rPr>
-              <a:t>In Arabic, one neuron (0.956) is a better harmful-prompt filter than Llama-Guard-3 (0.910).</a:t>
-            </a:r>
-            <a:endParaRPr lang="en-US" sz="1700" dirty="0"/>
+              <a:t>Largely the same refusal neurons come out in both languages. </a:t>
+            </a:r>
+            <a:pPr indent="0" marL="0">
+              <a:buNone/>
+            </a:pPr>
+            <a:r>
+              <a:rPr lang="en-US" sz="1500" dirty="0">
+                <a:solidFill>
+                  <a:srgbClr val="1F2328"/>
+                </a:solidFill>
+                <a:latin typeface="Arial" pitchFamily="34" charset="0"/>
+                <a:ea typeface="Arial" pitchFamily="34" charset="-122"/>
+                <a:cs typeface="Arial" pitchFamily="34" charset="-120"/>
+              </a:rPr>
+              <a:t>Apple's neuron is in both top-5 lists for all three models, and is #1 in Arabic for Llama and Qwen3-1.7B.</a:t>
+            </a:r>
+            <a:endParaRPr lang="en-US" sz="1500" dirty="0"/>
           </a:p>
         </p:txBody>
       </p:sp>
@@ -31061,6 +34876,45 @@
         </p:nvSpPr>
         <p:spPr>
           <a:xfrm>
+            <a:off x="548640" y="292608"/>
+            <a:ext cx="7315200" cy="274320"/>
+          </a:xfrm>
+          <a:prstGeom prst="rect">
+            <a:avLst/>
+          </a:prstGeom>
+          <a:noFill/>
+          <a:ln/>
+        </p:spPr>
+        <p:txBody>
+          <a:bodyPr wrap="square" lIns="0" tIns="0" rIns="0" bIns="0" rtlCol="0" anchor="ctr"/>
+          <a:lstStyle/>
+          <a:p>
+            <a:pPr indent="0" marL="0">
+              <a:buNone/>
+            </a:pPr>
+            <a:r>
+              <a:rPr lang="en-US" sz="1100" b="1" spc="150" kern="0" dirty="0">
+                <a:solidFill>
+                  <a:srgbClr val="B45309"/>
+                </a:solidFill>
+                <a:latin typeface="Arial" pitchFamily="34" charset="0"/>
+                <a:ea typeface="Arial" pitchFamily="34" charset="-122"/>
+                <a:cs typeface="Arial" pitchFamily="34" charset="-120"/>
+              </a:rPr>
+              <a:t>OUR EXTENSION: ARABIC</a:t>
+            </a:r>
+            <a:endParaRPr lang="en-US" sz="1100" dirty="0"/>
+          </a:p>
+        </p:txBody>
+      </p:sp>
+      <p:sp>
+        <p:nvSpPr>
+          <p:cNvPr id="3" name="Text 1"/>
+          <p:cNvSpPr/>
+          <p:nvPr/>
+        </p:nvSpPr>
+        <p:spPr>
+          <a:xfrm>
             <a:off x="548640" y="566928"/>
             <a:ext cx="11094415" cy="685800"/>
           </a:xfrm>
@@ -31086,7 +34940,7 @@
                 <a:ea typeface="Arial" pitchFamily="34" charset="-122"/>
                 <a:cs typeface="Arial" pitchFamily="34" charset="-120"/>
               </a:rPr>
-              <a:t>Caveats</a:t>
+              <a:t>Arabic C: the neuron as an Arabic safety filter</a:t>
             </a:r>
             <a:endParaRPr lang="en-US" sz="2800" dirty="0"/>
           </a:p>
@@ -31094,7 +34948,7 @@
       </p:sp>
       <p:sp>
         <p:nvSpPr>
-          <p:cNvPr id="3" name="Text 1"/>
+          <p:cNvPr id="4" name="Text 2"/>
           <p:cNvSpPr/>
           <p:nvPr/>
         </p:nvSpPr>
@@ -31131,16 +34985,32 @@
           </a:p>
         </p:txBody>
       </p:sp>
-      <p:sp>
-        <p:nvSpPr>
-          <p:cNvPr id="5" name="Text 2"/>
-          <p:cNvSpPr/>
-          <p:nvPr/>
-        </p:nvSpPr>
-        <p:spPr>
-          <a:xfrm>
-            <a:off x="548640" y="1554480"/>
-            <a:ext cx="11094415" cy="4114800"/>
+      <p:graphicFrame>
+        <p:nvGraphicFramePr>
+          <p:cNvPr id="6" name="Chart 0" descr=""/>
+          <p:cNvGraphicFramePr/>
+          <p:nvPr/>
+        </p:nvGraphicFramePr>
+        <p:xfrm>
+          <a:off x="548640" y="1371600"/>
+          <a:ext cx="6675120" cy="4023360"/>
+        </p:xfrm>
+        <a:graphic xmlns:a="http://schemas.openxmlformats.org/drawingml/2006/main">
+          <a:graphicData uri="http://schemas.openxmlformats.org/drawingml/2006/chart">
+            <c:chart xmlns:c="http://schemas.openxmlformats.org/drawingml/2006/chart" r:id="rId1"/>
+          </a:graphicData>
+        </a:graphic>
+      </p:graphicFrame>
+      <p:sp>
+        <p:nvSpPr>
+          <p:cNvPr id="7" name="Text 3"/>
+          <p:cNvSpPr/>
+          <p:nvPr/>
+        </p:nvSpPr>
+        <p:spPr>
+          <a:xfrm>
+            <a:off x="7589520" y="1645920"/>
+            <a:ext cx="4023360" cy="822960"/>
           </a:xfrm>
           <a:prstGeom prst="rect">
             <a:avLst/>
@@ -31152,15 +35022,103 @@
           <a:bodyPr wrap="square" lIns="0" tIns="0" rIns="0" bIns="0" rtlCol="0" anchor="t"/>
           <a:lstStyle/>
           <a:p>
-            <a:pPr marL="228600" indent="-228600">
-              <a:spcAft>
-                <a:spcPts val="800"/>
-              </a:spcAft>
-              <a:buSzPct val="100000"/>
-              <a:buChar char="•"/>
-            </a:pPr>
-            <a:r>
-              <a:rPr lang="en-US" sz="1800" dirty="0">
+            <a:pPr indent="0" marL="0">
+              <a:buNone/>
+            </a:pPr>
+            <a:r>
+              <a:rPr lang="en-US" sz="1400" b="1" dirty="0">
+                <a:solidFill>
+                  <a:srgbClr val="5F6B7A"/>
+                </a:solidFill>
+                <a:latin typeface="Arial" pitchFamily="34" charset="0"/>
+                <a:ea typeface="Arial" pitchFamily="34" charset="-122"/>
+                <a:cs typeface="Arial" pitchFamily="34" charset="-120"/>
+              </a:rPr>
+              <a:t>AUROC: </a:t>
+            </a:r>
+            <a:pPr indent="0" marL="0">
+              <a:buNone/>
+            </a:pPr>
+            <a:r>
+              <a:rPr lang="en-US" sz="1400" dirty="0">
+                <a:solidFill>
+                  <a:srgbClr val="5F6B7A"/>
+                </a:solidFill>
+                <a:latin typeface="Arial" pitchFamily="34" charset="0"/>
+                <a:ea typeface="Arial" pitchFamily="34" charset="-122"/>
+                <a:cs typeface="Arial" pitchFamily="34" charset="-120"/>
+              </a:rPr>
+              <a:t>1.0 = perfect separation of harmful from harmless, 0.5 = coin flip.</a:t>
+            </a:r>
+            <a:endParaRPr lang="en-US" sz="1400" dirty="0"/>
+          </a:p>
+        </p:txBody>
+      </p:sp>
+      <p:sp>
+        <p:nvSpPr>
+          <p:cNvPr id="8" name="Text 4"/>
+          <p:cNvSpPr/>
+          <p:nvPr/>
+        </p:nvSpPr>
+        <p:spPr>
+          <a:xfrm>
+            <a:off x="7589520" y="2560320"/>
+            <a:ext cx="4023360" cy="822960"/>
+          </a:xfrm>
+          <a:prstGeom prst="rect">
+            <a:avLst/>
+          </a:prstGeom>
+          <a:noFill/>
+          <a:ln/>
+        </p:spPr>
+        <p:txBody>
+          <a:bodyPr wrap="square" lIns="0" tIns="0" rIns="0" bIns="0" rtlCol="0" anchor="t"/>
+          <a:lstStyle/>
+          <a:p>
+            <a:pPr indent="0" marL="0">
+              <a:buNone/>
+            </a:pPr>
+            <a:r>
+              <a:rPr lang="en-US" sz="1400" dirty="0">
+                <a:solidFill>
+                  <a:srgbClr val="5F6B7A"/>
+                </a:solidFill>
+                <a:latin typeface="Arial" pitchFamily="34" charset="0"/>
+                <a:ea typeface="Arial" pitchFamily="34" charset="-122"/>
+                <a:cs typeface="Arial" pitchFamily="34" charset="-120"/>
+              </a:rPr>
+              <a:t>100 harmful MultiJail prompts vs 100 normal Aya prompts, in each language.</a:t>
+            </a:r>
+            <a:endParaRPr lang="en-US" sz="1400" dirty="0"/>
+          </a:p>
+        </p:txBody>
+      </p:sp>
+      <p:sp>
+        <p:nvSpPr>
+          <p:cNvPr id="9" name="Text 5"/>
+          <p:cNvSpPr/>
+          <p:nvPr/>
+        </p:nvSpPr>
+        <p:spPr>
+          <a:xfrm>
+            <a:off x="7589520" y="3474720"/>
+            <a:ext cx="4023360" cy="914400"/>
+          </a:xfrm>
+          <a:prstGeom prst="rect">
+            <a:avLst/>
+          </a:prstGeom>
+          <a:noFill/>
+          <a:ln/>
+        </p:spPr>
+        <p:txBody>
+          <a:bodyPr wrap="square" lIns="0" tIns="0" rIns="0" bIns="0" rtlCol="0" anchor="t"/>
+          <a:lstStyle/>
+          <a:p>
+            <a:pPr indent="0" marL="0">
+              <a:buNone/>
+            </a:pPr>
+            <a:r>
+              <a:rPr lang="en-US" sz="1700" b="1" dirty="0">
                 <a:solidFill>
                   <a:srgbClr val="1F2328"/>
                 </a:solidFill>
@@ -31168,20 +35126,13 @@
                 <a:ea typeface="Arial" pitchFamily="34" charset="-122"/>
                 <a:cs typeface="Arial" pitchFamily="34" charset="-120"/>
               </a:rPr>
-              <a:t>One judge only (Llama-Guard-3): it doesn't check that answers make sense, and it doesn't officially support Arabic.</a:t>
-            </a:r>
-            <a:endParaRPr lang="en-US" sz="1800" dirty="0"/>
-          </a:p>
-          <a:p>
-            <a:pPr marL="228600" indent="-228600">
-              <a:spcAft>
-                <a:spcPts val="800"/>
-              </a:spcAft>
-              <a:buSzPct val="100000"/>
-              <a:buChar char="•"/>
-            </a:pPr>
-            <a:r>
-              <a:rPr lang="en-US" sz="1800" dirty="0">
+              <a:t>Llama-Guard drops a lot in Arabic; </a:t>
+            </a:r>
+            <a:pPr indent="0" marL="0">
+              <a:buNone/>
+            </a:pPr>
+            <a:r>
+              <a:rPr lang="en-US" sz="1700" dirty="0">
                 <a:solidFill>
                   <a:srgbClr val="1F2328"/>
                 </a:solidFill>
@@ -31189,20 +35140,88 @@
                 <a:ea typeface="Arial" pitchFamily="34" charset="-122"/>
                 <a:cs typeface="Arial" pitchFamily="34" charset="-120"/>
               </a:rPr>
-              <a:t>Capability is measured on subsets (1,000 MMLU, 250 GSM8K questions).</a:t>
-            </a:r>
-            <a:endParaRPr lang="en-US" sz="1800" dirty="0"/>
-          </a:p>
-          <a:p>
-            <a:pPr marL="228600" indent="-228600">
-              <a:spcAft>
-                <a:spcPts val="800"/>
-              </a:spcAft>
-              <a:buSzPct val="100000"/>
-              <a:buChar char="•"/>
-            </a:pPr>
-            <a:r>
-              <a:rPr lang="en-US" sz="1800" dirty="0">
+              <a:t>the neuron barely does.</a:t>
+            </a:r>
+            <a:endParaRPr lang="en-US" sz="1700" dirty="0"/>
+          </a:p>
+        </p:txBody>
+      </p:sp>
+      <p:sp>
+        <p:nvSpPr>
+          <p:cNvPr id="10" name="Shape 6"/>
+          <p:cNvSpPr/>
+          <p:nvPr/>
+        </p:nvSpPr>
+        <p:spPr>
+          <a:xfrm>
+            <a:off x="548640" y="5623560"/>
+            <a:ext cx="11094415" cy="640080"/>
+          </a:xfrm>
+          <a:prstGeom prst="rect">
+            <a:avLst/>
+          </a:prstGeom>
+          <a:solidFill>
+            <a:srgbClr val="FBF1E6"/>
+          </a:solidFill>
+          <a:ln w="12700">
+            <a:solidFill>
+              <a:srgbClr val="FBF1E6"/>
+            </a:solidFill>
+            <a:prstDash val="solid"/>
+          </a:ln>
+        </p:spPr>
+      </p:sp>
+      <p:sp>
+        <p:nvSpPr>
+          <p:cNvPr id="11" name="Shape 7"/>
+          <p:cNvSpPr/>
+          <p:nvPr/>
+        </p:nvSpPr>
+        <p:spPr>
+          <a:xfrm>
+            <a:off x="548640" y="5623560"/>
+            <a:ext cx="73152" cy="640080"/>
+          </a:xfrm>
+          <a:prstGeom prst="rect">
+            <a:avLst/>
+          </a:prstGeom>
+          <a:solidFill>
+            <a:srgbClr val="B45309"/>
+          </a:solidFill>
+          <a:ln w="12700">
+            <a:solidFill>
+              <a:srgbClr val="B45309"/>
+            </a:solidFill>
+            <a:prstDash val="solid"/>
+          </a:ln>
+        </p:spPr>
+      </p:sp>
+      <p:sp>
+        <p:nvSpPr>
+          <p:cNvPr id="12" name="Text 8"/>
+          <p:cNvSpPr/>
+          <p:nvPr/>
+        </p:nvSpPr>
+        <p:spPr>
+          <a:xfrm>
+            <a:off x="822960" y="5623560"/>
+            <a:ext cx="10728655" cy="640080"/>
+          </a:xfrm>
+          <a:prstGeom prst="rect">
+            <a:avLst/>
+          </a:prstGeom>
+          <a:noFill/>
+          <a:ln/>
+        </p:spPr>
+        <p:txBody>
+          <a:bodyPr wrap="square" lIns="0" tIns="0" rIns="0" bIns="0" rtlCol="0" anchor="ctr"/>
+          <a:lstStyle/>
+          <a:p>
+            <a:pPr indent="0" marL="0">
+              <a:buNone/>
+            </a:pPr>
+            <a:r>
+              <a:rPr lang="en-US" sz="1700" b="1" dirty="0">
                 <a:solidFill>
                   <a:srgbClr val="1F2328"/>
                 </a:solidFill>
@@ -31210,51 +35229,9 @@
                 <a:ea typeface="Arial" pitchFamily="34" charset="-122"/>
                 <a:cs typeface="Arial" pitchFamily="34" charset="-120"/>
               </a:rPr>
-              <a:t>Arabic sets are small (100–128 prompts per side), and some MultiJail prompts are borderline.</a:t>
-            </a:r>
-            <a:endParaRPr lang="en-US" sz="1800" dirty="0"/>
-          </a:p>
-          <a:p>
-            <a:pPr marL="228600" indent="-228600">
-              <a:spcAft>
-                <a:spcPts val="800"/>
-              </a:spcAft>
-              <a:buSzPct val="100000"/>
-              <a:buChar char="•"/>
-            </a:pPr>
-            <a:r>
-              <a:rPr lang="en-US" sz="1800" dirty="0">
-                <a:solidFill>
-                  <a:srgbClr val="1F2328"/>
-                </a:solidFill>
-                <a:latin typeface="Arial" pitchFamily="34" charset="0"/>
-                <a:ea typeface="Arial" pitchFamily="34" charset="-122"/>
-                <a:cs typeface="Arial" pitchFamily="34" charset="-120"/>
-              </a:rPr>
-              <a:t>Qwen3-1.7B: the five candidate neurons are almost tied, so “the” 1.7B neuron is less clear-cut.</a:t>
-            </a:r>
-            <a:endParaRPr lang="en-US" sz="1800" dirty="0"/>
-          </a:p>
-          <a:p>
-            <a:pPr marL="228600" indent="-228600">
-              <a:spcAft>
-                <a:spcPts val="800"/>
-              </a:spcAft>
-              <a:buSzPct val="100000"/>
-              <a:buChar char="•"/>
-            </a:pPr>
-            <a:r>
-              <a:rPr lang="en-US" sz="1800" dirty="0">
-                <a:solidFill>
-                  <a:srgbClr val="1F2328"/>
-                </a:solidFill>
-                <a:latin typeface="Arial" pitchFamily="34" charset="0"/>
-                <a:ea typeface="Arial" pitchFamily="34" charset="-122"/>
-                <a:cs typeface="Arial" pitchFamily="34" charset="-120"/>
-              </a:rPr>
-              <a:t>Not done yet: the jailbreak itself in Arabic (pin the neuron on Arabic prompts, judge the Arabic answers).</a:t>
-            </a:r>
-            <a:endParaRPr lang="en-US" sz="1800" dirty="0"/>
+              <a:t>In Arabic, one neuron (0.956) is a better harmful-prompt filter than Llama-Guard-3 (0.910).</a:t>
+            </a:r>
+            <a:endParaRPr lang="en-US" sz="1700" dirty="0"/>
           </a:p>
         </p:txBody>
       </p:sp>
@@ -31269,6 +35246,243 @@
 <file path=ppt/slides/slide28.xml><?xml version="1.0" encoding="utf-8"?>
 <p:sld xmlns:a="http://schemas.openxmlformats.org/drawingml/2006/main" xmlns:r="http://schemas.openxmlformats.org/officeDocument/2006/relationships" xmlns:p="http://schemas.openxmlformats.org/presentationml/2006/main">
   <p:cSld name="Slide 28">
+    <p:bg>
+      <p:bgPr>
+        <a:solidFill>
+          <a:srgbClr val="FFFFFF"/>
+        </a:solidFill>
+      </p:bgPr>
+    </p:bg>
+    <p:spTree>
+      <p:nvGrpSpPr>
+        <p:cNvPr id="1" name=""/>
+        <p:cNvGrpSpPr/>
+        <p:nvPr/>
+      </p:nvGrpSpPr>
+      <p:grpSpPr>
+        <a:xfrm>
+          <a:off x="0" y="0"/>
+          <a:ext cx="0" cy="0"/>
+          <a:chOff x="0" y="0"/>
+          <a:chExt cx="0" cy="0"/>
+        </a:xfrm>
+      </p:grpSpPr>
+      <p:sp>
+        <p:nvSpPr>
+          <p:cNvPr id="2" name="Text 0"/>
+          <p:cNvSpPr/>
+          <p:nvPr/>
+        </p:nvSpPr>
+        <p:spPr>
+          <a:xfrm>
+            <a:off x="548640" y="566928"/>
+            <a:ext cx="11094415" cy="685800"/>
+          </a:xfrm>
+          <a:prstGeom prst="rect">
+            <a:avLst/>
+          </a:prstGeom>
+          <a:noFill/>
+          <a:ln/>
+        </p:spPr>
+        <p:txBody>
+          <a:bodyPr wrap="square" lIns="0" tIns="0" rIns="0" bIns="0" rtlCol="0" anchor="ctr"/>
+          <a:lstStyle/>
+          <a:p>
+            <a:pPr indent="0" marL="0">
+              <a:buNone/>
+            </a:pPr>
+            <a:r>
+              <a:rPr lang="en-US" sz="2800" b="1" dirty="0">
+                <a:solidFill>
+                  <a:srgbClr val="1F2328"/>
+                </a:solidFill>
+                <a:latin typeface="Arial" pitchFamily="34" charset="0"/>
+                <a:ea typeface="Arial" pitchFamily="34" charset="-122"/>
+                <a:cs typeface="Arial" pitchFamily="34" charset="-120"/>
+              </a:rPr>
+              <a:t>Caveats</a:t>
+            </a:r>
+            <a:endParaRPr lang="en-US" sz="2800" dirty="0"/>
+          </a:p>
+        </p:txBody>
+      </p:sp>
+      <p:sp>
+        <p:nvSpPr>
+          <p:cNvPr id="3" name="Text 1"/>
+          <p:cNvSpPr/>
+          <p:nvPr/>
+        </p:nvSpPr>
+        <p:spPr>
+          <a:xfrm>
+            <a:off x="11094415" y="6400800"/>
+            <a:ext cx="548640" cy="274320"/>
+          </a:xfrm>
+          <a:prstGeom prst="rect">
+            <a:avLst/>
+          </a:prstGeom>
+          <a:noFill/>
+          <a:ln/>
+        </p:spPr>
+        <p:txBody>
+          <a:bodyPr wrap="square" lIns="0" tIns="0" rIns="0" bIns="0" rtlCol="0" anchor="ctr"/>
+          <a:lstStyle/>
+          <a:p>
+            <a:pPr algn="r" indent="0" marL="0">
+              <a:buNone/>
+            </a:pPr>
+            <a:r>
+              <a:rPr lang="en-US" sz="1000" dirty="0">
+                <a:solidFill>
+                  <a:srgbClr val="5F6B7A"/>
+                </a:solidFill>
+                <a:latin typeface="Arial" pitchFamily="34" charset="0"/>
+                <a:ea typeface="Arial" pitchFamily="34" charset="-122"/>
+                <a:cs typeface="Arial" pitchFamily="34" charset="-120"/>
+              </a:rPr>
+              <a:t>28</a:t>
+            </a:r>
+            <a:endParaRPr lang="en-US" sz="1000" dirty="0"/>
+          </a:p>
+        </p:txBody>
+      </p:sp>
+      <p:sp>
+        <p:nvSpPr>
+          <p:cNvPr id="5" name="Text 2"/>
+          <p:cNvSpPr/>
+          <p:nvPr/>
+        </p:nvSpPr>
+        <p:spPr>
+          <a:xfrm>
+            <a:off x="548640" y="1554480"/>
+            <a:ext cx="11094415" cy="4114800"/>
+          </a:xfrm>
+          <a:prstGeom prst="rect">
+            <a:avLst/>
+          </a:prstGeom>
+          <a:noFill/>
+          <a:ln/>
+        </p:spPr>
+        <p:txBody>
+          <a:bodyPr wrap="square" lIns="0" tIns="0" rIns="0" bIns="0" rtlCol="0" anchor="t"/>
+          <a:lstStyle/>
+          <a:p>
+            <a:pPr marL="228600" indent="-228600">
+              <a:spcAft>
+                <a:spcPts val="800"/>
+              </a:spcAft>
+              <a:buSzPct val="100000"/>
+              <a:buChar char="•"/>
+            </a:pPr>
+            <a:r>
+              <a:rPr lang="en-US" sz="1800" dirty="0">
+                <a:solidFill>
+                  <a:srgbClr val="1F2328"/>
+                </a:solidFill>
+                <a:latin typeface="Arial" pitchFamily="34" charset="0"/>
+                <a:ea typeface="Arial" pitchFamily="34" charset="-122"/>
+                <a:cs typeface="Arial" pitchFamily="34" charset="-120"/>
+              </a:rPr>
+              <a:t>One judge only (Llama-Guard-3): it doesn't check that answers make sense, and it doesn't officially support Arabic.</a:t>
+            </a:r>
+            <a:endParaRPr lang="en-US" sz="1800" dirty="0"/>
+          </a:p>
+          <a:p>
+            <a:pPr marL="228600" indent="-228600">
+              <a:spcAft>
+                <a:spcPts val="800"/>
+              </a:spcAft>
+              <a:buSzPct val="100000"/>
+              <a:buChar char="•"/>
+            </a:pPr>
+            <a:r>
+              <a:rPr lang="en-US" sz="1800" dirty="0">
+                <a:solidFill>
+                  <a:srgbClr val="1F2328"/>
+                </a:solidFill>
+                <a:latin typeface="Arial" pitchFamily="34" charset="0"/>
+                <a:ea typeface="Arial" pitchFamily="34" charset="-122"/>
+                <a:cs typeface="Arial" pitchFamily="34" charset="-120"/>
+              </a:rPr>
+              <a:t>Capability is measured on subsets (1,000 MMLU, 250 GSM8K questions).</a:t>
+            </a:r>
+            <a:endParaRPr lang="en-US" sz="1800" dirty="0"/>
+          </a:p>
+          <a:p>
+            <a:pPr marL="228600" indent="-228600">
+              <a:spcAft>
+                <a:spcPts val="800"/>
+              </a:spcAft>
+              <a:buSzPct val="100000"/>
+              <a:buChar char="•"/>
+            </a:pPr>
+            <a:r>
+              <a:rPr lang="en-US" sz="1800" dirty="0">
+                <a:solidFill>
+                  <a:srgbClr val="1F2328"/>
+                </a:solidFill>
+                <a:latin typeface="Arial" pitchFamily="34" charset="0"/>
+                <a:ea typeface="Arial" pitchFamily="34" charset="-122"/>
+                <a:cs typeface="Arial" pitchFamily="34" charset="-120"/>
+              </a:rPr>
+              <a:t>Arabic sets are small (100–128 prompts per side), and some MultiJail prompts are borderline.</a:t>
+            </a:r>
+            <a:endParaRPr lang="en-US" sz="1800" dirty="0"/>
+          </a:p>
+          <a:p>
+            <a:pPr marL="228600" indent="-228600">
+              <a:spcAft>
+                <a:spcPts val="800"/>
+              </a:spcAft>
+              <a:buSzPct val="100000"/>
+              <a:buChar char="•"/>
+            </a:pPr>
+            <a:r>
+              <a:rPr lang="en-US" sz="1800" dirty="0">
+                <a:solidFill>
+                  <a:srgbClr val="1F2328"/>
+                </a:solidFill>
+                <a:latin typeface="Arial" pitchFamily="34" charset="0"/>
+                <a:ea typeface="Arial" pitchFamily="34" charset="-122"/>
+                <a:cs typeface="Arial" pitchFamily="34" charset="-120"/>
+              </a:rPr>
+              <a:t>Qwen3-1.7B: the five candidate neurons are almost tied, so “the” 1.7B neuron is less clear-cut.</a:t>
+            </a:r>
+            <a:endParaRPr lang="en-US" sz="1800" dirty="0"/>
+          </a:p>
+          <a:p>
+            <a:pPr marL="228600" indent="-228600">
+              <a:spcAft>
+                <a:spcPts val="800"/>
+              </a:spcAft>
+              <a:buSzPct val="100000"/>
+              <a:buChar char="•"/>
+            </a:pPr>
+            <a:r>
+              <a:rPr lang="en-US" sz="1800" dirty="0">
+                <a:solidFill>
+                  <a:srgbClr val="1F2328"/>
+                </a:solidFill>
+                <a:latin typeface="Arial" pitchFamily="34" charset="0"/>
+                <a:ea typeface="Arial" pitchFamily="34" charset="-122"/>
+                <a:cs typeface="Arial" pitchFamily="34" charset="-120"/>
+              </a:rPr>
+              <a:t>Not done yet: the jailbreak itself in Arabic (pin the neuron on Arabic prompts, judge the Arabic answers).</a:t>
+            </a:r>
+            <a:endParaRPr lang="en-US" sz="1800" dirty="0"/>
+          </a:p>
+        </p:txBody>
+      </p:sp>
+    </p:spTree>
+  </p:cSld>
+  <p:clrMapOvr>
+    <a:masterClrMapping/>
+  </p:clrMapOvr>
+</p:sld>
+</file>
+
+<file path=ppt/slides/slide29.xml><?xml version="1.0" encoding="utf-8"?>
+<p:sld xmlns:a="http://schemas.openxmlformats.org/drawingml/2006/main" xmlns:r="http://schemas.openxmlformats.org/officeDocument/2006/relationships" xmlns:p="http://schemas.openxmlformats.org/presentationml/2006/main">
+  <p:cSld name="Slide 29">
     <p:bg>
       <p:bgPr>
         <a:solidFill>
@@ -31674,7 +35888,7 @@
                 <a:ea typeface="Arial" pitchFamily="34" charset="-122"/>
                 <a:cs typeface="Arial" pitchFamily="34" charset="-120"/>
               </a:rPr>
-              <a:t>A search run only in Arabic finds it first in all 3 models, and it filters Arabic harmful prompts better than Llama-Guard-3.</a:t>
+              <a:t>Searching with the same prompts in Arabic gives largely the same top-5 neurons, Apple's neuron among them in all 3 models; and it filters Arabic harmful prompts better than Llama-Guard-3.</a:t>
             </a:r>
             <a:endParaRPr lang="en-US" sz="1600" dirty="0"/>
           </a:p>
@@ -31713,531 +35927,9 @@
                 <a:ea typeface="Arial" pitchFamily="34" charset="-122"/>
                 <a:cs typeface="Arial" pitchFamily="34" charset="-120"/>
               </a:rPr>
-              <a:t>28</a:t>
+              <a:t>29</a:t>
             </a:r>
             <a:endParaRPr lang="en-US" sz="1000" dirty="0"/>
-          </a:p>
-        </p:txBody>
-      </p:sp>
-    </p:spTree>
-  </p:cSld>
-  <p:clrMapOvr>
-    <a:masterClrMapping/>
-  </p:clrMapOvr>
-</p:sld>
-</file>
-
-<file path=ppt/slides/slide29.xml><?xml version="1.0" encoding="utf-8"?>
-<p:sld xmlns:a="http://schemas.openxmlformats.org/drawingml/2006/main" xmlns:r="http://schemas.openxmlformats.org/officeDocument/2006/relationships" xmlns:p="http://schemas.openxmlformats.org/presentationml/2006/main">
-  <p:cSld name="Slide 29">
-    <p:bg>
-      <p:bgPr>
-        <a:solidFill>
-          <a:srgbClr val="FFFFFF"/>
-        </a:solidFill>
-      </p:bgPr>
-    </p:bg>
-    <p:spTree>
-      <p:nvGrpSpPr>
-        <p:cNvPr id="1" name=""/>
-        <p:cNvGrpSpPr/>
-        <p:nvPr/>
-      </p:nvGrpSpPr>
-      <p:grpSpPr>
-        <a:xfrm>
-          <a:off x="0" y="0"/>
-          <a:ext cx="0" cy="0"/>
-          <a:chOff x="0" y="0"/>
-          <a:chExt cx="0" cy="0"/>
-        </a:xfrm>
-      </p:grpSpPr>
-      <p:sp>
-        <p:nvSpPr>
-          <p:cNvPr id="2" name="Text 0"/>
-          <p:cNvSpPr/>
-          <p:nvPr/>
-        </p:nvSpPr>
-        <p:spPr>
-          <a:xfrm>
-            <a:off x="548640" y="566928"/>
-            <a:ext cx="11094415" cy="685800"/>
-          </a:xfrm>
-          <a:prstGeom prst="rect">
-            <a:avLst/>
-          </a:prstGeom>
-          <a:noFill/>
-          <a:ln/>
-        </p:spPr>
-        <p:txBody>
-          <a:bodyPr wrap="square" lIns="0" tIns="0" rIns="0" bIns="0" rtlCol="0" anchor="ctr"/>
-          <a:lstStyle/>
-          <a:p>
-            <a:pPr indent="0" marL="0">
-              <a:buNone/>
-            </a:pPr>
-            <a:r>
-              <a:rPr lang="en-US" sz="2800" b="1" dirty="0">
-                <a:solidFill>
-                  <a:srgbClr val="1F2328"/>
-                </a:solidFill>
-                <a:latin typeface="Arial" pitchFamily="34" charset="0"/>
-                <a:ea typeface="Arial" pitchFamily="34" charset="-122"/>
-                <a:cs typeface="Arial" pitchFamily="34" charset="-120"/>
-              </a:rPr>
-              <a:t>Next steps</a:t>
-            </a:r>
-            <a:endParaRPr lang="en-US" sz="2800" dirty="0"/>
-          </a:p>
-        </p:txBody>
-      </p:sp>
-      <p:sp>
-        <p:nvSpPr>
-          <p:cNvPr id="3" name="Text 1"/>
-          <p:cNvSpPr/>
-          <p:nvPr/>
-        </p:nvSpPr>
-        <p:spPr>
-          <a:xfrm>
-            <a:off x="11094415" y="6400800"/>
-            <a:ext cx="548640" cy="274320"/>
-          </a:xfrm>
-          <a:prstGeom prst="rect">
-            <a:avLst/>
-          </a:prstGeom>
-          <a:noFill/>
-          <a:ln/>
-        </p:spPr>
-        <p:txBody>
-          <a:bodyPr wrap="square" lIns="0" tIns="0" rIns="0" bIns="0" rtlCol="0" anchor="ctr"/>
-          <a:lstStyle/>
-          <a:p>
-            <a:pPr algn="r" indent="0" marL="0">
-              <a:buNone/>
-            </a:pPr>
-            <a:r>
-              <a:rPr lang="en-US" sz="1000" dirty="0">
-                <a:solidFill>
-                  <a:srgbClr val="5F6B7A"/>
-                </a:solidFill>
-                <a:latin typeface="Arial" pitchFamily="34" charset="0"/>
-                <a:ea typeface="Arial" pitchFamily="34" charset="-122"/>
-                <a:cs typeface="Arial" pitchFamily="34" charset="-120"/>
-              </a:rPr>
-              <a:t>29</a:t>
-            </a:r>
-            <a:endParaRPr lang="en-US" sz="1000" dirty="0"/>
-          </a:p>
-        </p:txBody>
-      </p:sp>
-      <p:sp>
-        <p:nvSpPr>
-          <p:cNvPr id="5" name="Shape 2"/>
-          <p:cNvSpPr/>
-          <p:nvPr/>
-        </p:nvSpPr>
-        <p:spPr>
-          <a:xfrm>
-            <a:off x="548640" y="1627632"/>
-            <a:ext cx="329184" cy="329184"/>
-          </a:xfrm>
-          <a:prstGeom prst="ellipse">
-            <a:avLst/>
-          </a:prstGeom>
-          <a:solidFill>
-            <a:srgbClr val="0F766E"/>
-          </a:solidFill>
-          <a:ln w="12700">
-            <a:solidFill>
-              <a:srgbClr val="0F766E"/>
-            </a:solidFill>
-            <a:prstDash val="solid"/>
-          </a:ln>
-        </p:spPr>
-      </p:sp>
-      <p:sp>
-        <p:nvSpPr>
-          <p:cNvPr id="6" name="Text 3"/>
-          <p:cNvSpPr/>
-          <p:nvPr/>
-        </p:nvSpPr>
-        <p:spPr>
-          <a:xfrm>
-            <a:off x="548640" y="1627632"/>
-            <a:ext cx="329184" cy="329184"/>
-          </a:xfrm>
-          <a:prstGeom prst="rect">
-            <a:avLst/>
-          </a:prstGeom>
-          <a:noFill/>
-          <a:ln/>
-        </p:spPr>
-        <p:txBody>
-          <a:bodyPr wrap="square" lIns="0" tIns="0" rIns="0" bIns="0" rtlCol="0" anchor="ctr"/>
-          <a:lstStyle/>
-          <a:p>
-            <a:pPr algn="ctr" indent="0" marL="0">
-              <a:buNone/>
-            </a:pPr>
-            <a:r>
-              <a:rPr lang="en-US" sz="1300" b="1" dirty="0">
-                <a:solidFill>
-                  <a:srgbClr val="FFFFFF"/>
-                </a:solidFill>
-                <a:latin typeface="Arial" pitchFamily="34" charset="0"/>
-                <a:ea typeface="Arial" pitchFamily="34" charset="-122"/>
-                <a:cs typeface="Arial" pitchFamily="34" charset="-120"/>
-              </a:rPr>
-              <a:t>1</a:t>
-            </a:r>
-            <a:endParaRPr lang="en-US" sz="1300" dirty="0"/>
-          </a:p>
-        </p:txBody>
-      </p:sp>
-      <p:sp>
-        <p:nvSpPr>
-          <p:cNvPr id="7" name="Text 4"/>
-          <p:cNvSpPr/>
-          <p:nvPr/>
-        </p:nvSpPr>
-        <p:spPr>
-          <a:xfrm>
-            <a:off x="1005840" y="1581912"/>
-            <a:ext cx="10637215" cy="868680"/>
-          </a:xfrm>
-          <a:prstGeom prst="rect">
-            <a:avLst/>
-          </a:prstGeom>
-          <a:noFill/>
-          <a:ln/>
-        </p:spPr>
-        <p:txBody>
-          <a:bodyPr wrap="square" lIns="0" tIns="0" rIns="0" bIns="0" rtlCol="0" anchor="t"/>
-          <a:lstStyle/>
-          <a:p>
-            <a:pPr indent="0" marL="0">
-              <a:buNone/>
-            </a:pPr>
-            <a:r>
-              <a:rPr lang="en-US" sz="1800" dirty="0">
-                <a:solidFill>
-                  <a:srgbClr val="1F2328"/>
-                </a:solidFill>
-                <a:latin typeface="Arial" pitchFamily="34" charset="0"/>
-                <a:ea typeface="Arial" pitchFamily="34" charset="-122"/>
-                <a:cs typeface="Arial" pitchFamily="34" charset="-120"/>
-              </a:rPr>
-              <a:t>Run the jailbreak in Arabic: pin the neuron on Arabic prompts and judge the Arabic answers.</a:t>
-            </a:r>
-            <a:endParaRPr lang="en-US" sz="1800" dirty="0"/>
-          </a:p>
-        </p:txBody>
-      </p:sp>
-      <p:sp>
-        <p:nvSpPr>
-          <p:cNvPr id="8" name="Shape 5"/>
-          <p:cNvSpPr/>
-          <p:nvPr/>
-        </p:nvSpPr>
-        <p:spPr>
-          <a:xfrm>
-            <a:off x="548640" y="2496312"/>
-            <a:ext cx="329184" cy="329184"/>
-          </a:xfrm>
-          <a:prstGeom prst="ellipse">
-            <a:avLst/>
-          </a:prstGeom>
-          <a:solidFill>
-            <a:srgbClr val="0F766E"/>
-          </a:solidFill>
-          <a:ln w="12700">
-            <a:solidFill>
-              <a:srgbClr val="0F766E"/>
-            </a:solidFill>
-            <a:prstDash val="solid"/>
-          </a:ln>
-        </p:spPr>
-      </p:sp>
-      <p:sp>
-        <p:nvSpPr>
-          <p:cNvPr id="9" name="Text 6"/>
-          <p:cNvSpPr/>
-          <p:nvPr/>
-        </p:nvSpPr>
-        <p:spPr>
-          <a:xfrm>
-            <a:off x="548640" y="2496312"/>
-            <a:ext cx="329184" cy="329184"/>
-          </a:xfrm>
-          <a:prstGeom prst="rect">
-            <a:avLst/>
-          </a:prstGeom>
-          <a:noFill/>
-          <a:ln/>
-        </p:spPr>
-        <p:txBody>
-          <a:bodyPr wrap="square" lIns="0" tIns="0" rIns="0" bIns="0" rtlCol="0" anchor="ctr"/>
-          <a:lstStyle/>
-          <a:p>
-            <a:pPr algn="ctr" indent="0" marL="0">
-              <a:buNone/>
-            </a:pPr>
-            <a:r>
-              <a:rPr lang="en-US" sz="1300" b="1" dirty="0">
-                <a:solidFill>
-                  <a:srgbClr val="FFFFFF"/>
-                </a:solidFill>
-                <a:latin typeface="Arial" pitchFamily="34" charset="0"/>
-                <a:ea typeface="Arial" pitchFamily="34" charset="-122"/>
-                <a:cs typeface="Arial" pitchFamily="34" charset="-120"/>
-              </a:rPr>
-              <a:t>2</a:t>
-            </a:r>
-            <a:endParaRPr lang="en-US" sz="1300" dirty="0"/>
-          </a:p>
-        </p:txBody>
-      </p:sp>
-      <p:sp>
-        <p:nvSpPr>
-          <p:cNvPr id="10" name="Text 7"/>
-          <p:cNvSpPr/>
-          <p:nvPr/>
-        </p:nvSpPr>
-        <p:spPr>
-          <a:xfrm>
-            <a:off x="1005840" y="2450592"/>
-            <a:ext cx="10637215" cy="868680"/>
-          </a:xfrm>
-          <a:prstGeom prst="rect">
-            <a:avLst/>
-          </a:prstGeom>
-          <a:noFill/>
-          <a:ln/>
-        </p:spPr>
-        <p:txBody>
-          <a:bodyPr wrap="square" lIns="0" tIns="0" rIns="0" bIns="0" rtlCol="0" anchor="t"/>
-          <a:lstStyle/>
-          <a:p>
-            <a:pPr indent="0" marL="0">
-              <a:buNone/>
-            </a:pPr>
-            <a:r>
-              <a:rPr lang="en-US" sz="1800" dirty="0">
-                <a:solidFill>
-                  <a:srgbClr val="1F2328"/>
-                </a:solidFill>
-                <a:latin typeface="Arial" pitchFamily="34" charset="0"/>
-                <a:ea typeface="Arial" pitchFamily="34" charset="-122"/>
-                <a:cs typeface="Arial" pitchFamily="34" charset="-120"/>
-              </a:rPr>
-              <a:t>Add a free judge that also checks answers make sense (a local LLM with Apple's judge prompt). It settles Experiment 8 on Llama.</a:t>
-            </a:r>
-            <a:endParaRPr lang="en-US" sz="1800" dirty="0"/>
-          </a:p>
-        </p:txBody>
-      </p:sp>
-      <p:sp>
-        <p:nvSpPr>
-          <p:cNvPr id="11" name="Shape 8"/>
-          <p:cNvSpPr/>
-          <p:nvPr/>
-        </p:nvSpPr>
-        <p:spPr>
-          <a:xfrm>
-            <a:off x="548640" y="3364992"/>
-            <a:ext cx="329184" cy="329184"/>
-          </a:xfrm>
-          <a:prstGeom prst="ellipse">
-            <a:avLst/>
-          </a:prstGeom>
-          <a:solidFill>
-            <a:srgbClr val="0F766E"/>
-          </a:solidFill>
-          <a:ln w="12700">
-            <a:solidFill>
-              <a:srgbClr val="0F766E"/>
-            </a:solidFill>
-            <a:prstDash val="solid"/>
-          </a:ln>
-        </p:spPr>
-      </p:sp>
-      <p:sp>
-        <p:nvSpPr>
-          <p:cNvPr id="12" name="Text 9"/>
-          <p:cNvSpPr/>
-          <p:nvPr/>
-        </p:nvSpPr>
-        <p:spPr>
-          <a:xfrm>
-            <a:off x="548640" y="3364992"/>
-            <a:ext cx="329184" cy="329184"/>
-          </a:xfrm>
-          <a:prstGeom prst="rect">
-            <a:avLst/>
-          </a:prstGeom>
-          <a:noFill/>
-          <a:ln/>
-        </p:spPr>
-        <p:txBody>
-          <a:bodyPr wrap="square" lIns="0" tIns="0" rIns="0" bIns="0" rtlCol="0" anchor="ctr"/>
-          <a:lstStyle/>
-          <a:p>
-            <a:pPr algn="ctr" indent="0" marL="0">
-              <a:buNone/>
-            </a:pPr>
-            <a:r>
-              <a:rPr lang="en-US" sz="1300" b="1" dirty="0">
-                <a:solidFill>
-                  <a:srgbClr val="FFFFFF"/>
-                </a:solidFill>
-                <a:latin typeface="Arial" pitchFamily="34" charset="0"/>
-                <a:ea typeface="Arial" pitchFamily="34" charset="-122"/>
-                <a:cs typeface="Arial" pitchFamily="34" charset="-120"/>
-              </a:rPr>
-              <a:t>3</a:t>
-            </a:r>
-            <a:endParaRPr lang="en-US" sz="1300" dirty="0"/>
-          </a:p>
-        </p:txBody>
-      </p:sp>
-      <p:sp>
-        <p:nvSpPr>
-          <p:cNvPr id="13" name="Text 10"/>
-          <p:cNvSpPr/>
-          <p:nvPr/>
-        </p:nvSpPr>
-        <p:spPr>
-          <a:xfrm>
-            <a:off x="1005840" y="3319272"/>
-            <a:ext cx="10637215" cy="868680"/>
-          </a:xfrm>
-          <a:prstGeom prst="rect">
-            <a:avLst/>
-          </a:prstGeom>
-          <a:noFill/>
-          <a:ln/>
-        </p:spPr>
-        <p:txBody>
-          <a:bodyPr wrap="square" lIns="0" tIns="0" rIns="0" bIns="0" rtlCol="0" anchor="t"/>
-          <a:lstStyle/>
-          <a:p>
-            <a:pPr indent="0" marL="0">
-              <a:buNone/>
-            </a:pPr>
-            <a:r>
-              <a:rPr lang="en-US" sz="1800" dirty="0">
-                <a:solidFill>
-                  <a:srgbClr val="1F2328"/>
-                </a:solidFill>
-                <a:latin typeface="Arial" pitchFamily="34" charset="0"/>
-                <a:ea typeface="Arial" pitchFamily="34" charset="-122"/>
-                <a:cs typeface="Arial" pitchFamily="34" charset="-120"/>
-              </a:rPr>
-              <a:t>More languages (high- and low-resource), then images and speech, using models that share a backbone with these.</a:t>
-            </a:r>
-            <a:endParaRPr lang="en-US" sz="1800" dirty="0"/>
-          </a:p>
-        </p:txBody>
-      </p:sp>
-      <p:sp>
-        <p:nvSpPr>
-          <p:cNvPr id="14" name="Shape 11"/>
-          <p:cNvSpPr/>
-          <p:nvPr/>
-        </p:nvSpPr>
-        <p:spPr>
-          <a:xfrm>
-            <a:off x="548640" y="4233672"/>
-            <a:ext cx="329184" cy="329184"/>
-          </a:xfrm>
-          <a:prstGeom prst="ellipse">
-            <a:avLst/>
-          </a:prstGeom>
-          <a:solidFill>
-            <a:srgbClr val="0F766E"/>
-          </a:solidFill>
-          <a:ln w="12700">
-            <a:solidFill>
-              <a:srgbClr val="0F766E"/>
-            </a:solidFill>
-            <a:prstDash val="solid"/>
-          </a:ln>
-        </p:spPr>
-      </p:sp>
-      <p:sp>
-        <p:nvSpPr>
-          <p:cNvPr id="15" name="Text 12"/>
-          <p:cNvSpPr/>
-          <p:nvPr/>
-        </p:nvSpPr>
-        <p:spPr>
-          <a:xfrm>
-            <a:off x="548640" y="4233672"/>
-            <a:ext cx="329184" cy="329184"/>
-          </a:xfrm>
-          <a:prstGeom prst="rect">
-            <a:avLst/>
-          </a:prstGeom>
-          <a:noFill/>
-          <a:ln/>
-        </p:spPr>
-        <p:txBody>
-          <a:bodyPr wrap="square" lIns="0" tIns="0" rIns="0" bIns="0" rtlCol="0" anchor="ctr"/>
-          <a:lstStyle/>
-          <a:p>
-            <a:pPr algn="ctr" indent="0" marL="0">
-              <a:buNone/>
-            </a:pPr>
-            <a:r>
-              <a:rPr lang="en-US" sz="1300" b="1" dirty="0">
-                <a:solidFill>
-                  <a:srgbClr val="FFFFFF"/>
-                </a:solidFill>
-                <a:latin typeface="Arial" pitchFamily="34" charset="0"/>
-                <a:ea typeface="Arial" pitchFamily="34" charset="-122"/>
-                <a:cs typeface="Arial" pitchFamily="34" charset="-120"/>
-              </a:rPr>
-              <a:t>4</a:t>
-            </a:r>
-            <a:endParaRPr lang="en-US" sz="1300" dirty="0"/>
-          </a:p>
-        </p:txBody>
-      </p:sp>
-      <p:sp>
-        <p:nvSpPr>
-          <p:cNvPr id="16" name="Text 13"/>
-          <p:cNvSpPr/>
-          <p:nvPr/>
-        </p:nvSpPr>
-        <p:spPr>
-          <a:xfrm>
-            <a:off x="1005840" y="4187952"/>
-            <a:ext cx="10637215" cy="868680"/>
-          </a:xfrm>
-          <a:prstGeom prst="rect">
-            <a:avLst/>
-          </a:prstGeom>
-          <a:noFill/>
-          <a:ln/>
-        </p:spPr>
-        <p:txBody>
-          <a:bodyPr wrap="square" lIns="0" tIns="0" rIns="0" bIns="0" rtlCol="0" anchor="t"/>
-          <a:lstStyle/>
-          <a:p>
-            <a:pPr indent="0" marL="0">
-              <a:buNone/>
-            </a:pPr>
-            <a:r>
-              <a:rPr lang="en-US" sz="1800" dirty="0">
-                <a:solidFill>
-                  <a:srgbClr val="1F2328"/>
-                </a:solidFill>
-                <a:latin typeface="Arial" pitchFamily="34" charset="0"/>
-                <a:ea typeface="Arial" pitchFamily="34" charset="-122"/>
-                <a:cs typeface="Arial" pitchFamily="34" charset="-120"/>
-              </a:rPr>
-              <a:t>For the interpretability paper: compare our 11 EMNLP refusal directions with the refusal neuron, as in Experiment 7.</a:t>
-            </a:r>
-            <a:endParaRPr lang="en-US" sz="1800" dirty="0"/>
           </a:p>
         </p:txBody>
       </p:sp>
@@ -33204,6 +36896,528 @@
                 <a:cs typeface="Arial" pitchFamily="34" charset="-120"/>
               </a:rPr>
               <a:t>Inside the residual stream, no single number means anything on its own; only the mix does. Apple's paper looks at a different place, where single numbers can mean something.</a:t>
+            </a:r>
+            <a:endParaRPr lang="en-US" sz="1800" dirty="0"/>
+          </a:p>
+        </p:txBody>
+      </p:sp>
+    </p:spTree>
+  </p:cSld>
+  <p:clrMapOvr>
+    <a:masterClrMapping/>
+  </p:clrMapOvr>
+</p:sld>
+</file>
+
+<file path=ppt/slides/slide30.xml><?xml version="1.0" encoding="utf-8"?>
+<p:sld xmlns:a="http://schemas.openxmlformats.org/drawingml/2006/main" xmlns:r="http://schemas.openxmlformats.org/officeDocument/2006/relationships" xmlns:p="http://schemas.openxmlformats.org/presentationml/2006/main">
+  <p:cSld name="Slide 30">
+    <p:bg>
+      <p:bgPr>
+        <a:solidFill>
+          <a:srgbClr val="FFFFFF"/>
+        </a:solidFill>
+      </p:bgPr>
+    </p:bg>
+    <p:spTree>
+      <p:nvGrpSpPr>
+        <p:cNvPr id="1" name=""/>
+        <p:cNvGrpSpPr/>
+        <p:nvPr/>
+      </p:nvGrpSpPr>
+      <p:grpSpPr>
+        <a:xfrm>
+          <a:off x="0" y="0"/>
+          <a:ext cx="0" cy="0"/>
+          <a:chOff x="0" y="0"/>
+          <a:chExt cx="0" cy="0"/>
+        </a:xfrm>
+      </p:grpSpPr>
+      <p:sp>
+        <p:nvSpPr>
+          <p:cNvPr id="2" name="Text 0"/>
+          <p:cNvSpPr/>
+          <p:nvPr/>
+        </p:nvSpPr>
+        <p:spPr>
+          <a:xfrm>
+            <a:off x="548640" y="566928"/>
+            <a:ext cx="11094415" cy="685800"/>
+          </a:xfrm>
+          <a:prstGeom prst="rect">
+            <a:avLst/>
+          </a:prstGeom>
+          <a:noFill/>
+          <a:ln/>
+        </p:spPr>
+        <p:txBody>
+          <a:bodyPr wrap="square" lIns="0" tIns="0" rIns="0" bIns="0" rtlCol="0" anchor="ctr"/>
+          <a:lstStyle/>
+          <a:p>
+            <a:pPr indent="0" marL="0">
+              <a:buNone/>
+            </a:pPr>
+            <a:r>
+              <a:rPr lang="en-US" sz="2800" b="1" dirty="0">
+                <a:solidFill>
+                  <a:srgbClr val="1F2328"/>
+                </a:solidFill>
+                <a:latin typeface="Arial" pitchFamily="34" charset="0"/>
+                <a:ea typeface="Arial" pitchFamily="34" charset="-122"/>
+                <a:cs typeface="Arial" pitchFamily="34" charset="-120"/>
+              </a:rPr>
+              <a:t>Next steps</a:t>
+            </a:r>
+            <a:endParaRPr lang="en-US" sz="2800" dirty="0"/>
+          </a:p>
+        </p:txBody>
+      </p:sp>
+      <p:sp>
+        <p:nvSpPr>
+          <p:cNvPr id="3" name="Text 1"/>
+          <p:cNvSpPr/>
+          <p:nvPr/>
+        </p:nvSpPr>
+        <p:spPr>
+          <a:xfrm>
+            <a:off x="11094415" y="6400800"/>
+            <a:ext cx="548640" cy="274320"/>
+          </a:xfrm>
+          <a:prstGeom prst="rect">
+            <a:avLst/>
+          </a:prstGeom>
+          <a:noFill/>
+          <a:ln/>
+        </p:spPr>
+        <p:txBody>
+          <a:bodyPr wrap="square" lIns="0" tIns="0" rIns="0" bIns="0" rtlCol="0" anchor="ctr"/>
+          <a:lstStyle/>
+          <a:p>
+            <a:pPr algn="r" indent="0" marL="0">
+              <a:buNone/>
+            </a:pPr>
+            <a:r>
+              <a:rPr lang="en-US" sz="1000" dirty="0">
+                <a:solidFill>
+                  <a:srgbClr val="5F6B7A"/>
+                </a:solidFill>
+                <a:latin typeface="Arial" pitchFamily="34" charset="0"/>
+                <a:ea typeface="Arial" pitchFamily="34" charset="-122"/>
+                <a:cs typeface="Arial" pitchFamily="34" charset="-120"/>
+              </a:rPr>
+              <a:t>30</a:t>
+            </a:r>
+            <a:endParaRPr lang="en-US" sz="1000" dirty="0"/>
+          </a:p>
+        </p:txBody>
+      </p:sp>
+      <p:sp>
+        <p:nvSpPr>
+          <p:cNvPr id="5" name="Shape 2"/>
+          <p:cNvSpPr/>
+          <p:nvPr/>
+        </p:nvSpPr>
+        <p:spPr>
+          <a:xfrm>
+            <a:off x="548640" y="1627632"/>
+            <a:ext cx="329184" cy="329184"/>
+          </a:xfrm>
+          <a:prstGeom prst="ellipse">
+            <a:avLst/>
+          </a:prstGeom>
+          <a:solidFill>
+            <a:srgbClr val="0F766E"/>
+          </a:solidFill>
+          <a:ln w="12700">
+            <a:solidFill>
+              <a:srgbClr val="0F766E"/>
+            </a:solidFill>
+            <a:prstDash val="solid"/>
+          </a:ln>
+        </p:spPr>
+      </p:sp>
+      <p:sp>
+        <p:nvSpPr>
+          <p:cNvPr id="6" name="Text 3"/>
+          <p:cNvSpPr/>
+          <p:nvPr/>
+        </p:nvSpPr>
+        <p:spPr>
+          <a:xfrm>
+            <a:off x="548640" y="1627632"/>
+            <a:ext cx="329184" cy="329184"/>
+          </a:xfrm>
+          <a:prstGeom prst="rect">
+            <a:avLst/>
+          </a:prstGeom>
+          <a:noFill/>
+          <a:ln/>
+        </p:spPr>
+        <p:txBody>
+          <a:bodyPr wrap="square" lIns="0" tIns="0" rIns="0" bIns="0" rtlCol="0" anchor="ctr"/>
+          <a:lstStyle/>
+          <a:p>
+            <a:pPr algn="ctr" indent="0" marL="0">
+              <a:buNone/>
+            </a:pPr>
+            <a:r>
+              <a:rPr lang="en-US" sz="1300" b="1" dirty="0">
+                <a:solidFill>
+                  <a:srgbClr val="FFFFFF"/>
+                </a:solidFill>
+                <a:latin typeface="Arial" pitchFamily="34" charset="0"/>
+                <a:ea typeface="Arial" pitchFamily="34" charset="-122"/>
+                <a:cs typeface="Arial" pitchFamily="34" charset="-120"/>
+              </a:rPr>
+              <a:t>1</a:t>
+            </a:r>
+            <a:endParaRPr lang="en-US" sz="1300" dirty="0"/>
+          </a:p>
+        </p:txBody>
+      </p:sp>
+      <p:sp>
+        <p:nvSpPr>
+          <p:cNvPr id="7" name="Text 4"/>
+          <p:cNvSpPr/>
+          <p:nvPr/>
+        </p:nvSpPr>
+        <p:spPr>
+          <a:xfrm>
+            <a:off x="1005840" y="1581912"/>
+            <a:ext cx="10637215" cy="868680"/>
+          </a:xfrm>
+          <a:prstGeom prst="rect">
+            <a:avLst/>
+          </a:prstGeom>
+          <a:noFill/>
+          <a:ln/>
+        </p:spPr>
+        <p:txBody>
+          <a:bodyPr wrap="square" lIns="0" tIns="0" rIns="0" bIns="0" rtlCol="0" anchor="t"/>
+          <a:lstStyle/>
+          <a:p>
+            <a:pPr indent="0" marL="0">
+              <a:buNone/>
+            </a:pPr>
+            <a:r>
+              <a:rPr lang="en-US" sz="1800" dirty="0">
+                <a:solidFill>
+                  <a:srgbClr val="1F2328"/>
+                </a:solidFill>
+                <a:latin typeface="Arial" pitchFamily="34" charset="0"/>
+                <a:ea typeface="Arial" pitchFamily="34" charset="-122"/>
+                <a:cs typeface="Arial" pitchFamily="34" charset="-120"/>
+              </a:rPr>
+              <a:t>Run the jailbreak in Arabic: pin the neuron on Arabic prompts and judge the Arabic answers.</a:t>
+            </a:r>
+            <a:endParaRPr lang="en-US" sz="1800" dirty="0"/>
+          </a:p>
+        </p:txBody>
+      </p:sp>
+      <p:sp>
+        <p:nvSpPr>
+          <p:cNvPr id="8" name="Shape 5"/>
+          <p:cNvSpPr/>
+          <p:nvPr/>
+        </p:nvSpPr>
+        <p:spPr>
+          <a:xfrm>
+            <a:off x="548640" y="2496312"/>
+            <a:ext cx="329184" cy="329184"/>
+          </a:xfrm>
+          <a:prstGeom prst="ellipse">
+            <a:avLst/>
+          </a:prstGeom>
+          <a:solidFill>
+            <a:srgbClr val="0F766E"/>
+          </a:solidFill>
+          <a:ln w="12700">
+            <a:solidFill>
+              <a:srgbClr val="0F766E"/>
+            </a:solidFill>
+            <a:prstDash val="solid"/>
+          </a:ln>
+        </p:spPr>
+      </p:sp>
+      <p:sp>
+        <p:nvSpPr>
+          <p:cNvPr id="9" name="Text 6"/>
+          <p:cNvSpPr/>
+          <p:nvPr/>
+        </p:nvSpPr>
+        <p:spPr>
+          <a:xfrm>
+            <a:off x="548640" y="2496312"/>
+            <a:ext cx="329184" cy="329184"/>
+          </a:xfrm>
+          <a:prstGeom prst="rect">
+            <a:avLst/>
+          </a:prstGeom>
+          <a:noFill/>
+          <a:ln/>
+        </p:spPr>
+        <p:txBody>
+          <a:bodyPr wrap="square" lIns="0" tIns="0" rIns="0" bIns="0" rtlCol="0" anchor="ctr"/>
+          <a:lstStyle/>
+          <a:p>
+            <a:pPr algn="ctr" indent="0" marL="0">
+              <a:buNone/>
+            </a:pPr>
+            <a:r>
+              <a:rPr lang="en-US" sz="1300" b="1" dirty="0">
+                <a:solidFill>
+                  <a:srgbClr val="FFFFFF"/>
+                </a:solidFill>
+                <a:latin typeface="Arial" pitchFamily="34" charset="0"/>
+                <a:ea typeface="Arial" pitchFamily="34" charset="-122"/>
+                <a:cs typeface="Arial" pitchFamily="34" charset="-120"/>
+              </a:rPr>
+              <a:t>2</a:t>
+            </a:r>
+            <a:endParaRPr lang="en-US" sz="1300" dirty="0"/>
+          </a:p>
+        </p:txBody>
+      </p:sp>
+      <p:sp>
+        <p:nvSpPr>
+          <p:cNvPr id="10" name="Text 7"/>
+          <p:cNvSpPr/>
+          <p:nvPr/>
+        </p:nvSpPr>
+        <p:spPr>
+          <a:xfrm>
+            <a:off x="1005840" y="2450592"/>
+            <a:ext cx="10637215" cy="868680"/>
+          </a:xfrm>
+          <a:prstGeom prst="rect">
+            <a:avLst/>
+          </a:prstGeom>
+          <a:noFill/>
+          <a:ln/>
+        </p:spPr>
+        <p:txBody>
+          <a:bodyPr wrap="square" lIns="0" tIns="0" rIns="0" bIns="0" rtlCol="0" anchor="t"/>
+          <a:lstStyle/>
+          <a:p>
+            <a:pPr indent="0" marL="0">
+              <a:buNone/>
+            </a:pPr>
+            <a:r>
+              <a:rPr lang="en-US" sz="1800" dirty="0">
+                <a:solidFill>
+                  <a:srgbClr val="1F2328"/>
+                </a:solidFill>
+                <a:latin typeface="Arial" pitchFamily="34" charset="0"/>
+                <a:ea typeface="Arial" pitchFamily="34" charset="-122"/>
+                <a:cs typeface="Arial" pitchFamily="34" charset="-120"/>
+              </a:rPr>
+              <a:t>Add a free judge that also checks answers make sense (a local LLM with Apple's judge prompt). It settles Experiment 8 on Llama.</a:t>
+            </a:r>
+            <a:endParaRPr lang="en-US" sz="1800" dirty="0"/>
+          </a:p>
+        </p:txBody>
+      </p:sp>
+      <p:sp>
+        <p:nvSpPr>
+          <p:cNvPr id="11" name="Shape 8"/>
+          <p:cNvSpPr/>
+          <p:nvPr/>
+        </p:nvSpPr>
+        <p:spPr>
+          <a:xfrm>
+            <a:off x="548640" y="3364992"/>
+            <a:ext cx="329184" cy="329184"/>
+          </a:xfrm>
+          <a:prstGeom prst="ellipse">
+            <a:avLst/>
+          </a:prstGeom>
+          <a:solidFill>
+            <a:srgbClr val="0F766E"/>
+          </a:solidFill>
+          <a:ln w="12700">
+            <a:solidFill>
+              <a:srgbClr val="0F766E"/>
+            </a:solidFill>
+            <a:prstDash val="solid"/>
+          </a:ln>
+        </p:spPr>
+      </p:sp>
+      <p:sp>
+        <p:nvSpPr>
+          <p:cNvPr id="12" name="Text 9"/>
+          <p:cNvSpPr/>
+          <p:nvPr/>
+        </p:nvSpPr>
+        <p:spPr>
+          <a:xfrm>
+            <a:off x="548640" y="3364992"/>
+            <a:ext cx="329184" cy="329184"/>
+          </a:xfrm>
+          <a:prstGeom prst="rect">
+            <a:avLst/>
+          </a:prstGeom>
+          <a:noFill/>
+          <a:ln/>
+        </p:spPr>
+        <p:txBody>
+          <a:bodyPr wrap="square" lIns="0" tIns="0" rIns="0" bIns="0" rtlCol="0" anchor="ctr"/>
+          <a:lstStyle/>
+          <a:p>
+            <a:pPr algn="ctr" indent="0" marL="0">
+              <a:buNone/>
+            </a:pPr>
+            <a:r>
+              <a:rPr lang="en-US" sz="1300" b="1" dirty="0">
+                <a:solidFill>
+                  <a:srgbClr val="FFFFFF"/>
+                </a:solidFill>
+                <a:latin typeface="Arial" pitchFamily="34" charset="0"/>
+                <a:ea typeface="Arial" pitchFamily="34" charset="-122"/>
+                <a:cs typeface="Arial" pitchFamily="34" charset="-120"/>
+              </a:rPr>
+              <a:t>3</a:t>
+            </a:r>
+            <a:endParaRPr lang="en-US" sz="1300" dirty="0"/>
+          </a:p>
+        </p:txBody>
+      </p:sp>
+      <p:sp>
+        <p:nvSpPr>
+          <p:cNvPr id="13" name="Text 10"/>
+          <p:cNvSpPr/>
+          <p:nvPr/>
+        </p:nvSpPr>
+        <p:spPr>
+          <a:xfrm>
+            <a:off x="1005840" y="3319272"/>
+            <a:ext cx="10637215" cy="868680"/>
+          </a:xfrm>
+          <a:prstGeom prst="rect">
+            <a:avLst/>
+          </a:prstGeom>
+          <a:noFill/>
+          <a:ln/>
+        </p:spPr>
+        <p:txBody>
+          <a:bodyPr wrap="square" lIns="0" tIns="0" rIns="0" bIns="0" rtlCol="0" anchor="t"/>
+          <a:lstStyle/>
+          <a:p>
+            <a:pPr indent="0" marL="0">
+              <a:buNone/>
+            </a:pPr>
+            <a:r>
+              <a:rPr lang="en-US" sz="1800" dirty="0">
+                <a:solidFill>
+                  <a:srgbClr val="1F2328"/>
+                </a:solidFill>
+                <a:latin typeface="Arial" pitchFamily="34" charset="0"/>
+                <a:ea typeface="Arial" pitchFamily="34" charset="-122"/>
+                <a:cs typeface="Arial" pitchFamily="34" charset="-120"/>
+              </a:rPr>
+              <a:t>More languages (high- and low-resource), then images and speech, using models that share a backbone with these.</a:t>
+            </a:r>
+            <a:endParaRPr lang="en-US" sz="1800" dirty="0"/>
+          </a:p>
+        </p:txBody>
+      </p:sp>
+      <p:sp>
+        <p:nvSpPr>
+          <p:cNvPr id="14" name="Shape 11"/>
+          <p:cNvSpPr/>
+          <p:nvPr/>
+        </p:nvSpPr>
+        <p:spPr>
+          <a:xfrm>
+            <a:off x="548640" y="4233672"/>
+            <a:ext cx="329184" cy="329184"/>
+          </a:xfrm>
+          <a:prstGeom prst="ellipse">
+            <a:avLst/>
+          </a:prstGeom>
+          <a:solidFill>
+            <a:srgbClr val="0F766E"/>
+          </a:solidFill>
+          <a:ln w="12700">
+            <a:solidFill>
+              <a:srgbClr val="0F766E"/>
+            </a:solidFill>
+            <a:prstDash val="solid"/>
+          </a:ln>
+        </p:spPr>
+      </p:sp>
+      <p:sp>
+        <p:nvSpPr>
+          <p:cNvPr id="15" name="Text 12"/>
+          <p:cNvSpPr/>
+          <p:nvPr/>
+        </p:nvSpPr>
+        <p:spPr>
+          <a:xfrm>
+            <a:off x="548640" y="4233672"/>
+            <a:ext cx="329184" cy="329184"/>
+          </a:xfrm>
+          <a:prstGeom prst="rect">
+            <a:avLst/>
+          </a:prstGeom>
+          <a:noFill/>
+          <a:ln/>
+        </p:spPr>
+        <p:txBody>
+          <a:bodyPr wrap="square" lIns="0" tIns="0" rIns="0" bIns="0" rtlCol="0" anchor="ctr"/>
+          <a:lstStyle/>
+          <a:p>
+            <a:pPr algn="ctr" indent="0" marL="0">
+              <a:buNone/>
+            </a:pPr>
+            <a:r>
+              <a:rPr lang="en-US" sz="1300" b="1" dirty="0">
+                <a:solidFill>
+                  <a:srgbClr val="FFFFFF"/>
+                </a:solidFill>
+                <a:latin typeface="Arial" pitchFamily="34" charset="0"/>
+                <a:ea typeface="Arial" pitchFamily="34" charset="-122"/>
+                <a:cs typeface="Arial" pitchFamily="34" charset="-120"/>
+              </a:rPr>
+              <a:t>4</a:t>
+            </a:r>
+            <a:endParaRPr lang="en-US" sz="1300" dirty="0"/>
+          </a:p>
+        </p:txBody>
+      </p:sp>
+      <p:sp>
+        <p:nvSpPr>
+          <p:cNvPr id="16" name="Text 13"/>
+          <p:cNvSpPr/>
+          <p:nvPr/>
+        </p:nvSpPr>
+        <p:spPr>
+          <a:xfrm>
+            <a:off x="1005840" y="4187952"/>
+            <a:ext cx="10637215" cy="868680"/>
+          </a:xfrm>
+          <a:prstGeom prst="rect">
+            <a:avLst/>
+          </a:prstGeom>
+          <a:noFill/>
+          <a:ln/>
+        </p:spPr>
+        <p:txBody>
+          <a:bodyPr wrap="square" lIns="0" tIns="0" rIns="0" bIns="0" rtlCol="0" anchor="t"/>
+          <a:lstStyle/>
+          <a:p>
+            <a:pPr indent="0" marL="0">
+              <a:buNone/>
+            </a:pPr>
+            <a:r>
+              <a:rPr lang="en-US" sz="1800" dirty="0">
+                <a:solidFill>
+                  <a:srgbClr val="1F2328"/>
+                </a:solidFill>
+                <a:latin typeface="Arial" pitchFamily="34" charset="0"/>
+                <a:ea typeface="Arial" pitchFamily="34" charset="-122"/>
+                <a:cs typeface="Arial" pitchFamily="34" charset="-120"/>
+              </a:rPr>
+              <a:t>For the interpretability paper: compare our 11 EMNLP refusal directions with the refusal neuron, as in Experiment 7.</a:t>
             </a:r>
             <a:endParaRPr lang="en-US" sz="1800" dirty="0"/>
           </a:p>
